--- a/presentations/m5-session-1-from-prompts-to-harnesses.pptx
+++ b/presentations/m5-session-1-from-prompts-to-harnesses.pptx
@@ -871,7 +871,7 @@
           <a:lstStyle/>
           <a:p>
             <a:r>
-              <a:t>Run the three cells live if you can. The same model answers all three times; the only thing that changes is what surrounds it. Better words do not add facts the model does not have - the prompt-engineered version is more polite and equally wrong. The harness adds a library, a way to search it, and a check before answering. Class question: what would you have to add to the prompt to make the bare model right, and would that scale to the next question?</a:t>
+              <a:t>Run the three cells live if you can. The same model answers all three times; the only thing that changes is what surrounds it. Better words do not add facts the model does not have - the prompt-engineered version is more polite and equally wrong. The harness adds a library, a way to search it, and a check before answering. The first three rows are the reference run on the stand-in, so the numbers are exact; the fourth row is the live demo on claude-opus-5 with a 2026 fact no model can know from training, and its wording changes every run. Class question: what would you have to add to the prompt to make the bare model right, and would that scale to the next question?</a:t>
             </a:r>
           </a:p>
         </p:txBody>
@@ -1011,7 +1011,7 @@
           <a:lstStyle/>
           <a:p>
             <a:r>
-              <a:t>This picture is what every harness produces if you ask it to. Read it as a story: the model did not know the date, so it searched; it found a document, so it read it; it drafted an answer and had it checked; the check passed, so it answered. The trace is also where debugging happens in Session 3. Class question: where in this trace would a wrong answer have been caught?</a:t>
+              <a:t>This picture is what every harness produces if you ask it to. Read it as a story: the model did not know the date, so it searched; it found a document, so it read it; it drafted an answer and had it checked; the check passed, so it answered. The trace is also where debugging happens in Session 3. On live Claude the trace has the same shape but the number of calls and the tokens differ from run to run. Class question: where in this trace would a wrong answer have been caught?</a:t>
             </a:r>
           </a:p>
         </p:txBody>
@@ -1081,7 +1081,7 @@
           <a:lstStyle/>
           <a:p>
             <a:r>
-              <a:t>Nothing is free. Every tool result is pasted into the context and the model reads it again on the next call. That is why Session 2 spends time on token-efficient tools and on compaction. Anthropic reported that its multi-agent research system used about 15 times the tokens of a chat, and accepted the bill because the task was worth it. Class question: for which questions would you refuse to pay 76x?</a:t>
+              <a:t>Nothing is free. Every tool result is pasted into the context and the model reads it again on the next call. That is why Session 2 spends time on token-efficient tools and on compaction. Anthropic reported that its multi-agent research system used about 15 times the tokens of a chat, and accepted the bill because the task was worth it. The live Claude run prints real usage from the API instead of the estimate. Class question: for which questions would you refuse to pay 76x?</a:t>
             </a:r>
           </a:p>
         </p:txBody>
@@ -1361,7 +1361,7 @@
           <a:lstStyle/>
           <a:p>
             <a:r>
-              <a:t>Recap the seven lines, then point at the exercises at the end of notebook 01: they extend the 15-line loop. Next session opens the four pieces the model sees: models, context, tools and skills. Class question to close: which of the eight pieces did notebook 01's harness NOT have, and what could go wrong because of it?</a:t>
+              <a:t>Recap the seven lines. The last one is the course mechanics: with an ANTHROPIC_API_KEY in a git-ignored .env the notebooks run on real Claude; without one they run on the deterministic stand-in, which is where every number on these slides comes from. Then point at the exercises at the end of notebook 01: they extend the 15-line loop. Next session opens the four pieces the model sees: models, context, tools and skills. Class question to close: which of the eight pieces did notebook 01's harness NOT have, and what could go wrong because of it?</a:t>
             </a:r>
           </a:p>
         </p:txBody>
@@ -7345,7 +7345,7 @@
                           </a:solidFill>
                           <a:latin typeface="Arial"/>
                         </a:rPr>
-                        <a:t>ScriptedModel in notebook 01 - no API key needed</a:t>
+                        <a:t>model_for('research'): Claude with a key in .env, the stand-in without</a:t>
                       </a:r>
                     </a:p>
                   </a:txBody>
@@ -8412,7 +8412,7 @@
         </p:nvGraphicFramePr>
         <p:xfrm>
           <a:off x="548640" y="1874519"/>
-          <a:ext cx="11091670" cy="1828800"/>
+          <a:ext cx="11091670" cy="2286000"/>
         </p:xfrm>
         <a:graphic>
           <a:graphicData uri="http://schemas.openxmlformats.org/drawingml/2006/table">
@@ -8882,6 +8882,120 @@
                   </a:tcPr>
                 </a:tc>
               </a:tr>
+              <a:tr h="457200">
+                <a:tc>
+                  <a:txBody>
+                    <a:bodyPr wrap="square"/>
+                    <a:lstStyle/>
+                    <a:p>
+                      <a:pPr algn="l">
+                        <a:spcAft>
+                          <a:spcPts val="0"/>
+                        </a:spcAft>
+                        <a:buNone/>
+                      </a:pPr>
+                      <a:r>
+                        <a:rPr sz="1250" b="0">
+                          <a:solidFill>
+                            <a:srgbClr val="202B38"/>
+                          </a:solidFill>
+                          <a:latin typeface="Arial"/>
+                        </a:rPr>
+                        <a:t>Live demo (claude-opus-5)</a:t>
+                      </a:r>
+                    </a:p>
+                  </a:txBody>
+                  <a:tcPr>
+                    <a:solidFill>
+                      <a:srgbClr val="EEF3FD"/>
+                    </a:solidFill>
+                  </a:tcPr>
+                </a:tc>
+                <a:tc>
+                  <a:txBody>
+                    <a:bodyPr wrap="square"/>
+                    <a:lstStyle/>
+                    <a:p>
+                      <a:pPr algn="l">
+                        <a:spcAft>
+                          <a:spcPts val="0"/>
+                        </a:spcAft>
+                        <a:buNone/>
+                      </a:pPr>
+                      <a:r>
+                        <a:rPr sz="1250" b="0">
+                          <a:solidFill>
+                            <a:srgbClr val="202B38"/>
+                          </a:solidFill>
+                          <a:latin typeface="Arial"/>
+                        </a:rPr>
+                        <a:t>A 2026 question no model knows from training: what share of security rules in instruction files is backed by a real control?</a:t>
+                      </a:r>
+                    </a:p>
+                  </a:txBody>
+                  <a:tcPr>
+                    <a:solidFill>
+                      <a:srgbClr val="EEF3FD"/>
+                    </a:solidFill>
+                  </a:tcPr>
+                </a:tc>
+                <a:tc>
+                  <a:txBody>
+                    <a:bodyPr wrap="square"/>
+                    <a:lstStyle/>
+                    <a:p>
+                      <a:pPr algn="l">
+                        <a:spcAft>
+                          <a:spcPts val="0"/>
+                        </a:spcAft>
+                        <a:buNone/>
+                      </a:pPr>
+                      <a:r>
+                        <a:rPr sz="1250" b="0">
+                          <a:solidFill>
+                            <a:srgbClr val="202B38"/>
+                          </a:solidFill>
+                          <a:latin typeface="Arial"/>
+                        </a:rPr>
+                        <a:t>'4.4% ...' with a [source: id] citation - wording varies run to run</a:t>
+                      </a:r>
+                    </a:p>
+                  </a:txBody>
+                  <a:tcPr>
+                    <a:solidFill>
+                      <a:srgbClr val="EEF3FD"/>
+                    </a:solidFill>
+                  </a:tcPr>
+                </a:tc>
+                <a:tc>
+                  <a:txBody>
+                    <a:bodyPr wrap="square"/>
+                    <a:lstStyle/>
+                    <a:p>
+                      <a:pPr algn="l">
+                        <a:spcAft>
+                          <a:spcPts val="0"/>
+                        </a:spcAft>
+                        <a:buNone/>
+                      </a:pPr>
+                      <a:r>
+                        <a:rPr sz="1250" b="0">
+                          <a:solidFill>
+                            <a:srgbClr val="202B38"/>
+                          </a:solidFill>
+                          <a:latin typeface="Arial"/>
+                        </a:rPr>
+                        <a:t>Real Claude, real tokens; the harness supplies the fact</a:t>
+                      </a:r>
+                    </a:p>
+                  </a:txBody>
+                  <a:tcPr>
+                    <a:solidFill>
+                      <a:srgbClr val="EEF3FD"/>
+                    </a:solidFill>
+                  </a:tcPr>
+                </a:tc>
+              </a:tr>
             </a:tbl>
           </a:graphicData>
         </a:graphic>
@@ -8921,7 +9035,7 @@
                 </a:solidFill>
                 <a:latin typeface="Arial"/>
               </a:rPr>
-              <a:t>The question: 'When did Anthropic open-source the Model Context Protocol, and which company adopted it in March 2025?' Same ScriptedModel in all three runs.</a:t>
+              <a:t>Rows 1-3: reference run on the deterministic stand-in; the live run on Claude varies and reports real tokens. Row 4: the notebook's live demo (Marmelab, Sep 2026 figure).</a:t>
             </a:r>
           </a:p>
         </p:txBody>
@@ -10272,7 +10386,7 @@
                 </a:solidFill>
                 <a:latin typeface="Arial"/>
               </a:rPr>
-              <a:t>Steps and counts from notebook 01 (4 model calls, 3 tool calls, ~1,980 estimated tokens). The estimate counts characters; a real API reports exact tokens.</a:t>
+              <a:t>Reference run on the deterministic stand-in (4 model calls, 3 tool calls, ~1,980 estimated tokens); the live run on Claude varies and reports real tokens.</a:t>
             </a:r>
           </a:p>
         </p:txBody>
@@ -10789,7 +10903,7 @@
                 </a:solidFill>
                 <a:latin typeface="Arial"/>
               </a:rPr>
-              <a:t>Estimated tokens from notebook 01 (character-based estimate, deterministic ScriptedModel). Anthropic's research system ran at ~15x a chat's tokens (Jun 2025).</a:t>
+              <a:t>Reference run on the deterministic stand-in; the live run on Claude varies and reports real tokens. Anthropic's research system ran at ~15x a chat's tokens (Jun 2025).</a:t>
             </a:r>
           </a:p>
         </p:txBody>
@@ -11687,7 +11801,7 @@
                 </a:solidFill>
                 <a:latin typeface="Arial"/>
               </a:rPr>
-              <a:t>How to read it: left, the loop notebook 01 writes inline; right, what each line does. Anthropic, Claude Agent SDK, Sep 2025: gather context, act, verify, repeat.</a:t>
+              <a:t>How to read it: left, the loop notebook 01 writes inline (same loop for the stand-in and for Claude); right, what each line does. Anthropic, Claude Agent SDK, Sep 2025.</a:t>
             </a:r>
           </a:p>
         </p:txBody>
@@ -12117,7 +12231,7 @@
                 </a:solidFill>
                 <a:latin typeface="Arial"/>
               </a:rPr>
-              <a:t>arXiv 2605.23950, May 2026; arXiv 2609.11987, Sep 2026. Our notebook shows the same effect at toy scale: one ScriptedModel, a wrong answer without a harness and a cited one with it.</a:t>
+              <a:t>arXiv 2605.23950, May 2026; arXiv 2609.11987, Sep 2026. Our notebook shows the same effect at toy scale: the stand-in reference run is wrong without a harness and cited with it; the live Claude run varies and reports real tokens.</a:t>
             </a:r>
           </a:p>
         </p:txBody>
@@ -12724,7 +12838,7 @@
                 </a:solidFill>
                 <a:latin typeface="Arial"/>
               </a:rPr>
-              <a:t>Practice now, zero setup: notebook 01 in Colab, Runtime &gt; Run all, then the exercises before the solutions</a:t>
+              <a:t>Two engines, one harness: model_for(role) returns Claude when a key is present, the stand-in otherwise - notebook 01 runs either way</a:t>
             </a:r>
           </a:p>
         </p:txBody>

--- a/presentations/m5-session-1-from-prompts-to-harnesses.pptx
+++ b/presentations/m5-session-1-from-prompts-to-harnesses.pptx
@@ -25,6 +25,8 @@
     <p:sldId id="273" r:id="rId25"/>
     <p:sldId id="274" r:id="rId26"/>
     <p:sldId id="275" r:id="rId27"/>
+    <p:sldId id="276" r:id="rId28"/>
+    <p:sldId id="277" r:id="rId29"/>
   </p:sldIdLst>
   <p:sldSz cx="12191695" cy="6858000" type="screen4x3"/>
   <p:notesSz cx="6858000" cy="9144000"/>
@@ -801,7 +803,7 @@
           <a:lstStyle/>
           <a:p>
             <a:r>
-              <a:t>Open notebook 01 in Colab now; the first cell downloads the small harness library, no key needed. Everything in Part 2 is printed by the notebook, so students can follow on their own screen. Class question: what do you expect the bare model to answer, and why?</a:t>
+              <a:t>Open notebook 01 now. It needs an ANTHROPIC_API_KEY in a git-ignored .env at the repository root, or a Colab secret; the setup cell stops with one sentence if it finds none. Everything in Part 2 is printed by the notebook from a real run, recorded on 30 Sep 2026. A live run today differs in wording, route and tokens, and the notebook says 'in the run recorded here' wherever it quotes a result. Class question: what do you expect the bare model to answer about a repository it has never seen, and why?</a:t>
             </a:r>
           </a:p>
         </p:txBody>
@@ -871,7 +873,7 @@
           <a:lstStyle/>
           <a:p>
             <a:r>
-              <a:t>Run the three cells live if you can. The same model answers all three times; the only thing that changes is what surrounds it. Better words do not add facts the model does not have - the prompt-engineered version is more polite and equally wrong. The harness adds a library, a way to search it, and a check before answering. The first three rows are the reference run on the stand-in, so the numbers are exact; the fourth row is the live demo on claude-opus-5 with a 2026 fact no model can know from training, and its wording changes every run. Class question: what would you have to add to the prompt to make the bare model right, and would that scale to the next question?</a:t>
+              <a:t>Three things to point at in the setup cell: the key never appears in an output, the client is created once, and the model facts come from the API, not from memory. The question is chosen so that no model can know it and one file in this repository settles it. Read the three answers aloud. The first two are honest about not knowing, which is good behaviour, but they contain no checkable fact. The third gives the version, the count and the path. Class question: the first two answers both mention notebooks.yml; does that mean the model knew the file, or guessed a conventional name?</a:t>
             </a:r>
           </a:p>
         </p:txBody>
@@ -941,7 +943,7 @@
           <a:lstStyle/>
           <a:p>
             <a:r>
-              <a:t>Point at the docstrings in the notebook: the first paragraph becomes the description the model reads, and each 'argument: explanation' line becomes the schema of that argument. Nothing is hidden. Class question: what happens if search_docs's description just said 'Searches'?</a:t>
+              <a:t>Walk the eight lines in order and name the four shapes the model and the harness exchange: the messages list, the tools parameter, the tool_use block the model returns, and the tool_result block you send back. Two stop conditions, both in your code: the ceiling on turns and the stop reason. Everything else in a production harness, permissions, budgets, traces, sub-agents, is added around these lines, never instead of them. Class question: which line would you change first to add a token budget, and which one to refuse a dangerous tool?</a:t>
             </a:r>
           </a:p>
         </p:txBody>
@@ -1011,7 +1013,7 @@
           <a:lstStyle/>
           <a:p>
             <a:r>
-              <a:t>This picture is what every harness produces if you ask it to. Read it as a story: the model did not know the date, so it searched; it found a document, so it read it; it drafted an answer and had it checked; the check passed, so it answered. The trace is also where debugging happens in Session 3. On live Claude the trace has the same shape but the number of calls and the tokens differ from run to run. Class question: where in this trace would a wrong answer have been caught?</a:t>
+              <a:t>Read it as a story. The model cannot know where the workflow file is, so it lists the root and the workflows folder in one turn; the loop runs both tools and sends both results back together. It then reads the one file that matters and answers with the fact and the path. Point at the input tokens: 702, 1,052, 2,359. Every call re-sends the whole conversation, including the 2,809-character file, which is where the cost of a harness goes and the subject of Session 2. Class question: what would the third call have cost if the README, at almost 17,000 characters, had been read instead of the workflow file?</a:t>
             </a:r>
           </a:p>
         </p:txBody>
@@ -1081,7 +1083,7 @@
           <a:lstStyle/>
           <a:p>
             <a:r>
-              <a:t>Nothing is free. Every tool result is pasted into the context and the model reads it again on the next call. That is why Session 2 spends time on token-efficient tools and on compaction. Anthropic reported that its multi-agent research system used about 15 times the tokens of a chat, and accepted the bill because the task was worth it. The live Claude run prints real usage from the API instead of the estimate. Class question: for which questions would you refuse to pay 76x?</a:t>
+              <a:t>This is the notebook's own table, checked mechanically: the checker parses notebooks.yml for the Python version and the matrix size, so the notebook cannot drift from the repository. The column that matters is 'gives the fact'. 'Names the file' is weaker evidence: the two prompt-only answers offer notebooks.yml as a typical name to go and look for, the harness cites it as the file it read. Class question: which column would you add to catch an answer that names the right file but quotes the wrong version?</a:t>
             </a:r>
           </a:p>
         </p:txBody>
@@ -1151,7 +1153,7 @@
           <a:lstStyle/>
           <a:p>
             <a:r>
-              <a:t>Have the students count the lines: eight shown here, fifteen with the Message class and the tool registry. Everything else in a production harness - permissions, compaction, traces, sub-agents - is added around these lines, never instead of them. Class question: which line would you change first to add a token budget?</a:t>
+              <a:t>Nothing is free. Every tool result is pasted into the context and the model reads it again on the next call. Note the surprise in the output column: the two prompt-only answers wrote more, because they spent their output explaining what they would need; the harness wrote less, because it had the fact. Session 2 is about keeping the input bill down: context budgets, compaction, notes outside the window. Class question: for which questions would you refuse to pay 0.03 USD, and for which would you happily pay 3 USD?</a:t>
             </a:r>
           </a:p>
         </p:txBody>
@@ -1221,7 +1223,7 @@
           <a:lstStyle/>
           <a:p>
             <a:r>
-              <a:t>Close the loop with the evidence slide. At benchmark scale the harness moves the score by 9.5 points; at notebook scale it moves the answer from wrong to right and cited. Same lesson, two scales. Class question: if you could only change the model or only change the harness for your project, which would you pick and why?</a:t>
+              <a:t>Show the generated schema next to the hand-written one: the decorator kept the docstring, turned the type hint into the schema and added additionalProperties false. Then the runner: one for loop, one call to generate_tool_call_response per iteration, and the same three calls as before. This is the right default for a small agent, and it is also the point where the harness starts: tools, refusals, stop conditions, measurement and tests are yours to add. Session 3 builds them as a small package with a trace, a budget, hooks and an eval suite. Class question: name one thing the runner cannot decide for you.</a:t>
             </a:r>
           </a:p>
         </p:txBody>
@@ -1361,7 +1363,147 @@
           <a:lstStyle/>
           <a:p>
             <a:r>
-              <a:t>Recap the seven lines. The last one is the course mechanics: with an ANTHROPIC_API_KEY in a git-ignored .env the notebooks run on real Claude; without one they run on the deterministic stand-in, which is where every number on these slides comes from. Then point at the exercises at the end of notebook 01: they extend the 15-line loop. Next session opens the four pieces the model sees: models, context, tools and skills. Class question to close: which of the eight pieces did notebook 01's harness NOT have, and what could go wrong because of it?</a:t>
+              <a:t>You have already met four pieces today on the raw SDK: the model behind one call, the context as a messages list, tools as JSON, and the loop. Read the other columns as the map of the module: Session 3 turns the loop into a package with hooks, a trace and evals; the labs show the same pieces inside Claude Code as files you can open; CI runs the unit tests always and the evals when the key is present. Class question: which of the eight would you build first if you had one afternoon, and which would you borrow?</a:t>
+            </a:r>
+          </a:p>
+        </p:txBody>
+      </p:sp>
+      <p:sp>
+        <p:nvSpPr>
+          <p:cNvPr id="4" name="Slide Number Placeholder 3"/>
+          <p:cNvSpPr>
+            <a:spLocks noGrp="1"/>
+          </p:cNvSpPr>
+          <p:nvPr>
+            <p:ph type="sldNum" idx="5" sz="quarter"/>
+          </p:nvPr>
+        </p:nvSpPr>
+        <p:spPr/>
+      </p:sp>
+    </p:spTree>
+  </p:cSld>
+  <p:clrMapOvr>
+    <a:masterClrMapping/>
+  </p:clrMapOvr>
+</p:notes>
+</file>
+
+<file path=ppt/notesSlides/notesSlide21.xml><?xml version="1.0" encoding="utf-8"?>
+<p:notes xmlns:a="http://schemas.openxmlformats.org/drawingml/2006/main" xmlns:p="http://schemas.openxmlformats.org/presentationml/2006/main" xmlns:r="http://schemas.openxmlformats.org/officeDocument/2006/relationships">
+  <p:cSld>
+    <p:spTree>
+      <p:nvGrpSpPr>
+        <p:cNvPr id="1" name=""/>
+        <p:cNvGrpSpPr/>
+        <p:nvPr/>
+      </p:nvGrpSpPr>
+      <p:grpSpPr>
+        <a:xfrm>
+          <a:off x="0" y="0"/>
+          <a:ext cx="0" cy="0"/>
+          <a:chOff x="0" y="0"/>
+          <a:chExt cx="0" cy="0"/>
+        </a:xfrm>
+      </p:grpSpPr>
+      <p:sp>
+        <p:nvSpPr>
+          <p:cNvPr id="2" name="Slide Image Placeholder 1"/>
+          <p:cNvSpPr>
+            <a:spLocks noGrp="1"/>
+          </p:cNvSpPr>
+          <p:nvPr>
+            <p:ph type="sldImg" idx="2"/>
+          </p:nvPr>
+        </p:nvSpPr>
+        <p:spPr/>
+      </p:sp>
+      <p:sp>
+        <p:nvSpPr>
+          <p:cNvPr id="3" name="Notes Placeholder 2"/>
+          <p:cNvSpPr>
+            <a:spLocks noGrp="1"/>
+          </p:cNvSpPr>
+          <p:nvPr>
+            <p:ph type="body" idx="3" sz="quarter"/>
+          </p:nvPr>
+        </p:nvSpPr>
+        <p:spPr/>
+        <p:txBody>
+          <a:bodyPr/>
+          <a:lstStyle/>
+          <a:p>
+            <a:r>
+              <a:t>Close the loop with the evidence slide. At benchmark scale the harness moves the score by 9.5 points; at notebook scale it moves the answer from 'I cannot know' to the fact and the file. Same lesson, two scales. Class question: if you could only change the model or only change the harness for your project, which would you pick and why?</a:t>
+            </a:r>
+          </a:p>
+        </p:txBody>
+      </p:sp>
+      <p:sp>
+        <p:nvSpPr>
+          <p:cNvPr id="4" name="Slide Number Placeholder 3"/>
+          <p:cNvSpPr>
+            <a:spLocks noGrp="1"/>
+          </p:cNvSpPr>
+          <p:nvPr>
+            <p:ph type="sldNum" idx="5" sz="quarter"/>
+          </p:nvPr>
+        </p:nvSpPr>
+        <p:spPr/>
+      </p:sp>
+    </p:spTree>
+  </p:cSld>
+  <p:clrMapOvr>
+    <a:masterClrMapping/>
+  </p:clrMapOvr>
+</p:notes>
+</file>
+
+<file path=ppt/notesSlides/notesSlide22.xml><?xml version="1.0" encoding="utf-8"?>
+<p:notes xmlns:a="http://schemas.openxmlformats.org/drawingml/2006/main" xmlns:p="http://schemas.openxmlformats.org/presentationml/2006/main" xmlns:r="http://schemas.openxmlformats.org/officeDocument/2006/relationships">
+  <p:cSld>
+    <p:spTree>
+      <p:nvGrpSpPr>
+        <p:cNvPr id="1" name=""/>
+        <p:cNvGrpSpPr/>
+        <p:nvPr/>
+      </p:nvGrpSpPr>
+      <p:grpSpPr>
+        <a:xfrm>
+          <a:off x="0" y="0"/>
+          <a:ext cx="0" cy="0"/>
+          <a:chOff x="0" y="0"/>
+          <a:chExt cx="0" cy="0"/>
+        </a:xfrm>
+      </p:grpSpPr>
+      <p:sp>
+        <p:nvSpPr>
+          <p:cNvPr id="2" name="Slide Image Placeholder 1"/>
+          <p:cNvSpPr>
+            <a:spLocks noGrp="1"/>
+          </p:cNvSpPr>
+          <p:nvPr>
+            <p:ph type="sldImg" idx="2"/>
+          </p:nvPr>
+        </p:nvSpPr>
+        <p:spPr/>
+      </p:sp>
+      <p:sp>
+        <p:nvSpPr>
+          <p:cNvPr id="3" name="Notes Placeholder 2"/>
+          <p:cNvSpPr>
+            <a:spLocks noGrp="1"/>
+          </p:cNvSpPr>
+          <p:nvPr>
+            <p:ph type="body" idx="3" sz="quarter"/>
+          </p:nvPr>
+        </p:nvSpPr>
+        <p:spPr/>
+        <p:txBody>
+          <a:bodyPr/>
+          <a:lstStyle/>
+          <a:p>
+            <a:r>
+              <a:t>Recap the seven lines, then point at the exercises at the end of notebook 01, all with executed solutions from the same recorded run: a third tool count_lines (the model called it straight away and got 49 lines in 2 model calls); max_turns=1 (the model asked for 2 listings, the tools ran, and the only answer was 'I'll explore the repository structure first.', stopped because max_turns); the trap question 'How many students took this course?' (3 model calls, 2 tool calls, 0.0562 USD, the most expensive run in the notebook, and a plain 'the repository doesn't contain that'); and claude-sonnet-5 on the same harness (3 model calls, 2 tool calls, 3,783 input tokens, 0.0106 USD against 0.0293, both give the fact). The whole notebook billed 17 model calls, 24,077 input tokens, 2,704 output tokens and 0.1720 USD. Next session opens the four pieces the model sees: models, context, tools and skills. Class question to close: which of the eight pieces did notebook 01's loop NOT have, and what could go wrong because of it?</a:t>
             </a:r>
           </a:p>
         </p:txBody>
@@ -7345,7 +7487,7 @@
                           </a:solidFill>
                           <a:latin typeface="Arial"/>
                         </a:rPr>
-                        <a:t>model_for('research'): Claude with a key in .env, the stand-in without</a:t>
+                        <a:t>client.messages.create(model='claude-opus-5'); client.models.retrieve for its real facts</a:t>
                       </a:r>
                     </a:p>
                   </a:txBody>
@@ -7431,7 +7573,7 @@
                           </a:solidFill>
                           <a:latin typeface="Arial"/>
                         </a:rPr>
-                        <a:t>The bare and the improved prompt</a:t>
+                        <a:t>The bare prompt and the careful system prompt</a:t>
                       </a:r>
                     </a:p>
                   </a:txBody>
@@ -7517,7 +7659,7 @@
                           </a:solidFill>
                           <a:latin typeface="Arial"/>
                         </a:rPr>
-                        <a:t>The system prompt plus the tool results in the trace</a:t>
+                        <a:t>The system prompt, the messages list and every tool result; usage.input_tokens counts it</a:t>
                       </a:r>
                     </a:p>
                   </a:txBody>
@@ -7603,7 +7745,7 @@
                           </a:solidFill>
                           <a:latin typeface="Arial"/>
                         </a:rPr>
-                        <a:t>search_docs, read_doc, check_citation</a:t>
+                        <a:t>list_files and read_file, once as Python and once as JSON (name, description, input_schema)</a:t>
                       </a:r>
                     </a:p>
                   </a:txBody>
@@ -7689,7 +7831,7 @@
                           </a:solidFill>
                           <a:latin typeface="Arial"/>
                         </a:rPr>
-                        <a:t>The 15-line loop</a:t>
+                        <a:t>The forty-line loop run_agent; then the SDK's tool_runner</a:t>
                       </a:r>
                     </a:p>
                   </a:txBody>
@@ -7719,7 +7861,7 @@
                           </a:solidFill>
                           <a:latin typeface="Arial"/>
                         </a:rPr>
-                        <a:t>Trace</a:t>
+                        <a:t>Usage</a:t>
                       </a:r>
                     </a:p>
                   </a:txBody>
@@ -7747,7 +7889,7 @@
                           </a:solidFill>
                           <a:latin typeface="Arial"/>
                         </a:rPr>
-                        <a:t>The record of every step: messages, tool calls, tokens, time</a:t>
+                        <a:t>The receipt the API returns with every response: input_tokens and output_tokens</a:t>
                       </a:r>
                     </a:p>
                   </a:txBody>
@@ -7775,7 +7917,7 @@
                           </a:solidFill>
                           <a:latin typeface="Arial"/>
                         </a:rPr>
-                        <a:t>result.trace.show()</a:t>
+                        <a:t>response.usage after every call; cost_usd turns it into dollars; the bill at the end</a:t>
                       </a:r>
                     </a:p>
                   </a:txBody>
@@ -8047,7 +8189,7 @@
                 </a:solidFill>
                 <a:latin typeface="Arial"/>
               </a:rPr>
-              <a:t>Part 2 - The practice: one question, three ways</a:t>
+              <a:t>Part 2 - The practice: one question, three ways, on the raw SDK</a:t>
             </a:r>
           </a:p>
         </p:txBody>
@@ -8087,7 +8229,7 @@
                 </a:solidFill>
                 <a:latin typeface="Arial"/>
               </a:rPr>
-              <a:t>Notebook 01: a bare prompt, a better prompt, and a 15-line harness answer the same question. Then we read the trace.</a:t>
+              <a:t>Notebook 01: a bare prompt, a careful system prompt, and a forty-line loop with two tools answer the same question about this repository, on the real claude-opus-5.</a:t>
             </a:r>
           </a:p>
         </p:txBody>
@@ -8313,7 +8455,7 @@
                 </a:solidFill>
                 <a:latin typeface="Arial"/>
               </a:rPr>
-              <a:t>NOTEBOOK 01, SECTIONS 1-3</a:t>
+              <a:t>NOTEBOOK 01, SETUP AND SECTION 3</a:t>
             </a:r>
           </a:p>
         </p:txBody>
@@ -8353,7 +8495,7 @@
                 </a:solidFill>
                 <a:latin typeface="Arial"/>
               </a:rPr>
-              <a:t>One question, three answers: only the harness gets the facts and shows its source</a:t>
+              <a:t>The setup: a real client, a real model, and a question no model can know from training</a:t>
             </a:r>
           </a:p>
         </p:txBody>
@@ -8402,6 +8544,750 @@
           </a:p>
         </p:txBody>
       </p:sp>
+      <p:sp>
+        <p:nvSpPr>
+          <p:cNvPr id="7" name="Rectangle 6"/>
+          <p:cNvSpPr/>
+          <p:nvPr/>
+        </p:nvSpPr>
+        <p:spPr>
+          <a:xfrm>
+            <a:off x="548640" y="1874519"/>
+            <a:ext cx="5394960" cy="3977639"/>
+          </a:xfrm>
+          <a:prstGeom prst="rect">
+            <a:avLst/>
+          </a:prstGeom>
+          <a:solidFill>
+            <a:srgbClr val="EEF3FD"/>
+          </a:solidFill>
+          <a:ln>
+            <a:noFill/>
+          </a:ln>
+          <a:effectLst/>
+        </p:spPr>
+        <p:style>
+          <a:lnRef idx="1">
+            <a:schemeClr val="accent1"/>
+          </a:lnRef>
+          <a:fillRef idx="3">
+            <a:schemeClr val="accent1"/>
+          </a:fillRef>
+          <a:effectRef idx="2">
+            <a:schemeClr val="accent1"/>
+          </a:effectRef>
+          <a:fontRef idx="minor">
+            <a:schemeClr val="lt1"/>
+          </a:fontRef>
+        </p:style>
+        <p:txBody>
+          <a:bodyPr rtlCol="0" anchor="ctr"/>
+          <a:lstStyle/>
+          <a:p>
+            <a:pPr algn="ctr"/>
+          </a:p>
+        </p:txBody>
+      </p:sp>
+      <p:sp>
+        <p:nvSpPr>
+          <p:cNvPr id="8" name="TextBox 7"/>
+          <p:cNvSpPr txBox="1"/>
+          <p:nvPr/>
+        </p:nvSpPr>
+        <p:spPr>
+          <a:xfrm>
+            <a:off x="777240" y="2039111"/>
+            <a:ext cx="4937760" cy="365760"/>
+          </a:xfrm>
+          <a:prstGeom prst="rect">
+            <a:avLst/>
+          </a:prstGeom>
+          <a:noFill/>
+        </p:spPr>
+        <p:txBody>
+          <a:bodyPr wrap="square">
+            <a:spAutoFit/>
+          </a:bodyPr>
+          <a:lstStyle/>
+          <a:p>
+            <a:pPr algn="l">
+              <a:spcAft>
+                <a:spcPts val="600"/>
+              </a:spcAft>
+              <a:buNone/>
+            </a:pPr>
+            <a:r>
+              <a:rPr sz="1500" b="1">
+                <a:solidFill>
+                  <a:srgbClr val="0A2540"/>
+                </a:solidFill>
+                <a:latin typeface="Arial"/>
+              </a:rPr>
+              <a:t>What we send</a:t>
+            </a:r>
+          </a:p>
+        </p:txBody>
+      </p:sp>
+      <p:sp>
+        <p:nvSpPr>
+          <p:cNvPr id="9" name="TextBox 8"/>
+          <p:cNvSpPr txBox="1"/>
+          <p:nvPr/>
+        </p:nvSpPr>
+        <p:spPr>
+          <a:xfrm>
+            <a:off x="777240" y="2441447"/>
+            <a:ext cx="4937760" cy="3246119"/>
+          </a:xfrm>
+          <a:prstGeom prst="rect">
+            <a:avLst/>
+          </a:prstGeom>
+          <a:noFill/>
+        </p:spPr>
+        <p:txBody>
+          <a:bodyPr wrap="square">
+            <a:spAutoFit/>
+          </a:bodyPr>
+          <a:lstStyle/>
+          <a:p>
+            <a:pPr algn="l" indent="-228600" marL="228600">
+              <a:spcAft>
+                <a:spcPts val="600"/>
+              </a:spcAft>
+              <a:buClr>
+                <a:srgbClr val="1E5EF3"/>
+              </a:buClr>
+              <a:buChar char="—"/>
+            </a:pPr>
+            <a:r>
+              <a:rPr sz="1200" b="0">
+                <a:solidFill>
+                  <a:srgbClr val="202B38"/>
+                </a:solidFill>
+                <a:latin typeface="Arial"/>
+              </a:rPr>
+              <a:t>The official Anthropic SDK 1.9.0; the key comes from .env through dotenv_values and goes to the client, nowhere else</a:t>
+            </a:r>
+          </a:p>
+          <a:p>
+            <a:pPr algn="l" indent="-228600" marL="228600">
+              <a:spcAft>
+                <a:spcPts val="600"/>
+              </a:spcAft>
+              <a:buClr>
+                <a:srgbClr val="1E5EF3"/>
+              </a:buClr>
+              <a:buChar char="—"/>
+            </a:pPr>
+            <a:r>
+              <a:rPr sz="1200" b="0">
+                <a:solidFill>
+                  <a:srgbClr val="202B38"/>
+                </a:solidFill>
+                <a:latin typeface="Arial"/>
+              </a:rPr>
+              <a:t>client.models.retrieve: Claude Opus 5, a 1,000,000-token context window, 128,000 output tokens at most</a:t>
+            </a:r>
+          </a:p>
+          <a:p>
+            <a:pPr algn="l" indent="-228600" marL="228600">
+              <a:spcAft>
+                <a:spcPts val="600"/>
+              </a:spcAft>
+              <a:buClr>
+                <a:srgbClr val="1E5EF3"/>
+              </a:buClr>
+              <a:buChar char="—"/>
+            </a:pPr>
+            <a:r>
+              <a:rPr sz="1200" b="0">
+                <a:solidFill>
+                  <a:srgbClr val="202B38"/>
+                </a:solidFill>
+                <a:latin typeface="Arial"/>
+              </a:rPr>
+              <a:t>Every call: max_tokens 2000 and effort medium, so only the machinery around the model changes</a:t>
+            </a:r>
+          </a:p>
+          <a:p>
+            <a:pPr algn="l" indent="-228600" marL="228600">
+              <a:spcAft>
+                <a:spcPts val="600"/>
+              </a:spcAft>
+              <a:buClr>
+                <a:srgbClr val="1E5EF3"/>
+              </a:buClr>
+              <a:buChar char="—"/>
+            </a:pPr>
+            <a:r>
+              <a:rPr sz="1200" b="0">
+                <a:solidFill>
+                  <a:srgbClr val="202B38"/>
+                </a:solidFill>
+                <a:latin typeface="Arial"/>
+              </a:rPr>
+              <a:t>The question: which Python version does the notebook workflow use, and how many notebooks does its matrix run?</a:t>
+            </a:r>
+          </a:p>
+          <a:p>
+            <a:pPr algn="l" indent="-228600" marL="228600">
+              <a:spcAft>
+                <a:spcPts val="600"/>
+              </a:spcAft>
+              <a:buClr>
+                <a:srgbClr val="1E5EF3"/>
+              </a:buClr>
+              <a:buChar char="—"/>
+            </a:pPr>
+            <a:r>
+              <a:rPr sz="1200" b="0">
+                <a:solidFill>
+                  <a:srgbClr val="202B38"/>
+                </a:solidFill>
+                <a:latin typeface="Arial"/>
+              </a:rPr>
+              <a:t>The file that settles it, .github/workflows/notebooks.yml: python-version 3.12 and 9 notebooks in the matrix</a:t>
+            </a:r>
+          </a:p>
+        </p:txBody>
+      </p:sp>
+      <p:sp>
+        <p:nvSpPr>
+          <p:cNvPr id="10" name="Rectangle 9"/>
+          <p:cNvSpPr/>
+          <p:nvPr/>
+        </p:nvSpPr>
+        <p:spPr>
+          <a:xfrm>
+            <a:off x="6245352" y="1874519"/>
+            <a:ext cx="5394960" cy="3977639"/>
+          </a:xfrm>
+          <a:prstGeom prst="rect">
+            <a:avLst/>
+          </a:prstGeom>
+          <a:solidFill>
+            <a:srgbClr val="EEF3FD"/>
+          </a:solidFill>
+          <a:ln>
+            <a:noFill/>
+          </a:ln>
+          <a:effectLst/>
+        </p:spPr>
+        <p:style>
+          <a:lnRef idx="1">
+            <a:schemeClr val="accent1"/>
+          </a:lnRef>
+          <a:fillRef idx="3">
+            <a:schemeClr val="accent1"/>
+          </a:fillRef>
+          <a:effectRef idx="2">
+            <a:schemeClr val="accent1"/>
+          </a:effectRef>
+          <a:fontRef idx="minor">
+            <a:schemeClr val="lt1"/>
+          </a:fontRef>
+        </p:style>
+        <p:txBody>
+          <a:bodyPr rtlCol="0" anchor="ctr"/>
+          <a:lstStyle/>
+          <a:p>
+            <a:pPr algn="ctr"/>
+          </a:p>
+        </p:txBody>
+      </p:sp>
+      <p:sp>
+        <p:nvSpPr>
+          <p:cNvPr id="11" name="TextBox 10"/>
+          <p:cNvSpPr txBox="1"/>
+          <p:nvPr/>
+        </p:nvSpPr>
+        <p:spPr>
+          <a:xfrm>
+            <a:off x="6473952" y="2039111"/>
+            <a:ext cx="4937760" cy="365760"/>
+          </a:xfrm>
+          <a:prstGeom prst="rect">
+            <a:avLst/>
+          </a:prstGeom>
+          <a:noFill/>
+        </p:spPr>
+        <p:txBody>
+          <a:bodyPr wrap="square">
+            <a:spAutoFit/>
+          </a:bodyPr>
+          <a:lstStyle/>
+          <a:p>
+            <a:pPr algn="l">
+              <a:spcAft>
+                <a:spcPts val="600"/>
+              </a:spcAft>
+              <a:buNone/>
+            </a:pPr>
+            <a:r>
+              <a:rPr sz="1500" b="1">
+                <a:solidFill>
+                  <a:srgbClr val="0A2540"/>
+                </a:solidFill>
+                <a:latin typeface="Arial"/>
+              </a:rPr>
+              <a:t>What came back, in the recorded run</a:t>
+            </a:r>
+          </a:p>
+        </p:txBody>
+      </p:sp>
+      <p:sp>
+        <p:nvSpPr>
+          <p:cNvPr id="12" name="TextBox 11"/>
+          <p:cNvSpPr txBox="1"/>
+          <p:nvPr/>
+        </p:nvSpPr>
+        <p:spPr>
+          <a:xfrm>
+            <a:off x="6473952" y="2441447"/>
+            <a:ext cx="4937760" cy="3246119"/>
+          </a:xfrm>
+          <a:prstGeom prst="rect">
+            <a:avLst/>
+          </a:prstGeom>
+          <a:noFill/>
+        </p:spPr>
+        <p:txBody>
+          <a:bodyPr wrap="square">
+            <a:spAutoFit/>
+          </a:bodyPr>
+          <a:lstStyle/>
+          <a:p>
+            <a:pPr algn="l" indent="-228600" marL="228600">
+              <a:spcAft>
+                <a:spcPts val="600"/>
+              </a:spcAft>
+              <a:buClr>
+                <a:srgbClr val="1E5EF3"/>
+              </a:buClr>
+              <a:buChar char="—"/>
+            </a:pPr>
+            <a:r>
+              <a:rPr sz="1200" b="0">
+                <a:solidFill>
+                  <a:srgbClr val="202B38"/>
+                </a:solidFill>
+                <a:latin typeface="Arial"/>
+              </a:rPr>
+              <a:t>Bare prompt: 'I don't have access to the repository you're referring to ... Paste the workflow YAML and I'll give you the exact version and count.'</a:t>
+            </a:r>
+          </a:p>
+          <a:p>
+            <a:pPr algn="l" indent="-228600" marL="228600">
+              <a:spcAft>
+                <a:spcPts val="600"/>
+              </a:spcAft>
+              <a:buClr>
+                <a:srgbClr val="1E5EF3"/>
+              </a:buClr>
+              <a:buChar char="—"/>
+            </a:pPr>
+            <a:r>
+              <a:rPr sz="1200" b="0">
+                <a:solidFill>
+                  <a:srgbClr val="202B38"/>
+                </a:solidFill>
+                <a:latin typeface="Arial"/>
+              </a:rPr>
+              <a:t>Careful system prompt: 'I can't answer that - I have no access to this repository's files', then the file name as a place to look</a:t>
+            </a:r>
+          </a:p>
+          <a:p>
+            <a:pPr algn="l" indent="-228600" marL="228600">
+              <a:spcAft>
+                <a:spcPts val="600"/>
+              </a:spcAft>
+              <a:buClr>
+                <a:srgbClr val="1E5EF3"/>
+              </a:buClr>
+              <a:buChar char="—"/>
+            </a:pPr>
+            <a:r>
+              <a:rPr sz="1200" b="0">
+                <a:solidFill>
+                  <a:srgbClr val="202B38"/>
+                </a:solidFill>
+                <a:latin typeface="Arial"/>
+              </a:rPr>
+              <a:t>Harness, two tools and a loop: 'Python 3.12, and the execute job's matrix runs 9 notebooks ... Source: .github/workflows/notebooks.yml'</a:t>
+            </a:r>
+          </a:p>
+          <a:p>
+            <a:pPr algn="l" indent="-228600" marL="228600">
+              <a:spcAft>
+                <a:spcPts val="600"/>
+              </a:spcAft>
+              <a:buClr>
+                <a:srgbClr val="1E5EF3"/>
+              </a:buClr>
+              <a:buChar char="—"/>
+            </a:pPr>
+            <a:r>
+              <a:rPr sz="1200" b="0">
+                <a:solidFill>
+                  <a:srgbClr val="202B38"/>
+                </a:solidFill>
+                <a:latin typeface="Arial"/>
+              </a:rPr>
+              <a:t>Same model, same effort, three times; only the third answer can be checked by opening the file</a:t>
+            </a:r>
+          </a:p>
+        </p:txBody>
+      </p:sp>
+      <p:sp>
+        <p:nvSpPr>
+          <p:cNvPr id="13" name="TextBox 12"/>
+          <p:cNvSpPr txBox="1"/>
+          <p:nvPr/>
+        </p:nvSpPr>
+        <p:spPr>
+          <a:xfrm>
+            <a:off x="548640" y="6053328"/>
+            <a:ext cx="11091672" cy="502920"/>
+          </a:xfrm>
+          <a:prstGeom prst="rect">
+            <a:avLst/>
+          </a:prstGeom>
+          <a:noFill/>
+        </p:spPr>
+        <p:txBody>
+          <a:bodyPr wrap="square">
+            <a:spAutoFit/>
+          </a:bodyPr>
+          <a:lstStyle/>
+          <a:p>
+            <a:pPr algn="l">
+              <a:spcAft>
+                <a:spcPts val="600"/>
+              </a:spcAft>
+              <a:buNone/>
+            </a:pPr>
+            <a:r>
+              <a:rPr sz="1200" b="0">
+                <a:solidFill>
+                  <a:srgbClr val="1E5EF3"/>
+                </a:solidFill>
+                <a:latin typeface="Arial"/>
+              </a:rPr>
+              <a:t>Recorded run on claude-opus-5, 30 Sep 2026; live runs vary in wording and route. Model facts from client.models.retrieve; the expected answer is parsed from the workflow file by the notebook itself, not typed by hand.</a:t>
+            </a:r>
+          </a:p>
+        </p:txBody>
+      </p:sp>
+      <p:sp>
+        <p:nvSpPr>
+          <p:cNvPr id="14" name="TextBox 13"/>
+          <p:cNvSpPr txBox="1"/>
+          <p:nvPr/>
+        </p:nvSpPr>
+        <p:spPr>
+          <a:xfrm>
+            <a:off x="548640" y="6473952"/>
+            <a:ext cx="7315200" cy="292608"/>
+          </a:xfrm>
+          <a:prstGeom prst="rect">
+            <a:avLst/>
+          </a:prstGeom>
+          <a:noFill/>
+        </p:spPr>
+        <p:txBody>
+          <a:bodyPr wrap="square">
+            <a:spAutoFit/>
+          </a:bodyPr>
+          <a:lstStyle/>
+          <a:p>
+            <a:pPr algn="l">
+              <a:spcAft>
+                <a:spcPts val="600"/>
+              </a:spcAft>
+              <a:buNone/>
+            </a:pPr>
+            <a:r>
+              <a:rPr sz="900" b="0">
+                <a:solidFill>
+                  <a:srgbClr val="5B6774"/>
+                </a:solidFill>
+                <a:latin typeface="Arial"/>
+              </a:rPr>
+              <a:t>M5 Session 1 - From Prompts to Harnesses</a:t>
+            </a:r>
+          </a:p>
+        </p:txBody>
+      </p:sp>
+      <p:sp>
+        <p:nvSpPr>
+          <p:cNvPr id="15" name="TextBox 14"/>
+          <p:cNvSpPr txBox="1"/>
+          <p:nvPr/>
+        </p:nvSpPr>
+        <p:spPr>
+          <a:xfrm>
+            <a:off x="11292840" y="6473952"/>
+            <a:ext cx="548640" cy="292608"/>
+          </a:xfrm>
+          <a:prstGeom prst="rect">
+            <a:avLst/>
+          </a:prstGeom>
+          <a:noFill/>
+        </p:spPr>
+        <p:txBody>
+          <a:bodyPr wrap="square">
+            <a:spAutoFit/>
+          </a:bodyPr>
+          <a:lstStyle/>
+          <a:p>
+            <a:pPr algn="r">
+              <a:spcAft>
+                <a:spcPts val="600"/>
+              </a:spcAft>
+              <a:buNone/>
+            </a:pPr>
+            <a:r>
+              <a:rPr sz="900" b="0">
+                <a:solidFill>
+                  <a:srgbClr val="5B6774"/>
+                </a:solidFill>
+                <a:latin typeface="Arial"/>
+              </a:rPr>
+              <a:t>14</a:t>
+            </a:r>
+          </a:p>
+        </p:txBody>
+      </p:sp>
+    </p:spTree>
+  </p:cSld>
+  <p:clrMapOvr>
+    <a:masterClrMapping/>
+  </p:clrMapOvr>
+</p:sld>
+</file>
+
+<file path=ppt/slides/slide15.xml><?xml version="1.0" encoding="utf-8"?>
+<p:sld xmlns:a="http://schemas.openxmlformats.org/drawingml/2006/main" xmlns:p="http://schemas.openxmlformats.org/presentationml/2006/main" xmlns:r="http://schemas.openxmlformats.org/officeDocument/2006/relationships">
+  <p:cSld>
+    <p:spTree>
+      <p:nvGrpSpPr>
+        <p:cNvPr id="1" name=""/>
+        <p:cNvGrpSpPr/>
+        <p:nvPr/>
+      </p:nvGrpSpPr>
+      <p:grpSpPr/>
+      <p:sp>
+        <p:nvSpPr>
+          <p:cNvPr id="2" name="Rectangle 1"/>
+          <p:cNvSpPr/>
+          <p:nvPr/>
+        </p:nvSpPr>
+        <p:spPr>
+          <a:xfrm>
+            <a:off x="0" y="0"/>
+            <a:ext cx="12191695" cy="6858000"/>
+          </a:xfrm>
+          <a:prstGeom prst="rect">
+            <a:avLst/>
+          </a:prstGeom>
+          <a:solidFill>
+            <a:srgbClr val="FFFFFF"/>
+          </a:solidFill>
+          <a:ln>
+            <a:noFill/>
+          </a:ln>
+          <a:effectLst/>
+        </p:spPr>
+        <p:style>
+          <a:lnRef idx="1">
+            <a:schemeClr val="accent1"/>
+          </a:lnRef>
+          <a:fillRef idx="3">
+            <a:schemeClr val="accent1"/>
+          </a:fillRef>
+          <a:effectRef idx="2">
+            <a:schemeClr val="accent1"/>
+          </a:effectRef>
+          <a:fontRef idx="minor">
+            <a:schemeClr val="lt1"/>
+          </a:fontRef>
+        </p:style>
+        <p:txBody>
+          <a:bodyPr rtlCol="0" anchor="ctr"/>
+          <a:lstStyle/>
+          <a:p>
+            <a:pPr algn="ctr"/>
+          </a:p>
+        </p:txBody>
+      </p:sp>
+      <p:sp>
+        <p:nvSpPr>
+          <p:cNvPr id="3" name="Rectangle 2"/>
+          <p:cNvSpPr/>
+          <p:nvPr/>
+        </p:nvSpPr>
+        <p:spPr>
+          <a:xfrm>
+            <a:off x="548640" y="475488"/>
+            <a:ext cx="457200" cy="54864"/>
+          </a:xfrm>
+          <a:prstGeom prst="rect">
+            <a:avLst/>
+          </a:prstGeom>
+          <a:solidFill>
+            <a:srgbClr val="1E5EF3"/>
+          </a:solidFill>
+          <a:ln>
+            <a:noFill/>
+          </a:ln>
+          <a:effectLst/>
+        </p:spPr>
+        <p:style>
+          <a:lnRef idx="1">
+            <a:schemeClr val="accent1"/>
+          </a:lnRef>
+          <a:fillRef idx="3">
+            <a:schemeClr val="accent1"/>
+          </a:fillRef>
+          <a:effectRef idx="2">
+            <a:schemeClr val="accent1"/>
+          </a:effectRef>
+          <a:fontRef idx="minor">
+            <a:schemeClr val="lt1"/>
+          </a:fontRef>
+        </p:style>
+        <p:txBody>
+          <a:bodyPr rtlCol="0" anchor="ctr"/>
+          <a:lstStyle/>
+          <a:p>
+            <a:pPr algn="ctr"/>
+          </a:p>
+        </p:txBody>
+      </p:sp>
+      <p:sp>
+        <p:nvSpPr>
+          <p:cNvPr id="4" name="TextBox 3"/>
+          <p:cNvSpPr txBox="1"/>
+          <p:nvPr/>
+        </p:nvSpPr>
+        <p:spPr>
+          <a:xfrm>
+            <a:off x="548640" y="603504"/>
+            <a:ext cx="11091672" cy="274320"/>
+          </a:xfrm>
+          <a:prstGeom prst="rect">
+            <a:avLst/>
+          </a:prstGeom>
+          <a:noFill/>
+        </p:spPr>
+        <p:txBody>
+          <a:bodyPr wrap="square">
+            <a:spAutoFit/>
+          </a:bodyPr>
+          <a:lstStyle/>
+          <a:p>
+            <a:pPr algn="l">
+              <a:spcAft>
+                <a:spcPts val="600"/>
+              </a:spcAft>
+              <a:buNone/>
+            </a:pPr>
+            <a:r>
+              <a:rPr sz="1100" b="1">
+                <a:solidFill>
+                  <a:srgbClr val="1E5EF3"/>
+                </a:solidFill>
+                <a:latin typeface="Arial"/>
+              </a:rPr>
+              <a:t>NOTEBOOK 01, SECTION 3.3</a:t>
+            </a:r>
+          </a:p>
+        </p:txBody>
+      </p:sp>
+      <p:sp>
+        <p:nvSpPr>
+          <p:cNvPr id="5" name="TextBox 4"/>
+          <p:cNvSpPr txBox="1"/>
+          <p:nvPr/>
+        </p:nvSpPr>
+        <p:spPr>
+          <a:xfrm>
+            <a:off x="548640" y="868680"/>
+            <a:ext cx="11091672" cy="777240"/>
+          </a:xfrm>
+          <a:prstGeom prst="rect">
+            <a:avLst/>
+          </a:prstGeom>
+          <a:noFill/>
+        </p:spPr>
+        <p:txBody>
+          <a:bodyPr wrap="square">
+            <a:spAutoFit/>
+          </a:bodyPr>
+          <a:lstStyle/>
+          <a:p>
+            <a:pPr algn="l">
+              <a:spcAft>
+                <a:spcPts val="0"/>
+              </a:spcAft>
+              <a:buNone/>
+            </a:pPr>
+            <a:r>
+              <a:rPr sz="2600" b="1">
+                <a:solidFill>
+                  <a:srgbClr val="0A2540"/>
+                </a:solidFill>
+                <a:latin typeface="Arial"/>
+              </a:rPr>
+              <a:t>The forty-line loop: messages in, tool_use out, tool_result back, until the model stops asking</a:t>
+            </a:r>
+          </a:p>
+        </p:txBody>
+      </p:sp>
+      <p:sp>
+        <p:nvSpPr>
+          <p:cNvPr id="6" name="Rectangle 5"/>
+          <p:cNvSpPr/>
+          <p:nvPr/>
+        </p:nvSpPr>
+        <p:spPr>
+          <a:xfrm>
+            <a:off x="548640" y="1664208"/>
+            <a:ext cx="11091672" cy="12801"/>
+          </a:xfrm>
+          <a:prstGeom prst="rect">
+            <a:avLst/>
+          </a:prstGeom>
+          <a:solidFill>
+            <a:srgbClr val="B9D0FA"/>
+          </a:solidFill>
+          <a:ln>
+            <a:noFill/>
+          </a:ln>
+          <a:effectLst/>
+        </p:spPr>
+        <p:style>
+          <a:lnRef idx="1">
+            <a:schemeClr val="accent1"/>
+          </a:lnRef>
+          <a:fillRef idx="3">
+            <a:schemeClr val="accent1"/>
+          </a:fillRef>
+          <a:effectRef idx="2">
+            <a:schemeClr val="accent1"/>
+          </a:effectRef>
+          <a:fontRef idx="minor">
+            <a:schemeClr val="lt1"/>
+          </a:fontRef>
+        </p:style>
+        <p:txBody>
+          <a:bodyPr rtlCol="0" anchor="ctr"/>
+          <a:lstStyle/>
+          <a:p>
+            <a:pPr algn="ctr"/>
+          </a:p>
+        </p:txBody>
+      </p:sp>
       <p:graphicFrame>
         <p:nvGraphicFramePr>
           <p:cNvPr id="7" name="Table 6"/>
@@ -8412,7 +9298,7 @@
         </p:nvGraphicFramePr>
         <p:xfrm>
           <a:off x="548640" y="1874519"/>
-          <a:ext cx="11091670" cy="2286000"/>
+          <a:ext cx="11091671" cy="4114800"/>
         </p:xfrm>
         <a:graphic>
           <a:graphicData uri="http://schemas.openxmlformats.org/drawingml/2006/table">
@@ -8421,10 +9307,8 @@
                 <a:tableStyleId>{5C22544A-7EE6-4342-B048-85BDC9FD1C3A}</a:tableStyleId>
               </a:tblPr>
               <a:tblGrid>
-                <a:gridCol w="1487907"/>
-                <a:gridCol w="2570021"/>
-                <a:gridCol w="4057928"/>
-                <a:gridCol w="2975814"/>
+                <a:gridCol w="6140032"/>
+                <a:gridCol w="4951639"/>
               </a:tblGrid>
               <a:tr h="457200">
                 <a:tc>
@@ -8445,2821 +9329,7 @@
                           </a:solidFill>
                           <a:latin typeface="Arial"/>
                         </a:rPr>
-                        <a:t>Approach</a:t>
-                      </a:r>
-                    </a:p>
-                  </a:txBody>
-                  <a:tcPr>
-                    <a:solidFill>
-                      <a:srgbClr val="0A2540"/>
-                    </a:solidFill>
-                  </a:tcPr>
-                </a:tc>
-                <a:tc>
-                  <a:txBody>
-                    <a:bodyPr wrap="square"/>
-                    <a:lstStyle/>
-                    <a:p>
-                      <a:pPr algn="l">
-                        <a:spcAft>
-                          <a:spcPts val="0"/>
-                        </a:spcAft>
-                        <a:buNone/>
-                      </a:pPr>
-                      <a:r>
-                        <a:rPr sz="1300" b="1">
-                          <a:solidFill>
-                            <a:srgbClr val="FFFFFF"/>
-                          </a:solidFill>
-                          <a:latin typeface="Arial"/>
-                        </a:rPr>
-                        <a:t>What we send</a:t>
-                      </a:r>
-                    </a:p>
-                  </a:txBody>
-                  <a:tcPr>
-                    <a:solidFill>
-                      <a:srgbClr val="0A2540"/>
-                    </a:solidFill>
-                  </a:tcPr>
-                </a:tc>
-                <a:tc>
-                  <a:txBody>
-                    <a:bodyPr wrap="square"/>
-                    <a:lstStyle/>
-                    <a:p>
-                      <a:pPr algn="l">
-                        <a:spcAft>
-                          <a:spcPts val="0"/>
-                        </a:spcAft>
-                        <a:buNone/>
-                      </a:pPr>
-                      <a:r>
-                        <a:rPr sz="1300" b="1">
-                          <a:solidFill>
-                            <a:srgbClr val="FFFFFF"/>
-                          </a:solidFill>
-                          <a:latin typeface="Arial"/>
-                        </a:rPr>
-                        <a:t>What comes back</a:t>
-                      </a:r>
-                    </a:p>
-                  </a:txBody>
-                  <a:tcPr>
-                    <a:solidFill>
-                      <a:srgbClr val="0A2540"/>
-                    </a:solidFill>
-                  </a:tcPr>
-                </a:tc>
-                <a:tc>
-                  <a:txBody>
-                    <a:bodyPr wrap="square"/>
-                    <a:lstStyle/>
-                    <a:p>
-                      <a:pPr algn="l">
-                        <a:spcAft>
-                          <a:spcPts val="0"/>
-                        </a:spcAft>
-                        <a:buNone/>
-                      </a:pPr>
-                      <a:r>
-                        <a:rPr sz="1300" b="1">
-                          <a:solidFill>
-                            <a:srgbClr val="FFFFFF"/>
-                          </a:solidFill>
-                          <a:latin typeface="Arial"/>
-                        </a:rPr>
-                        <a:t>Verdict</a:t>
-                      </a:r>
-                    </a:p>
-                  </a:txBody>
-                  <a:tcPr>
-                    <a:solidFill>
-                      <a:srgbClr val="0A2540"/>
-                    </a:solidFill>
-                  </a:tcPr>
-                </a:tc>
-              </a:tr>
-              <a:tr h="457200">
-                <a:tc>
-                  <a:txBody>
-                    <a:bodyPr wrap="square"/>
-                    <a:lstStyle/>
-                    <a:p>
-                      <a:pPr algn="l">
-                        <a:spcAft>
-                          <a:spcPts val="0"/>
-                        </a:spcAft>
-                        <a:buNone/>
-                      </a:pPr>
-                      <a:r>
-                        <a:rPr sz="1250" b="0">
-                          <a:solidFill>
-                            <a:srgbClr val="202B38"/>
-                          </a:solidFill>
-                          <a:latin typeface="Arial"/>
-                        </a:rPr>
-                        <a:t>Bare model</a:t>
-                      </a:r>
-                    </a:p>
-                  </a:txBody>
-                  <a:tcPr>
-                    <a:solidFill>
-                      <a:srgbClr val="FFFFFF"/>
-                    </a:solidFill>
-                  </a:tcPr>
-                </a:tc>
-                <a:tc>
-                  <a:txBody>
-                    <a:bodyPr wrap="square"/>
-                    <a:lstStyle/>
-                    <a:p>
-                      <a:pPr algn="l">
-                        <a:spcAft>
-                          <a:spcPts val="0"/>
-                        </a:spcAft>
-                        <a:buNone/>
-                      </a:pPr>
-                      <a:r>
-                        <a:rPr sz="1250" b="0">
-                          <a:solidFill>
-                            <a:srgbClr val="202B38"/>
-                          </a:solidFill>
-                          <a:latin typeface="Arial"/>
-                        </a:rPr>
-                        <a:t>The question, nothing else</a:t>
-                      </a:r>
-                    </a:p>
-                  </a:txBody>
-                  <a:tcPr>
-                    <a:solidFill>
-                      <a:srgbClr val="FFFFFF"/>
-                    </a:solidFill>
-                  </a:tcPr>
-                </a:tc>
-                <a:tc>
-                  <a:txBody>
-                    <a:bodyPr wrap="square"/>
-                    <a:lstStyle/>
-                    <a:p>
-                      <a:pPr algn="l">
-                        <a:spcAft>
-                          <a:spcPts val="0"/>
-                        </a:spcAft>
-                        <a:buNone/>
-                      </a:pPr>
-                      <a:r>
-                        <a:rPr sz="1250" b="0">
-                          <a:solidFill>
-                            <a:srgbClr val="202B38"/>
-                          </a:solidFill>
-                          <a:latin typeface="Arial"/>
-                        </a:rPr>
-                        <a:t>'Anthropic released the Model Context Protocol in 2023 and Google adopted it in 2024.'</a:t>
-                      </a:r>
-                    </a:p>
-                  </a:txBody>
-                  <a:tcPr>
-                    <a:solidFill>
-                      <a:srgbClr val="FFFFFF"/>
-                    </a:solidFill>
-                  </a:tcPr>
-                </a:tc>
-                <a:tc>
-                  <a:txBody>
-                    <a:bodyPr wrap="square"/>
-                    <a:lstStyle/>
-                    <a:p>
-                      <a:pPr algn="l">
-                        <a:spcAft>
-                          <a:spcPts val="0"/>
-                        </a:spcAft>
-                        <a:buNone/>
-                      </a:pPr>
-                      <a:r>
-                        <a:rPr sz="1250" b="0">
-                          <a:solidFill>
-                            <a:srgbClr val="202B38"/>
-                          </a:solidFill>
-                          <a:latin typeface="Arial"/>
-                        </a:rPr>
-                        <a:t>Wrong year, wrong company, no source. 1 turn, ~26 tokens</a:t>
-                      </a:r>
-                    </a:p>
-                  </a:txBody>
-                  <a:tcPr>
-                    <a:solidFill>
-                      <a:srgbClr val="FFFFFF"/>
-                    </a:solidFill>
-                  </a:tcPr>
-                </a:tc>
-              </a:tr>
-              <a:tr h="457200">
-                <a:tc>
-                  <a:txBody>
-                    <a:bodyPr wrap="square"/>
-                    <a:lstStyle/>
-                    <a:p>
-                      <a:pPr algn="l">
-                        <a:spcAft>
-                          <a:spcPts val="0"/>
-                        </a:spcAft>
-                        <a:buNone/>
-                      </a:pPr>
-                      <a:r>
-                        <a:rPr sz="1250" b="0">
-                          <a:solidFill>
-                            <a:srgbClr val="202B38"/>
-                          </a:solidFill>
-                          <a:latin typeface="Arial"/>
-                        </a:rPr>
-                        <a:t>Prompt-engineered</a:t>
-                      </a:r>
-                    </a:p>
-                  </a:txBody>
-                  <a:tcPr>
-                    <a:solidFill>
-                      <a:srgbClr val="EEF3FD"/>
-                    </a:solidFill>
-                  </a:tcPr>
-                </a:tc>
-                <a:tc>
-                  <a:txBody>
-                    <a:bodyPr wrap="square"/>
-                    <a:lstStyle/>
-                    <a:p>
-                      <a:pPr algn="l">
-                        <a:spcAft>
-                          <a:spcPts val="0"/>
-                        </a:spcAft>
-                        <a:buNone/>
-                      </a:pPr>
-                      <a:r>
-                        <a:rPr sz="1250" b="0">
-                          <a:solidFill>
-                            <a:srgbClr val="202B38"/>
-                          </a:solidFill>
-                          <a:latin typeface="Arial"/>
-                        </a:rPr>
-                        <a:t>The question plus 'If you are not sure, say so'</a:t>
-                      </a:r>
-                    </a:p>
-                  </a:txBody>
-                  <a:tcPr>
-                    <a:solidFill>
-                      <a:srgbClr val="EEF3FD"/>
-                    </a:solidFill>
-                  </a:tcPr>
-                </a:tc>
-                <a:tc>
-                  <a:txBody>
-                    <a:bodyPr wrap="square"/>
-                    <a:lstStyle/>
-                    <a:p>
-                      <a:pPr algn="l">
-                        <a:spcAft>
-                          <a:spcPts val="0"/>
-                        </a:spcAft>
-                        <a:buNone/>
-                      </a:pPr>
-                      <a:r>
-                        <a:rPr sz="1250" b="0">
-                          <a:solidFill>
-                            <a:srgbClr val="202B38"/>
-                          </a:solidFill>
-                          <a:latin typeface="Arial"/>
-                        </a:rPr>
-                        <a:t>'I am not certain. From memory: ...' then the same wrong facts</a:t>
-                      </a:r>
-                    </a:p>
-                  </a:txBody>
-                  <a:tcPr>
-                    <a:solidFill>
-                      <a:srgbClr val="EEF3FD"/>
-                    </a:solidFill>
-                  </a:tcPr>
-                </a:tc>
-                <a:tc>
-                  <a:txBody>
-                    <a:bodyPr wrap="square"/>
-                    <a:lstStyle/>
-                    <a:p>
-                      <a:pPr algn="l">
-                        <a:spcAft>
-                          <a:spcPts val="0"/>
-                        </a:spcAft>
-                        <a:buNone/>
-                      </a:pPr>
-                      <a:r>
-                        <a:rPr sz="1250" b="0">
-                          <a:solidFill>
-                            <a:srgbClr val="202B38"/>
-                          </a:solidFill>
-                          <a:latin typeface="Arial"/>
-                        </a:rPr>
-                        <a:t>Hedges, still wrong, no source. 1 turn, ~39 tokens</a:t>
-                      </a:r>
-                    </a:p>
-                  </a:txBody>
-                  <a:tcPr>
-                    <a:solidFill>
-                      <a:srgbClr val="EEF3FD"/>
-                    </a:solidFill>
-                  </a:tcPr>
-                </a:tc>
-              </a:tr>
-              <a:tr h="457200">
-                <a:tc>
-                  <a:txBody>
-                    <a:bodyPr wrap="square"/>
-                    <a:lstStyle/>
-                    <a:p>
-                      <a:pPr algn="l">
-                        <a:spcAft>
-                          <a:spcPts val="0"/>
-                        </a:spcAft>
-                        <a:buNone/>
-                      </a:pPr>
-                      <a:r>
-                        <a:rPr sz="1250" b="0">
-                          <a:solidFill>
-                            <a:srgbClr val="202B38"/>
-                          </a:solidFill>
-                          <a:latin typeface="Arial"/>
-                        </a:rPr>
-                        <a:t>Harness</a:t>
-                      </a:r>
-                    </a:p>
-                  </a:txBody>
-                  <a:tcPr>
-                    <a:solidFill>
-                      <a:srgbClr val="FFFFFF"/>
-                    </a:solidFill>
-                  </a:tcPr>
-                </a:tc>
-                <a:tc>
-                  <a:txBody>
-                    <a:bodyPr wrap="square"/>
-                    <a:lstStyle/>
-                    <a:p>
-                      <a:pPr algn="l">
-                        <a:spcAft>
-                          <a:spcPts val="0"/>
-                        </a:spcAft>
-                        <a:buNone/>
-                      </a:pPr>
-                      <a:r>
-                        <a:rPr sz="1250" b="0">
-                          <a:solidFill>
-                            <a:srgbClr val="202B38"/>
-                          </a:solidFill>
-                          <a:latin typeface="Arial"/>
-                        </a:rPr>
-                        <a:t>The question, three tools, a loop with stop conditions</a:t>
-                      </a:r>
-                    </a:p>
-                  </a:txBody>
-                  <a:tcPr>
-                    <a:solidFill>
-                      <a:srgbClr val="FFFFFF"/>
-                    </a:solidFill>
-                  </a:tcPr>
-                </a:tc>
-                <a:tc>
-                  <a:txBody>
-                    <a:bodyPr wrap="square"/>
-                    <a:lstStyle/>
-                    <a:p>
-                      <a:pPr algn="l">
-                        <a:spcAft>
-                          <a:spcPts val="0"/>
-                        </a:spcAft>
-                        <a:buNone/>
-                      </a:pPr>
-                      <a:r>
-                        <a:rPr sz="1250" b="0">
-                          <a:solidFill>
-                            <a:srgbClr val="202B38"/>
-                          </a:solidFill>
-                          <a:latin typeface="Arial"/>
-                        </a:rPr>
-                        <a:t>'Anthropic open-sourced the Model Context Protocol on 25 November 2024 ... On 26 March 2025 OpenAI announced support for MCP in its Agents SDK ... [source: model-context-protocol]'</a:t>
-                      </a:r>
-                    </a:p>
-                  </a:txBody>
-                  <a:tcPr>
-                    <a:solidFill>
-                      <a:srgbClr val="FFFFFF"/>
-                    </a:solidFill>
-                  </a:tcPr>
-                </a:tc>
-                <a:tc>
-                  <a:txBody>
-                    <a:bodyPr wrap="square"/>
-                    <a:lstStyle/>
-                    <a:p>
-                      <a:pPr algn="l">
-                        <a:spcAft>
-                          <a:spcPts val="0"/>
-                        </a:spcAft>
-                        <a:buNone/>
-                      </a:pPr>
-                      <a:r>
-                        <a:rPr sz="1250" b="0">
-                          <a:solidFill>
-                            <a:srgbClr val="202B38"/>
-                          </a:solidFill>
-                          <a:latin typeface="Arial"/>
-                        </a:rPr>
-                        <a:t>Both parts correct, cited. 4 model calls, 3 tool calls, ~1,980 tokens</a:t>
-                      </a:r>
-                    </a:p>
-                  </a:txBody>
-                  <a:tcPr>
-                    <a:solidFill>
-                      <a:srgbClr val="FFFFFF"/>
-                    </a:solidFill>
-                  </a:tcPr>
-                </a:tc>
-              </a:tr>
-              <a:tr h="457200">
-                <a:tc>
-                  <a:txBody>
-                    <a:bodyPr wrap="square"/>
-                    <a:lstStyle/>
-                    <a:p>
-                      <a:pPr algn="l">
-                        <a:spcAft>
-                          <a:spcPts val="0"/>
-                        </a:spcAft>
-                        <a:buNone/>
-                      </a:pPr>
-                      <a:r>
-                        <a:rPr sz="1250" b="0">
-                          <a:solidFill>
-                            <a:srgbClr val="202B38"/>
-                          </a:solidFill>
-                          <a:latin typeface="Arial"/>
-                        </a:rPr>
-                        <a:t>Live demo (claude-opus-5)</a:t>
-                      </a:r>
-                    </a:p>
-                  </a:txBody>
-                  <a:tcPr>
-                    <a:solidFill>
-                      <a:srgbClr val="EEF3FD"/>
-                    </a:solidFill>
-                  </a:tcPr>
-                </a:tc>
-                <a:tc>
-                  <a:txBody>
-                    <a:bodyPr wrap="square"/>
-                    <a:lstStyle/>
-                    <a:p>
-                      <a:pPr algn="l">
-                        <a:spcAft>
-                          <a:spcPts val="0"/>
-                        </a:spcAft>
-                        <a:buNone/>
-                      </a:pPr>
-                      <a:r>
-                        <a:rPr sz="1250" b="0">
-                          <a:solidFill>
-                            <a:srgbClr val="202B38"/>
-                          </a:solidFill>
-                          <a:latin typeface="Arial"/>
-                        </a:rPr>
-                        <a:t>A 2026 question no model knows from training: what share of security rules in instruction files is backed by a real control?</a:t>
-                      </a:r>
-                    </a:p>
-                  </a:txBody>
-                  <a:tcPr>
-                    <a:solidFill>
-                      <a:srgbClr val="EEF3FD"/>
-                    </a:solidFill>
-                  </a:tcPr>
-                </a:tc>
-                <a:tc>
-                  <a:txBody>
-                    <a:bodyPr wrap="square"/>
-                    <a:lstStyle/>
-                    <a:p>
-                      <a:pPr algn="l">
-                        <a:spcAft>
-                          <a:spcPts val="0"/>
-                        </a:spcAft>
-                        <a:buNone/>
-                      </a:pPr>
-                      <a:r>
-                        <a:rPr sz="1250" b="0">
-                          <a:solidFill>
-                            <a:srgbClr val="202B38"/>
-                          </a:solidFill>
-                          <a:latin typeface="Arial"/>
-                        </a:rPr>
-                        <a:t>'4.4% ...' with a [source: id] citation - wording varies run to run</a:t>
-                      </a:r>
-                    </a:p>
-                  </a:txBody>
-                  <a:tcPr>
-                    <a:solidFill>
-                      <a:srgbClr val="EEF3FD"/>
-                    </a:solidFill>
-                  </a:tcPr>
-                </a:tc>
-                <a:tc>
-                  <a:txBody>
-                    <a:bodyPr wrap="square"/>
-                    <a:lstStyle/>
-                    <a:p>
-                      <a:pPr algn="l">
-                        <a:spcAft>
-                          <a:spcPts val="0"/>
-                        </a:spcAft>
-                        <a:buNone/>
-                      </a:pPr>
-                      <a:r>
-                        <a:rPr sz="1250" b="0">
-                          <a:solidFill>
-                            <a:srgbClr val="202B38"/>
-                          </a:solidFill>
-                          <a:latin typeface="Arial"/>
-                        </a:rPr>
-                        <a:t>Real Claude, real tokens; the harness supplies the fact</a:t>
-                      </a:r>
-                    </a:p>
-                  </a:txBody>
-                  <a:tcPr>
-                    <a:solidFill>
-                      <a:srgbClr val="EEF3FD"/>
-                    </a:solidFill>
-                  </a:tcPr>
-                </a:tc>
-              </a:tr>
-            </a:tbl>
-          </a:graphicData>
-        </a:graphic>
-      </p:graphicFrame>
-      <p:sp>
-        <p:nvSpPr>
-          <p:cNvPr id="8" name="TextBox 7"/>
-          <p:cNvSpPr txBox="1"/>
-          <p:nvPr/>
-        </p:nvSpPr>
-        <p:spPr>
-          <a:xfrm>
-            <a:off x="548640" y="6053328"/>
-            <a:ext cx="11091672" cy="502920"/>
-          </a:xfrm>
-          <a:prstGeom prst="rect">
-            <a:avLst/>
-          </a:prstGeom>
-          <a:noFill/>
-        </p:spPr>
-        <p:txBody>
-          <a:bodyPr wrap="square">
-            <a:spAutoFit/>
-          </a:bodyPr>
-          <a:lstStyle/>
-          <a:p>
-            <a:pPr algn="l">
-              <a:spcAft>
-                <a:spcPts val="600"/>
-              </a:spcAft>
-              <a:buNone/>
-            </a:pPr>
-            <a:r>
-              <a:rPr sz="1200" b="0">
-                <a:solidFill>
-                  <a:srgbClr val="1E5EF3"/>
-                </a:solidFill>
-                <a:latin typeface="Arial"/>
-              </a:rPr>
-              <a:t>Rows 1-3: reference run on the deterministic stand-in; the live run on Claude varies and reports real tokens. Row 4: the notebook's live demo (Marmelab, Sep 2026 figure).</a:t>
-            </a:r>
-          </a:p>
-        </p:txBody>
-      </p:sp>
-      <p:sp>
-        <p:nvSpPr>
-          <p:cNvPr id="9" name="TextBox 8"/>
-          <p:cNvSpPr txBox="1"/>
-          <p:nvPr/>
-        </p:nvSpPr>
-        <p:spPr>
-          <a:xfrm>
-            <a:off x="548640" y="6473952"/>
-            <a:ext cx="7315200" cy="292608"/>
-          </a:xfrm>
-          <a:prstGeom prst="rect">
-            <a:avLst/>
-          </a:prstGeom>
-          <a:noFill/>
-        </p:spPr>
-        <p:txBody>
-          <a:bodyPr wrap="square">
-            <a:spAutoFit/>
-          </a:bodyPr>
-          <a:lstStyle/>
-          <a:p>
-            <a:pPr algn="l">
-              <a:spcAft>
-                <a:spcPts val="600"/>
-              </a:spcAft>
-              <a:buNone/>
-            </a:pPr>
-            <a:r>
-              <a:rPr sz="900" b="0">
-                <a:solidFill>
-                  <a:srgbClr val="5B6774"/>
-                </a:solidFill>
-                <a:latin typeface="Arial"/>
-              </a:rPr>
-              <a:t>M5 Session 1 - From Prompts to Harnesses</a:t>
-            </a:r>
-          </a:p>
-        </p:txBody>
-      </p:sp>
-      <p:sp>
-        <p:nvSpPr>
-          <p:cNvPr id="10" name="TextBox 9"/>
-          <p:cNvSpPr txBox="1"/>
-          <p:nvPr/>
-        </p:nvSpPr>
-        <p:spPr>
-          <a:xfrm>
-            <a:off x="11292840" y="6473952"/>
-            <a:ext cx="548640" cy="292608"/>
-          </a:xfrm>
-          <a:prstGeom prst="rect">
-            <a:avLst/>
-          </a:prstGeom>
-          <a:noFill/>
-        </p:spPr>
-        <p:txBody>
-          <a:bodyPr wrap="square">
-            <a:spAutoFit/>
-          </a:bodyPr>
-          <a:lstStyle/>
-          <a:p>
-            <a:pPr algn="r">
-              <a:spcAft>
-                <a:spcPts val="600"/>
-              </a:spcAft>
-              <a:buNone/>
-            </a:pPr>
-            <a:r>
-              <a:rPr sz="900" b="0">
-                <a:solidFill>
-                  <a:srgbClr val="5B6774"/>
-                </a:solidFill>
-                <a:latin typeface="Arial"/>
-              </a:rPr>
-              <a:t>14</a:t>
-            </a:r>
-          </a:p>
-        </p:txBody>
-      </p:sp>
-    </p:spTree>
-  </p:cSld>
-  <p:clrMapOvr>
-    <a:masterClrMapping/>
-  </p:clrMapOvr>
-</p:sld>
-</file>
-
-<file path=ppt/slides/slide15.xml><?xml version="1.0" encoding="utf-8"?>
-<p:sld xmlns:a="http://schemas.openxmlformats.org/drawingml/2006/main" xmlns:p="http://schemas.openxmlformats.org/presentationml/2006/main" xmlns:r="http://schemas.openxmlformats.org/officeDocument/2006/relationships">
-  <p:cSld>
-    <p:spTree>
-      <p:nvGrpSpPr>
-        <p:cNvPr id="1" name=""/>
-        <p:cNvGrpSpPr/>
-        <p:nvPr/>
-      </p:nvGrpSpPr>
-      <p:grpSpPr/>
-      <p:sp>
-        <p:nvSpPr>
-          <p:cNvPr id="2" name="Rectangle 1"/>
-          <p:cNvSpPr/>
-          <p:nvPr/>
-        </p:nvSpPr>
-        <p:spPr>
-          <a:xfrm>
-            <a:off x="0" y="0"/>
-            <a:ext cx="12191695" cy="6858000"/>
-          </a:xfrm>
-          <a:prstGeom prst="rect">
-            <a:avLst/>
-          </a:prstGeom>
-          <a:solidFill>
-            <a:srgbClr val="FFFFFF"/>
-          </a:solidFill>
-          <a:ln>
-            <a:noFill/>
-          </a:ln>
-          <a:effectLst/>
-        </p:spPr>
-        <p:style>
-          <a:lnRef idx="1">
-            <a:schemeClr val="accent1"/>
-          </a:lnRef>
-          <a:fillRef idx="3">
-            <a:schemeClr val="accent1"/>
-          </a:fillRef>
-          <a:effectRef idx="2">
-            <a:schemeClr val="accent1"/>
-          </a:effectRef>
-          <a:fontRef idx="minor">
-            <a:schemeClr val="lt1"/>
-          </a:fontRef>
-        </p:style>
-        <p:txBody>
-          <a:bodyPr rtlCol="0" anchor="ctr"/>
-          <a:lstStyle/>
-          <a:p>
-            <a:pPr algn="ctr"/>
-          </a:p>
-        </p:txBody>
-      </p:sp>
-      <p:sp>
-        <p:nvSpPr>
-          <p:cNvPr id="3" name="Rectangle 2"/>
-          <p:cNvSpPr/>
-          <p:nvPr/>
-        </p:nvSpPr>
-        <p:spPr>
-          <a:xfrm>
-            <a:off x="548640" y="475488"/>
-            <a:ext cx="457200" cy="54864"/>
-          </a:xfrm>
-          <a:prstGeom prst="rect">
-            <a:avLst/>
-          </a:prstGeom>
-          <a:solidFill>
-            <a:srgbClr val="1E5EF3"/>
-          </a:solidFill>
-          <a:ln>
-            <a:noFill/>
-          </a:ln>
-          <a:effectLst/>
-        </p:spPr>
-        <p:style>
-          <a:lnRef idx="1">
-            <a:schemeClr val="accent1"/>
-          </a:lnRef>
-          <a:fillRef idx="3">
-            <a:schemeClr val="accent1"/>
-          </a:fillRef>
-          <a:effectRef idx="2">
-            <a:schemeClr val="accent1"/>
-          </a:effectRef>
-          <a:fontRef idx="minor">
-            <a:schemeClr val="lt1"/>
-          </a:fontRef>
-        </p:style>
-        <p:txBody>
-          <a:bodyPr rtlCol="0" anchor="ctr"/>
-          <a:lstStyle/>
-          <a:p>
-            <a:pPr algn="ctr"/>
-          </a:p>
-        </p:txBody>
-      </p:sp>
-      <p:sp>
-        <p:nvSpPr>
-          <p:cNvPr id="4" name="TextBox 3"/>
-          <p:cNvSpPr txBox="1"/>
-          <p:nvPr/>
-        </p:nvSpPr>
-        <p:spPr>
-          <a:xfrm>
-            <a:off x="548640" y="603504"/>
-            <a:ext cx="11091672" cy="274320"/>
-          </a:xfrm>
-          <a:prstGeom prst="rect">
-            <a:avLst/>
-          </a:prstGeom>
-          <a:noFill/>
-        </p:spPr>
-        <p:txBody>
-          <a:bodyPr wrap="square">
-            <a:spAutoFit/>
-          </a:bodyPr>
-          <a:lstStyle/>
-          <a:p>
-            <a:pPr algn="l">
-              <a:spcAft>
-                <a:spcPts val="600"/>
-              </a:spcAft>
-              <a:buNone/>
-            </a:pPr>
-            <a:r>
-              <a:rPr sz="1100" b="1">
-                <a:solidFill>
-                  <a:srgbClr val="1E5EF3"/>
-                </a:solidFill>
-                <a:latin typeface="Arial"/>
-              </a:rPr>
-              <a:t>NOTEBOOK 01, SECTION 3</a:t>
-            </a:r>
-          </a:p>
-        </p:txBody>
-      </p:sp>
-      <p:sp>
-        <p:nvSpPr>
-          <p:cNvPr id="5" name="TextBox 4"/>
-          <p:cNvSpPr txBox="1"/>
-          <p:nvPr/>
-        </p:nvSpPr>
-        <p:spPr>
-          <a:xfrm>
-            <a:off x="548640" y="868680"/>
-            <a:ext cx="11091672" cy="777240"/>
-          </a:xfrm>
-          <a:prstGeom prst="rect">
-            <a:avLst/>
-          </a:prstGeom>
-          <a:noFill/>
-        </p:spPr>
-        <p:txBody>
-          <a:bodyPr wrap="square">
-            <a:spAutoFit/>
-          </a:bodyPr>
-          <a:lstStyle/>
-          <a:p>
-            <a:pPr algn="l">
-              <a:spcAft>
-                <a:spcPts val="0"/>
-              </a:spcAft>
-              <a:buNone/>
-            </a:pPr>
-            <a:r>
-              <a:rPr sz="2600" b="1">
-                <a:solidFill>
-                  <a:srgbClr val="0A2540"/>
-                </a:solidFill>
-                <a:latin typeface="Arial"/>
-              </a:rPr>
-              <a:t>The harness could call three tools - each one a plain Python function with a docstring</a:t>
-            </a:r>
-          </a:p>
-        </p:txBody>
-      </p:sp>
-      <p:sp>
-        <p:nvSpPr>
-          <p:cNvPr id="6" name="Rectangle 5"/>
-          <p:cNvSpPr/>
-          <p:nvPr/>
-        </p:nvSpPr>
-        <p:spPr>
-          <a:xfrm>
-            <a:off x="548640" y="1664208"/>
-            <a:ext cx="11091672" cy="12801"/>
-          </a:xfrm>
-          <a:prstGeom prst="rect">
-            <a:avLst/>
-          </a:prstGeom>
-          <a:solidFill>
-            <a:srgbClr val="B9D0FA"/>
-          </a:solidFill>
-          <a:ln>
-            <a:noFill/>
-          </a:ln>
-          <a:effectLst/>
-        </p:spPr>
-        <p:style>
-          <a:lnRef idx="1">
-            <a:schemeClr val="accent1"/>
-          </a:lnRef>
-          <a:fillRef idx="3">
-            <a:schemeClr val="accent1"/>
-          </a:fillRef>
-          <a:effectRef idx="2">
-            <a:schemeClr val="accent1"/>
-          </a:effectRef>
-          <a:fontRef idx="minor">
-            <a:schemeClr val="lt1"/>
-          </a:fontRef>
-        </p:style>
-        <p:txBody>
-          <a:bodyPr rtlCol="0" anchor="ctr"/>
-          <a:lstStyle/>
-          <a:p>
-            <a:pPr algn="ctr"/>
-          </a:p>
-        </p:txBody>
-      </p:sp>
-      <p:graphicFrame>
-        <p:nvGraphicFramePr>
-          <p:cNvPr id="7" name="Table 6"/>
-          <p:cNvGraphicFramePr>
-            <a:graphicFrameLocks noGrp="1"/>
-          </p:cNvGraphicFramePr>
-          <p:nvPr/>
-        </p:nvGraphicFramePr>
-        <p:xfrm>
-          <a:off x="548640" y="1874519"/>
-          <a:ext cx="11091670" cy="1828800"/>
-        </p:xfrm>
-        <a:graphic>
-          <a:graphicData uri="http://schemas.openxmlformats.org/drawingml/2006/table">
-            <a:tbl>
-              <a:tblPr firstRow="1" bandRow="1">
-                <a:tableStyleId>{5C22544A-7EE6-4342-B048-85BDC9FD1C3A}</a:tableStyleId>
-              </a:tblPr>
-              <a:tblGrid>
-                <a:gridCol w="2508830"/>
-                <a:gridCol w="3565180"/>
-                <a:gridCol w="2904961"/>
-                <a:gridCol w="2112699"/>
-              </a:tblGrid>
-              <a:tr h="457200">
-                <a:tc>
-                  <a:txBody>
-                    <a:bodyPr wrap="square"/>
-                    <a:lstStyle/>
-                    <a:p>
-                      <a:pPr algn="l">
-                        <a:spcAft>
-                          <a:spcPts val="0"/>
-                        </a:spcAft>
-                        <a:buNone/>
-                      </a:pPr>
-                      <a:r>
-                        <a:rPr sz="1300" b="1">
-                          <a:solidFill>
-                            <a:srgbClr val="FFFFFF"/>
-                          </a:solidFill>
-                          <a:latin typeface="Arial"/>
-                        </a:rPr>
-                        <a:t>Tool</a:t>
-                      </a:r>
-                    </a:p>
-                  </a:txBody>
-                  <a:tcPr>
-                    <a:solidFill>
-                      <a:srgbClr val="0A2540"/>
-                    </a:solidFill>
-                  </a:tcPr>
-                </a:tc>
-                <a:tc>
-                  <a:txBody>
-                    <a:bodyPr wrap="square"/>
-                    <a:lstStyle/>
-                    <a:p>
-                      <a:pPr algn="l">
-                        <a:spcAft>
-                          <a:spcPts val="0"/>
-                        </a:spcAft>
-                        <a:buNone/>
-                      </a:pPr>
-                      <a:r>
-                        <a:rPr sz="1300" b="1">
-                          <a:solidFill>
-                            <a:srgbClr val="FFFFFF"/>
-                          </a:solidFill>
-                          <a:latin typeface="Arial"/>
-                        </a:rPr>
-                        <a:t>What its description tells the model</a:t>
-                      </a:r>
-                    </a:p>
-                  </a:txBody>
-                  <a:tcPr>
-                    <a:solidFill>
-                      <a:srgbClr val="0A2540"/>
-                    </a:solidFill>
-                  </a:tcPr>
-                </a:tc>
-                <a:tc>
-                  <a:txBody>
-                    <a:bodyPr wrap="square"/>
-                    <a:lstStyle/>
-                    <a:p>
-                      <a:pPr algn="l">
-                        <a:spcAft>
-                          <a:spcPts val="0"/>
-                        </a:spcAft>
-                        <a:buNone/>
-                      </a:pPr>
-                      <a:r>
-                        <a:rPr sz="1300" b="1">
-                          <a:solidFill>
-                            <a:srgbClr val="FFFFFF"/>
-                          </a:solidFill>
-                          <a:latin typeface="Arial"/>
-                        </a:rPr>
-                        <a:t>What it returns</a:t>
-                      </a:r>
-                    </a:p>
-                  </a:txBody>
-                  <a:tcPr>
-                    <a:solidFill>
-                      <a:srgbClr val="0A2540"/>
-                    </a:solidFill>
-                  </a:tcPr>
-                </a:tc>
-                <a:tc>
-                  <a:txBody>
-                    <a:bodyPr wrap="square"/>
-                    <a:lstStyle/>
-                    <a:p>
-                      <a:pPr algn="l">
-                        <a:spcAft>
-                          <a:spcPts val="0"/>
-                        </a:spcAft>
-                        <a:buNone/>
-                      </a:pPr>
-                      <a:r>
-                        <a:rPr sz="1300" b="1">
-                          <a:solidFill>
-                            <a:srgbClr val="FFFFFF"/>
-                          </a:solidFill>
-                          <a:latin typeface="Arial"/>
-                        </a:rPr>
-                        <a:t>Step in the trace</a:t>
-                      </a:r>
-                    </a:p>
-                  </a:txBody>
-                  <a:tcPr>
-                    <a:solidFill>
-                      <a:srgbClr val="0A2540"/>
-                    </a:solidFill>
-                  </a:tcPr>
-                </a:tc>
-              </a:tr>
-              <a:tr h="457200">
-                <a:tc>
-                  <a:txBody>
-                    <a:bodyPr wrap="square"/>
-                    <a:lstStyle/>
-                    <a:p>
-                      <a:pPr algn="l">
-                        <a:spcAft>
-                          <a:spcPts val="0"/>
-                        </a:spcAft>
-                        <a:buNone/>
-                      </a:pPr>
-                      <a:r>
-                        <a:rPr sz="1100" b="0">
-                          <a:solidFill>
-                            <a:srgbClr val="0A2540"/>
-                          </a:solidFill>
-                          <a:latin typeface="Courier New"/>
-                        </a:rPr>
-                        <a:t>search_docs(query, k=3)</a:t>
-                      </a:r>
-                    </a:p>
-                  </a:txBody>
-                  <a:tcPr>
-                    <a:solidFill>
-                      <a:srgbClr val="FFFFFF"/>
-                    </a:solidFill>
-                  </a:tcPr>
-                </a:tc>
-                <a:tc>
-                  <a:txBody>
-                    <a:bodyPr wrap="square"/>
-                    <a:lstStyle/>
-                    <a:p>
-                      <a:pPr algn="l">
-                        <a:spcAft>
-                          <a:spcPts val="0"/>
-                        </a:spcAft>
-                        <a:buNone/>
-                      </a:pPr>
-                      <a:r>
-                        <a:rPr sz="1250" b="0">
-                          <a:solidFill>
-                            <a:srgbClr val="202B38"/>
-                          </a:solidFill>
-                          <a:latin typeface="Arial"/>
-                        </a:rPr>
-                        <a:t>Search the course library for documents about a topic; a few key terms, no full sentences</a:t>
-                      </a:r>
-                    </a:p>
-                  </a:txBody>
-                  <a:tcPr>
-                    <a:solidFill>
-                      <a:srgbClr val="FFFFFF"/>
-                    </a:solidFill>
-                  </a:tcPr>
-                </a:tc>
-                <a:tc>
-                  <a:txBody>
-                    <a:bodyPr wrap="square"/>
-                    <a:lstStyle/>
-                    <a:p>
-                      <a:pPr algn="l">
-                        <a:spcAft>
-                          <a:spcPts val="0"/>
-                        </a:spcAft>
-                        <a:buNone/>
-                      </a:pPr>
-                      <a:r>
-                        <a:rPr sz="1250" b="0">
-                          <a:solidFill>
-                            <a:srgbClr val="202B38"/>
-                          </a:solidFill>
-                          <a:latin typeface="Arial"/>
-                        </a:rPr>
-                        <a:t>The best matches as JSON: id, title, score, snippet</a:t>
-                      </a:r>
-                    </a:p>
-                  </a:txBody>
-                  <a:tcPr>
-                    <a:solidFill>
-                      <a:srgbClr val="FFFFFF"/>
-                    </a:solidFill>
-                  </a:tcPr>
-                </a:tc>
-                <a:tc>
-                  <a:txBody>
-                    <a:bodyPr wrap="square"/>
-                    <a:lstStyle/>
-                    <a:p>
-                      <a:pPr algn="l">
-                        <a:spcAft>
-                          <a:spcPts val="0"/>
-                        </a:spcAft>
-                        <a:buNone/>
-                      </a:pPr>
-                      <a:r>
-                        <a:rPr sz="1250" b="0">
-                          <a:solidFill>
-                            <a:srgbClr val="202B38"/>
-                          </a:solidFill>
-                          <a:latin typeface="Arial"/>
-                        </a:rPr>
-                        <a:t>1 - finds model-context-protocol</a:t>
-                      </a:r>
-                    </a:p>
-                  </a:txBody>
-                  <a:tcPr>
-                    <a:solidFill>
-                      <a:srgbClr val="FFFFFF"/>
-                    </a:solidFill>
-                  </a:tcPr>
-                </a:tc>
-              </a:tr>
-              <a:tr h="457200">
-                <a:tc>
-                  <a:txBody>
-                    <a:bodyPr wrap="square"/>
-                    <a:lstStyle/>
-                    <a:p>
-                      <a:pPr algn="l">
-                        <a:spcAft>
-                          <a:spcPts val="0"/>
-                        </a:spcAft>
-                        <a:buNone/>
-                      </a:pPr>
-                      <a:r>
-                        <a:rPr sz="1100" b="0">
-                          <a:solidFill>
-                            <a:srgbClr val="0A2540"/>
-                          </a:solidFill>
-                          <a:latin typeface="Courier New"/>
-                        </a:rPr>
-                        <a:t>read_doc(doc_id)</a:t>
-                      </a:r>
-                    </a:p>
-                  </a:txBody>
-                  <a:tcPr>
-                    <a:solidFill>
-                      <a:srgbClr val="EEF3FD"/>
-                    </a:solidFill>
-                  </a:tcPr>
-                </a:tc>
-                <a:tc>
-                  <a:txBody>
-                    <a:bodyPr wrap="square"/>
-                    <a:lstStyle/>
-                    <a:p>
-                      <a:pPr algn="l">
-                        <a:spcAft>
-                          <a:spcPts val="0"/>
-                        </a:spcAft>
-                        <a:buNone/>
-                      </a:pPr>
-                      <a:r>
-                        <a:rPr sz="1250" b="0">
-                          <a:solidFill>
-                            <a:srgbClr val="202B38"/>
-                          </a:solidFill>
-                          <a:latin typeface="Arial"/>
-                        </a:rPr>
-                        <a:t>Read one document in full, by the id search_docs returned</a:t>
-                      </a:r>
-                    </a:p>
-                  </a:txBody>
-                  <a:tcPr>
-                    <a:solidFill>
-                      <a:srgbClr val="EEF3FD"/>
-                    </a:solidFill>
-                  </a:tcPr>
-                </a:tc>
-                <a:tc>
-                  <a:txBody>
-                    <a:bodyPr wrap="square"/>
-                    <a:lstStyle/>
-                    <a:p>
-                      <a:pPr algn="l">
-                        <a:spcAft>
-                          <a:spcPts val="0"/>
-                        </a:spcAft>
-                        <a:buNone/>
-                      </a:pPr>
-                      <a:r>
-                        <a:rPr sz="1250" b="0">
-                          <a:solidFill>
-                            <a:srgbClr val="202B38"/>
-                          </a:solidFill>
-                          <a:latin typeface="Arial"/>
-                        </a:rPr>
-                        <a:t>The document text</a:t>
-                      </a:r>
-                    </a:p>
-                  </a:txBody>
-                  <a:tcPr>
-                    <a:solidFill>
-                      <a:srgbClr val="EEF3FD"/>
-                    </a:solidFill>
-                  </a:tcPr>
-                </a:tc>
-                <a:tc>
-                  <a:txBody>
-                    <a:bodyPr wrap="square"/>
-                    <a:lstStyle/>
-                    <a:p>
-                      <a:pPr algn="l">
-                        <a:spcAft>
-                          <a:spcPts val="0"/>
-                        </a:spcAft>
-                        <a:buNone/>
-                      </a:pPr>
-                      <a:r>
-                        <a:rPr sz="1250" b="0">
-                          <a:solidFill>
-                            <a:srgbClr val="202B38"/>
-                          </a:solidFill>
-                          <a:latin typeface="Arial"/>
-                        </a:rPr>
-                        <a:t>2 - reads the full text</a:t>
-                      </a:r>
-                    </a:p>
-                  </a:txBody>
-                  <a:tcPr>
-                    <a:solidFill>
-                      <a:srgbClr val="EEF3FD"/>
-                    </a:solidFill>
-                  </a:tcPr>
-                </a:tc>
-              </a:tr>
-              <a:tr h="457200">
-                <a:tc>
-                  <a:txBody>
-                    <a:bodyPr wrap="square"/>
-                    <a:lstStyle/>
-                    <a:p>
-                      <a:pPr algn="l">
-                        <a:spcAft>
-                          <a:spcPts val="0"/>
-                        </a:spcAft>
-                        <a:buNone/>
-                      </a:pPr>
-                      <a:r>
-                        <a:rPr sz="1100" b="0">
-                          <a:solidFill>
-                            <a:srgbClr val="0A2540"/>
-                          </a:solidFill>
-                          <a:latin typeface="Courier New"/>
-                        </a:rPr>
-                        <a:t>check_citation(answer, question)</a:t>
-                      </a:r>
-                    </a:p>
-                  </a:txBody>
-                  <a:tcPr>
-                    <a:solidFill>
-                      <a:srgbClr val="FFFFFF"/>
-                    </a:solidFill>
-                  </a:tcPr>
-                </a:tc>
-                <a:tc>
-                  <a:txBody>
-                    <a:bodyPr wrap="square"/>
-                    <a:lstStyle/>
-                    <a:p>
-                      <a:pPr algn="l">
-                        <a:spcAft>
-                          <a:spcPts val="0"/>
-                        </a:spcAft>
-                        <a:buNone/>
-                      </a:pPr>
-                      <a:r>
-                        <a:rPr sz="1250" b="0">
-                          <a:solidFill>
-                            <a:srgbClr val="202B38"/>
-                          </a:solidFill>
-                          <a:latin typeface="Arial"/>
-                        </a:rPr>
-                        <a:t>Check that the draft answer's [source: id] tag names a document that supports it</a:t>
-                      </a:r>
-                    </a:p>
-                  </a:txBody>
-                  <a:tcPr>
-                    <a:solidFill>
-                      <a:srgbClr val="FFFFFF"/>
-                    </a:solidFill>
-                  </a:tcPr>
-                </a:tc>
-                <a:tc>
-                  <a:txBody>
-                    <a:bodyPr wrap="square"/>
-                    <a:lstStyle/>
-                    <a:p>
-                      <a:pPr algn="l">
-                        <a:spcAft>
-                          <a:spcPts val="0"/>
-                        </a:spcAft>
-                        <a:buNone/>
-                      </a:pPr>
-                      <a:r>
-                        <a:rPr sz="1250" b="0">
-                          <a:solidFill>
-                            <a:srgbClr val="202B38"/>
-                          </a:solidFill>
-                          <a:latin typeface="Arial"/>
-                        </a:rPr>
-                        <a:t>OK, or PROBLEM with a reason</a:t>
-                      </a:r>
-                    </a:p>
-                  </a:txBody>
-                  <a:tcPr>
-                    <a:solidFill>
-                      <a:srgbClr val="FFFFFF"/>
-                    </a:solidFill>
-                  </a:tcPr>
-                </a:tc>
-                <a:tc>
-                  <a:txBody>
-                    <a:bodyPr wrap="square"/>
-                    <a:lstStyle/>
-                    <a:p>
-                      <a:pPr algn="l">
-                        <a:spcAft>
-                          <a:spcPts val="0"/>
-                        </a:spcAft>
-                        <a:buNone/>
-                      </a:pPr>
-                      <a:r>
-                        <a:rPr sz="1250" b="0">
-                          <a:solidFill>
-                            <a:srgbClr val="202B38"/>
-                          </a:solidFill>
-                          <a:latin typeface="Arial"/>
-                        </a:rPr>
-                        <a:t>3 - returns OK</a:t>
-                      </a:r>
-                    </a:p>
-                  </a:txBody>
-                  <a:tcPr>
-                    <a:solidFill>
-                      <a:srgbClr val="FFFFFF"/>
-                    </a:solidFill>
-                  </a:tcPr>
-                </a:tc>
-              </a:tr>
-            </a:tbl>
-          </a:graphicData>
-        </a:graphic>
-      </p:graphicFrame>
-      <p:sp>
-        <p:nvSpPr>
-          <p:cNvPr id="8" name="TextBox 7"/>
-          <p:cNvSpPr txBox="1"/>
-          <p:nvPr/>
-        </p:nvSpPr>
-        <p:spPr>
-          <a:xfrm>
-            <a:off x="548640" y="6053328"/>
-            <a:ext cx="11091672" cy="502920"/>
-          </a:xfrm>
-          <a:prstGeom prst="rect">
-            <a:avLst/>
-          </a:prstGeom>
-          <a:noFill/>
-        </p:spPr>
-        <p:txBody>
-          <a:bodyPr wrap="square">
-            <a:spAutoFit/>
-          </a:bodyPr>
-          <a:lstStyle/>
-          <a:p>
-            <a:pPr algn="l">
-              <a:spcAft>
-                <a:spcPts val="600"/>
-              </a:spcAft>
-              <a:buNone/>
-            </a:pPr>
-            <a:r>
-              <a:rPr sz="1200" b="0">
-                <a:solidFill>
-                  <a:srgbClr val="1E5EF3"/>
-                </a:solidFill>
-                <a:latin typeface="Arial"/>
-              </a:rPr>
-              <a:t>In plain words: a tool is a function the model asks for by name with JSON arguments; the harness runs it and pastes the result back. Tool design is Session 2.</a:t>
-            </a:r>
-          </a:p>
-        </p:txBody>
-      </p:sp>
-      <p:sp>
-        <p:nvSpPr>
-          <p:cNvPr id="9" name="TextBox 8"/>
-          <p:cNvSpPr txBox="1"/>
-          <p:nvPr/>
-        </p:nvSpPr>
-        <p:spPr>
-          <a:xfrm>
-            <a:off x="548640" y="6473952"/>
-            <a:ext cx="7315200" cy="292608"/>
-          </a:xfrm>
-          <a:prstGeom prst="rect">
-            <a:avLst/>
-          </a:prstGeom>
-          <a:noFill/>
-        </p:spPr>
-        <p:txBody>
-          <a:bodyPr wrap="square">
-            <a:spAutoFit/>
-          </a:bodyPr>
-          <a:lstStyle/>
-          <a:p>
-            <a:pPr algn="l">
-              <a:spcAft>
-                <a:spcPts val="600"/>
-              </a:spcAft>
-              <a:buNone/>
-            </a:pPr>
-            <a:r>
-              <a:rPr sz="900" b="0">
-                <a:solidFill>
-                  <a:srgbClr val="5B6774"/>
-                </a:solidFill>
-                <a:latin typeface="Arial"/>
-              </a:rPr>
-              <a:t>M5 Session 1 - From Prompts to Harnesses</a:t>
-            </a:r>
-          </a:p>
-        </p:txBody>
-      </p:sp>
-      <p:sp>
-        <p:nvSpPr>
-          <p:cNvPr id="10" name="TextBox 9"/>
-          <p:cNvSpPr txBox="1"/>
-          <p:nvPr/>
-        </p:nvSpPr>
-        <p:spPr>
-          <a:xfrm>
-            <a:off x="11292840" y="6473952"/>
-            <a:ext cx="548640" cy="292608"/>
-          </a:xfrm>
-          <a:prstGeom prst="rect">
-            <a:avLst/>
-          </a:prstGeom>
-          <a:noFill/>
-        </p:spPr>
-        <p:txBody>
-          <a:bodyPr wrap="square">
-            <a:spAutoFit/>
-          </a:bodyPr>
-          <a:lstStyle/>
-          <a:p>
-            <a:pPr algn="r">
-              <a:spcAft>
-                <a:spcPts val="600"/>
-              </a:spcAft>
-              <a:buNone/>
-            </a:pPr>
-            <a:r>
-              <a:rPr sz="900" b="0">
-                <a:solidFill>
-                  <a:srgbClr val="5B6774"/>
-                </a:solidFill>
-                <a:latin typeface="Arial"/>
-              </a:rPr>
-              <a:t>15</a:t>
-            </a:r>
-          </a:p>
-        </p:txBody>
-      </p:sp>
-    </p:spTree>
-  </p:cSld>
-  <p:clrMapOvr>
-    <a:masterClrMapping/>
-  </p:clrMapOvr>
-</p:sld>
-</file>
-
-<file path=ppt/slides/slide16.xml><?xml version="1.0" encoding="utf-8"?>
-<p:sld xmlns:a="http://schemas.openxmlformats.org/drawingml/2006/main" xmlns:p="http://schemas.openxmlformats.org/presentationml/2006/main" xmlns:r="http://schemas.openxmlformats.org/officeDocument/2006/relationships">
-  <p:cSld>
-    <p:spTree>
-      <p:nvGrpSpPr>
-        <p:cNvPr id="1" name=""/>
-        <p:cNvGrpSpPr/>
-        <p:nvPr/>
-      </p:nvGrpSpPr>
-      <p:grpSpPr/>
-      <p:sp>
-        <p:nvSpPr>
-          <p:cNvPr id="2" name="Rectangle 1"/>
-          <p:cNvSpPr/>
-          <p:nvPr/>
-        </p:nvSpPr>
-        <p:spPr>
-          <a:xfrm>
-            <a:off x="0" y="0"/>
-            <a:ext cx="12191695" cy="6858000"/>
-          </a:xfrm>
-          <a:prstGeom prst="rect">
-            <a:avLst/>
-          </a:prstGeom>
-          <a:solidFill>
-            <a:srgbClr val="FFFFFF"/>
-          </a:solidFill>
-          <a:ln>
-            <a:noFill/>
-          </a:ln>
-          <a:effectLst/>
-        </p:spPr>
-        <p:style>
-          <a:lnRef idx="1">
-            <a:schemeClr val="accent1"/>
-          </a:lnRef>
-          <a:fillRef idx="3">
-            <a:schemeClr val="accent1"/>
-          </a:fillRef>
-          <a:effectRef idx="2">
-            <a:schemeClr val="accent1"/>
-          </a:effectRef>
-          <a:fontRef idx="minor">
-            <a:schemeClr val="lt1"/>
-          </a:fontRef>
-        </p:style>
-        <p:txBody>
-          <a:bodyPr rtlCol="0" anchor="ctr"/>
-          <a:lstStyle/>
-          <a:p>
-            <a:pPr algn="ctr"/>
-          </a:p>
-        </p:txBody>
-      </p:sp>
-      <p:sp>
-        <p:nvSpPr>
-          <p:cNvPr id="3" name="Rectangle 2"/>
-          <p:cNvSpPr/>
-          <p:nvPr/>
-        </p:nvSpPr>
-        <p:spPr>
-          <a:xfrm>
-            <a:off x="548640" y="475488"/>
-            <a:ext cx="457200" cy="54864"/>
-          </a:xfrm>
-          <a:prstGeom prst="rect">
-            <a:avLst/>
-          </a:prstGeom>
-          <a:solidFill>
-            <a:srgbClr val="1E5EF3"/>
-          </a:solidFill>
-          <a:ln>
-            <a:noFill/>
-          </a:ln>
-          <a:effectLst/>
-        </p:spPr>
-        <p:style>
-          <a:lnRef idx="1">
-            <a:schemeClr val="accent1"/>
-          </a:lnRef>
-          <a:fillRef idx="3">
-            <a:schemeClr val="accent1"/>
-          </a:fillRef>
-          <a:effectRef idx="2">
-            <a:schemeClr val="accent1"/>
-          </a:effectRef>
-          <a:fontRef idx="minor">
-            <a:schemeClr val="lt1"/>
-          </a:fontRef>
-        </p:style>
-        <p:txBody>
-          <a:bodyPr rtlCol="0" anchor="ctr"/>
-          <a:lstStyle/>
-          <a:p>
-            <a:pPr algn="ctr"/>
-          </a:p>
-        </p:txBody>
-      </p:sp>
-      <p:sp>
-        <p:nvSpPr>
-          <p:cNvPr id="4" name="TextBox 3"/>
-          <p:cNvSpPr txBox="1"/>
-          <p:nvPr/>
-        </p:nvSpPr>
-        <p:spPr>
-          <a:xfrm>
-            <a:off x="548640" y="603504"/>
-            <a:ext cx="11091672" cy="274320"/>
-          </a:xfrm>
-          <a:prstGeom prst="rect">
-            <a:avLst/>
-          </a:prstGeom>
-          <a:noFill/>
-        </p:spPr>
-        <p:txBody>
-          <a:bodyPr wrap="square">
-            <a:spAutoFit/>
-          </a:bodyPr>
-          <a:lstStyle/>
-          <a:p>
-            <a:pPr algn="l">
-              <a:spcAft>
-                <a:spcPts val="600"/>
-              </a:spcAft>
-              <a:buNone/>
-            </a:pPr>
-            <a:r>
-              <a:rPr sz="1100" b="1">
-                <a:solidFill>
-                  <a:srgbClr val="1E5EF3"/>
-                </a:solidFill>
-                <a:latin typeface="Arial"/>
-              </a:rPr>
-              <a:t>NOTEBOOK 01, SECTION 4</a:t>
-            </a:r>
-          </a:p>
-        </p:txBody>
-      </p:sp>
-      <p:sp>
-        <p:nvSpPr>
-          <p:cNvPr id="5" name="TextBox 4"/>
-          <p:cNvSpPr txBox="1"/>
-          <p:nvPr/>
-        </p:nvSpPr>
-        <p:spPr>
-          <a:xfrm>
-            <a:off x="548640" y="868680"/>
-            <a:ext cx="11091672" cy="777240"/>
-          </a:xfrm>
-          <a:prstGeom prst="rect">
-            <a:avLst/>
-          </a:prstGeom>
-          <a:noFill/>
-        </p:spPr>
-        <p:txBody>
-          <a:bodyPr wrap="square">
-            <a:spAutoFit/>
-          </a:bodyPr>
-          <a:lstStyle/>
-          <a:p>
-            <a:pPr algn="l">
-              <a:spcAft>
-                <a:spcPts val="0"/>
-              </a:spcAft>
-              <a:buNone/>
-            </a:pPr>
-            <a:r>
-              <a:rPr sz="2600" b="1">
-                <a:solidFill>
-                  <a:srgbClr val="0A2540"/>
-                </a:solidFill>
-                <a:latin typeface="Arial"/>
-              </a:rPr>
-              <a:t>The trace shows the loop working: search, read, check, then answer</a:t>
-            </a:r>
-          </a:p>
-        </p:txBody>
-      </p:sp>
-      <p:sp>
-        <p:nvSpPr>
-          <p:cNvPr id="6" name="Rectangle 5"/>
-          <p:cNvSpPr/>
-          <p:nvPr/>
-        </p:nvSpPr>
-        <p:spPr>
-          <a:xfrm>
-            <a:off x="548640" y="1664208"/>
-            <a:ext cx="11091672" cy="12801"/>
-          </a:xfrm>
-          <a:prstGeom prst="rect">
-            <a:avLst/>
-          </a:prstGeom>
-          <a:solidFill>
-            <a:srgbClr val="B9D0FA"/>
-          </a:solidFill>
-          <a:ln>
-            <a:noFill/>
-          </a:ln>
-          <a:effectLst/>
-        </p:spPr>
-        <p:style>
-          <a:lnRef idx="1">
-            <a:schemeClr val="accent1"/>
-          </a:lnRef>
-          <a:fillRef idx="3">
-            <a:schemeClr val="accent1"/>
-          </a:fillRef>
-          <a:effectRef idx="2">
-            <a:schemeClr val="accent1"/>
-          </a:effectRef>
-          <a:fontRef idx="minor">
-            <a:schemeClr val="lt1"/>
-          </a:fontRef>
-        </p:style>
-        <p:txBody>
-          <a:bodyPr rtlCol="0" anchor="ctr"/>
-          <a:lstStyle/>
-          <a:p>
-            <a:pPr algn="ctr"/>
-          </a:p>
-        </p:txBody>
-      </p:sp>
-      <p:sp>
-        <p:nvSpPr>
-          <p:cNvPr id="7" name="TextBox 6"/>
-          <p:cNvSpPr txBox="1"/>
-          <p:nvPr/>
-        </p:nvSpPr>
-        <p:spPr>
-          <a:xfrm>
-            <a:off x="548640" y="1874519"/>
-            <a:ext cx="4297680" cy="4206240"/>
-          </a:xfrm>
-          <a:prstGeom prst="rect">
-            <a:avLst/>
-          </a:prstGeom>
-          <a:noFill/>
-        </p:spPr>
-        <p:txBody>
-          <a:bodyPr wrap="square">
-            <a:spAutoFit/>
-          </a:bodyPr>
-          <a:lstStyle/>
-          <a:p>
-            <a:pPr algn="l" indent="-228600" marL="228600">
-              <a:spcAft>
-                <a:spcPts val="800"/>
-              </a:spcAft>
-              <a:buClr>
-                <a:srgbClr val="1E5EF3"/>
-              </a:buClr>
-              <a:buChar char="—"/>
-            </a:pPr>
-            <a:r>
-              <a:rPr sz="1450" b="0">
-                <a:solidFill>
-                  <a:srgbClr val="202B38"/>
-                </a:solidFill>
-                <a:latin typeface="Arial"/>
-              </a:rPr>
-              <a:t>How to read it: top lane = model calls, bottom lane = tool calls, left to right in time</a:t>
-            </a:r>
-          </a:p>
-          <a:p>
-            <a:pPr algn="l" indent="-228600" marL="228600">
-              <a:spcAft>
-                <a:spcPts val="800"/>
-              </a:spcAft>
-              <a:buClr>
-                <a:srgbClr val="1E5EF3"/>
-              </a:buClr>
-              <a:buChar char="—"/>
-            </a:pPr>
-            <a:r>
-              <a:rPr sz="1450" b="0">
-                <a:solidFill>
-                  <a:srgbClr val="202B38"/>
-                </a:solidFill>
-                <a:latin typeface="Arial"/>
-              </a:rPr>
-              <a:t>Call 1 asks for search_docs; the result names the document model-context-protocol</a:t>
-            </a:r>
-          </a:p>
-          <a:p>
-            <a:pPr algn="l" indent="-228600" marL="228600">
-              <a:spcAft>
-                <a:spcPts val="800"/>
-              </a:spcAft>
-              <a:buClr>
-                <a:srgbClr val="1E5EF3"/>
-              </a:buClr>
-              <a:buChar char="—"/>
-            </a:pPr>
-            <a:r>
-              <a:rPr sz="1450" b="0">
-                <a:solidFill>
-                  <a:srgbClr val="202B38"/>
-                </a:solidFill>
-                <a:latin typeface="Arial"/>
-              </a:rPr>
-              <a:t>Call 2 asks for read_doc; call 3 asks check_citation, which returns OK</a:t>
-            </a:r>
-          </a:p>
-          <a:p>
-            <a:pPr algn="l" indent="-228600" marL="228600">
-              <a:spcAft>
-                <a:spcPts val="800"/>
-              </a:spcAft>
-              <a:buClr>
-                <a:srgbClr val="1E5EF3"/>
-              </a:buClr>
-              <a:buChar char="—"/>
-            </a:pPr>
-            <a:r>
-              <a:rPr sz="1450" b="0">
-                <a:solidFill>
-                  <a:srgbClr val="202B38"/>
-                </a:solidFill>
-                <a:latin typeface="Arial"/>
-              </a:rPr>
-              <a:t>Call 4 has no tool call, so the loop stops and the answer carries its source</a:t>
-            </a:r>
-          </a:p>
-          <a:p>
-            <a:pPr algn="l" indent="-228600" marL="228600">
-              <a:spcAft>
-                <a:spcPts val="800"/>
-              </a:spcAft>
-              <a:buClr>
-                <a:srgbClr val="1E5EF3"/>
-              </a:buClr>
-              <a:buChar char="—"/>
-            </a:pPr>
-            <a:r>
-              <a:rPr sz="1450" b="0">
-                <a:solidFill>
-                  <a:srgbClr val="202B38"/>
-                </a:solidFill>
-                <a:latin typeface="Arial"/>
-              </a:rPr>
-              <a:t>In plain words: a trace is the record of every step - messages, tool calls, tokens, time</a:t>
-            </a:r>
-          </a:p>
-          <a:p>
-            <a:pPr algn="l" indent="-228600" marL="228600">
-              <a:spcAft>
-                <a:spcPts val="800"/>
-              </a:spcAft>
-              <a:buClr>
-                <a:srgbClr val="1E5EF3"/>
-              </a:buClr>
-              <a:buChar char="—"/>
-            </a:pPr>
-            <a:r>
-              <a:rPr sz="1450" b="0">
-                <a:solidFill>
-                  <a:srgbClr val="202B38"/>
-                </a:solidFill>
-                <a:latin typeface="Arial"/>
-              </a:rPr>
-              <a:t>result.trace.show() prints exactly this list</a:t>
-            </a:r>
-          </a:p>
-        </p:txBody>
-      </p:sp>
-      <p:pic>
-        <p:nvPicPr>
-          <p:cNvPr id="8" name="Picture 7" descr="s1_trace.png"/>
-          <p:cNvPicPr>
-            <a:picLocks noChangeAspect="1"/>
-          </p:cNvPicPr>
-          <p:nvPr/>
-        </p:nvPicPr>
-        <p:blipFill>
-          <a:blip r:embed="rId2"/>
-          <a:stretch>
-            <a:fillRect/>
-          </a:stretch>
-        </p:blipFill>
-        <p:spPr>
-          <a:xfrm>
-            <a:off x="5314490" y="1874519"/>
-            <a:ext cx="6104539" cy="4114800"/>
-          </a:xfrm>
-          <a:prstGeom prst="rect">
-            <a:avLst/>
-          </a:prstGeom>
-        </p:spPr>
-      </p:pic>
-      <p:sp>
-        <p:nvSpPr>
-          <p:cNvPr id="9" name="TextBox 8"/>
-          <p:cNvSpPr txBox="1"/>
-          <p:nvPr/>
-        </p:nvSpPr>
-        <p:spPr>
-          <a:xfrm>
-            <a:off x="5120640" y="6062471"/>
-            <a:ext cx="6492240" cy="365760"/>
-          </a:xfrm>
-          <a:prstGeom prst="rect">
-            <a:avLst/>
-          </a:prstGeom>
-          <a:noFill/>
-        </p:spPr>
-        <p:txBody>
-          <a:bodyPr wrap="square">
-            <a:spAutoFit/>
-          </a:bodyPr>
-          <a:lstStyle/>
-          <a:p>
-            <a:pPr algn="ctr">
-              <a:spcAft>
-                <a:spcPts val="600"/>
-              </a:spcAft>
-              <a:buNone/>
-            </a:pPr>
-            <a:r>
-              <a:rPr sz="1100" b="0">
-                <a:solidFill>
-                  <a:srgbClr val="5B6774"/>
-                </a:solidFill>
-                <a:latin typeface="Arial"/>
-              </a:rPr>
-              <a:t>Reference run on the deterministic stand-in (4 model calls, 3 tool calls, ~1,980 estimated tokens); the live run on Claude varies and reports real tokens.</a:t>
-            </a:r>
-          </a:p>
-        </p:txBody>
-      </p:sp>
-      <p:sp>
-        <p:nvSpPr>
-          <p:cNvPr id="10" name="TextBox 9"/>
-          <p:cNvSpPr txBox="1"/>
-          <p:nvPr/>
-        </p:nvSpPr>
-        <p:spPr>
-          <a:xfrm>
-            <a:off x="548640" y="6473952"/>
-            <a:ext cx="7315200" cy="292608"/>
-          </a:xfrm>
-          <a:prstGeom prst="rect">
-            <a:avLst/>
-          </a:prstGeom>
-          <a:noFill/>
-        </p:spPr>
-        <p:txBody>
-          <a:bodyPr wrap="square">
-            <a:spAutoFit/>
-          </a:bodyPr>
-          <a:lstStyle/>
-          <a:p>
-            <a:pPr algn="l">
-              <a:spcAft>
-                <a:spcPts val="600"/>
-              </a:spcAft>
-              <a:buNone/>
-            </a:pPr>
-            <a:r>
-              <a:rPr sz="900" b="0">
-                <a:solidFill>
-                  <a:srgbClr val="5B6774"/>
-                </a:solidFill>
-                <a:latin typeface="Arial"/>
-              </a:rPr>
-              <a:t>M5 Session 1 - From Prompts to Harnesses</a:t>
-            </a:r>
-          </a:p>
-        </p:txBody>
-      </p:sp>
-      <p:sp>
-        <p:nvSpPr>
-          <p:cNvPr id="11" name="TextBox 10"/>
-          <p:cNvSpPr txBox="1"/>
-          <p:nvPr/>
-        </p:nvSpPr>
-        <p:spPr>
-          <a:xfrm>
-            <a:off x="11292840" y="6473952"/>
-            <a:ext cx="548640" cy="292608"/>
-          </a:xfrm>
-          <a:prstGeom prst="rect">
-            <a:avLst/>
-          </a:prstGeom>
-          <a:noFill/>
-        </p:spPr>
-        <p:txBody>
-          <a:bodyPr wrap="square">
-            <a:spAutoFit/>
-          </a:bodyPr>
-          <a:lstStyle/>
-          <a:p>
-            <a:pPr algn="r">
-              <a:spcAft>
-                <a:spcPts val="600"/>
-              </a:spcAft>
-              <a:buNone/>
-            </a:pPr>
-            <a:r>
-              <a:rPr sz="900" b="0">
-                <a:solidFill>
-                  <a:srgbClr val="5B6774"/>
-                </a:solidFill>
-                <a:latin typeface="Arial"/>
-              </a:rPr>
-              <a:t>16</a:t>
-            </a:r>
-          </a:p>
-        </p:txBody>
-      </p:sp>
-    </p:spTree>
-  </p:cSld>
-  <p:clrMapOvr>
-    <a:masterClrMapping/>
-  </p:clrMapOvr>
-</p:sld>
-</file>
-
-<file path=ppt/slides/slide17.xml><?xml version="1.0" encoding="utf-8"?>
-<p:sld xmlns:a="http://schemas.openxmlformats.org/drawingml/2006/main" xmlns:p="http://schemas.openxmlformats.org/presentationml/2006/main" xmlns:r="http://schemas.openxmlformats.org/officeDocument/2006/relationships">
-  <p:cSld>
-    <p:spTree>
-      <p:nvGrpSpPr>
-        <p:cNvPr id="1" name=""/>
-        <p:cNvGrpSpPr/>
-        <p:nvPr/>
-      </p:nvGrpSpPr>
-      <p:grpSpPr/>
-      <p:sp>
-        <p:nvSpPr>
-          <p:cNvPr id="2" name="Rectangle 1"/>
-          <p:cNvSpPr/>
-          <p:nvPr/>
-        </p:nvSpPr>
-        <p:spPr>
-          <a:xfrm>
-            <a:off x="0" y="0"/>
-            <a:ext cx="12191695" cy="6858000"/>
-          </a:xfrm>
-          <a:prstGeom prst="rect">
-            <a:avLst/>
-          </a:prstGeom>
-          <a:solidFill>
-            <a:srgbClr val="FFFFFF"/>
-          </a:solidFill>
-          <a:ln>
-            <a:noFill/>
-          </a:ln>
-          <a:effectLst/>
-        </p:spPr>
-        <p:style>
-          <a:lnRef idx="1">
-            <a:schemeClr val="accent1"/>
-          </a:lnRef>
-          <a:fillRef idx="3">
-            <a:schemeClr val="accent1"/>
-          </a:fillRef>
-          <a:effectRef idx="2">
-            <a:schemeClr val="accent1"/>
-          </a:effectRef>
-          <a:fontRef idx="minor">
-            <a:schemeClr val="lt1"/>
-          </a:fontRef>
-        </p:style>
-        <p:txBody>
-          <a:bodyPr rtlCol="0" anchor="ctr"/>
-          <a:lstStyle/>
-          <a:p>
-            <a:pPr algn="ctr"/>
-          </a:p>
-        </p:txBody>
-      </p:sp>
-      <p:sp>
-        <p:nvSpPr>
-          <p:cNvPr id="3" name="Rectangle 2"/>
-          <p:cNvSpPr/>
-          <p:nvPr/>
-        </p:nvSpPr>
-        <p:spPr>
-          <a:xfrm>
-            <a:off x="548640" y="475488"/>
-            <a:ext cx="457200" cy="54864"/>
-          </a:xfrm>
-          <a:prstGeom prst="rect">
-            <a:avLst/>
-          </a:prstGeom>
-          <a:solidFill>
-            <a:srgbClr val="1E5EF3"/>
-          </a:solidFill>
-          <a:ln>
-            <a:noFill/>
-          </a:ln>
-          <a:effectLst/>
-        </p:spPr>
-        <p:style>
-          <a:lnRef idx="1">
-            <a:schemeClr val="accent1"/>
-          </a:lnRef>
-          <a:fillRef idx="3">
-            <a:schemeClr val="accent1"/>
-          </a:fillRef>
-          <a:effectRef idx="2">
-            <a:schemeClr val="accent1"/>
-          </a:effectRef>
-          <a:fontRef idx="minor">
-            <a:schemeClr val="lt1"/>
-          </a:fontRef>
-        </p:style>
-        <p:txBody>
-          <a:bodyPr rtlCol="0" anchor="ctr"/>
-          <a:lstStyle/>
-          <a:p>
-            <a:pPr algn="ctr"/>
-          </a:p>
-        </p:txBody>
-      </p:sp>
-      <p:sp>
-        <p:nvSpPr>
-          <p:cNvPr id="4" name="TextBox 3"/>
-          <p:cNvSpPr txBox="1"/>
-          <p:nvPr/>
-        </p:nvSpPr>
-        <p:spPr>
-          <a:xfrm>
-            <a:off x="548640" y="603504"/>
-            <a:ext cx="11091672" cy="274320"/>
-          </a:xfrm>
-          <a:prstGeom prst="rect">
-            <a:avLst/>
-          </a:prstGeom>
-          <a:noFill/>
-        </p:spPr>
-        <p:txBody>
-          <a:bodyPr wrap="square">
-            <a:spAutoFit/>
-          </a:bodyPr>
-          <a:lstStyle/>
-          <a:p>
-            <a:pPr algn="l">
-              <a:spcAft>
-                <a:spcPts val="600"/>
-              </a:spcAft>
-              <a:buNone/>
-            </a:pPr>
-            <a:r>
-              <a:rPr sz="1100" b="1">
-                <a:solidFill>
-                  <a:srgbClr val="1E5EF3"/>
-                </a:solidFill>
-                <a:latin typeface="Arial"/>
-              </a:rPr>
-              <a:t>NOTEBOOK 01, SECTION 4</a:t>
-            </a:r>
-          </a:p>
-        </p:txBody>
-      </p:sp>
-      <p:sp>
-        <p:nvSpPr>
-          <p:cNvPr id="5" name="TextBox 4"/>
-          <p:cNvSpPr txBox="1"/>
-          <p:nvPr/>
-        </p:nvSpPr>
-        <p:spPr>
-          <a:xfrm>
-            <a:off x="548640" y="868680"/>
-            <a:ext cx="11091672" cy="777240"/>
-          </a:xfrm>
-          <a:prstGeom prst="rect">
-            <a:avLst/>
-          </a:prstGeom>
-          <a:noFill/>
-        </p:spPr>
-        <p:txBody>
-          <a:bodyPr wrap="square">
-            <a:spAutoFit/>
-          </a:bodyPr>
-          <a:lstStyle/>
-          <a:p>
-            <a:pPr algn="l">
-              <a:spcAft>
-                <a:spcPts val="0"/>
-              </a:spcAft>
-              <a:buNone/>
-            </a:pPr>
-            <a:r>
-              <a:rPr sz="2600" b="1">
-                <a:solidFill>
-                  <a:srgbClr val="0A2540"/>
-                </a:solidFill>
-                <a:latin typeface="Arial"/>
-              </a:rPr>
-              <a:t>The right answer cost about 76 times the tokens of the wrong one</a:t>
-            </a:r>
-          </a:p>
-        </p:txBody>
-      </p:sp>
-      <p:sp>
-        <p:nvSpPr>
-          <p:cNvPr id="6" name="Rectangle 5"/>
-          <p:cNvSpPr/>
-          <p:nvPr/>
-        </p:nvSpPr>
-        <p:spPr>
-          <a:xfrm>
-            <a:off x="548640" y="1664208"/>
-            <a:ext cx="11091672" cy="12801"/>
-          </a:xfrm>
-          <a:prstGeom prst="rect">
-            <a:avLst/>
-          </a:prstGeom>
-          <a:solidFill>
-            <a:srgbClr val="B9D0FA"/>
-          </a:solidFill>
-          <a:ln>
-            <a:noFill/>
-          </a:ln>
-          <a:effectLst/>
-        </p:spPr>
-        <p:style>
-          <a:lnRef idx="1">
-            <a:schemeClr val="accent1"/>
-          </a:lnRef>
-          <a:fillRef idx="3">
-            <a:schemeClr val="accent1"/>
-          </a:fillRef>
-          <a:effectRef idx="2">
-            <a:schemeClr val="accent1"/>
-          </a:effectRef>
-          <a:fontRef idx="minor">
-            <a:schemeClr val="lt1"/>
-          </a:fontRef>
-        </p:style>
-        <p:txBody>
-          <a:bodyPr rtlCol="0" anchor="ctr"/>
-          <a:lstStyle/>
-          <a:p>
-            <a:pPr algn="ctr"/>
-          </a:p>
-        </p:txBody>
-      </p:sp>
-      <p:sp>
-        <p:nvSpPr>
-          <p:cNvPr id="7" name="TextBox 6"/>
-          <p:cNvSpPr txBox="1"/>
-          <p:nvPr/>
-        </p:nvSpPr>
-        <p:spPr>
-          <a:xfrm>
-            <a:off x="548640" y="1874519"/>
-            <a:ext cx="4297680" cy="4206240"/>
-          </a:xfrm>
-          <a:prstGeom prst="rect">
-            <a:avLst/>
-          </a:prstGeom>
-          <a:noFill/>
-        </p:spPr>
-        <p:txBody>
-          <a:bodyPr wrap="square">
-            <a:spAutoFit/>
-          </a:bodyPr>
-          <a:lstStyle/>
-          <a:p>
-            <a:pPr algn="l" indent="-228600" marL="228600">
-              <a:spcAft>
-                <a:spcPts val="800"/>
-              </a:spcAft>
-              <a:buClr>
-                <a:srgbClr val="1E5EF3"/>
-              </a:buClr>
-              <a:buChar char="—"/>
-            </a:pPr>
-            <a:r>
-              <a:rPr sz="1450" b="0">
-                <a:solidFill>
-                  <a:srgbClr val="202B38"/>
-                </a:solidFill>
-                <a:latin typeface="Arial"/>
-              </a:rPr>
-              <a:t>How to read it: bar length = estimated tokens for the whole run</a:t>
-            </a:r>
-          </a:p>
-          <a:p>
-            <a:pPr algn="l" indent="-228600" marL="228600">
-              <a:spcAft>
-                <a:spcPts val="800"/>
-              </a:spcAft>
-              <a:buClr>
-                <a:srgbClr val="1E5EF3"/>
-              </a:buClr>
-              <a:buChar char="—"/>
-            </a:pPr>
-            <a:r>
-              <a:rPr sz="1450" b="0">
-                <a:solidFill>
-                  <a:srgbClr val="202B38"/>
-                </a:solidFill>
-                <a:latin typeface="Arial"/>
-              </a:rPr>
-              <a:t>Bare prompt ~26 tokens, prompt-engineered ~39: one call each, both wrong</a:t>
-            </a:r>
-          </a:p>
-          <a:p>
-            <a:pPr algn="l" indent="-228600" marL="228600">
-              <a:spcAft>
-                <a:spcPts val="800"/>
-              </a:spcAft>
-              <a:buClr>
-                <a:srgbClr val="1E5EF3"/>
-              </a:buClr>
-              <a:buChar char="—"/>
-            </a:pPr>
-            <a:r>
-              <a:rPr sz="1450" b="0">
-                <a:solidFill>
-                  <a:srgbClr val="202B38"/>
-                </a:solidFill>
-                <a:latin typeface="Arial"/>
-              </a:rPr>
-              <a:t>Harness: four calls plus three tool results, ~1,980 tokens, right on both parts and cited</a:t>
-            </a:r>
-          </a:p>
-          <a:p>
-            <a:pPr algn="l" indent="-228600" marL="228600">
-              <a:spcAft>
-                <a:spcPts val="800"/>
-              </a:spcAft>
-              <a:buClr>
-                <a:srgbClr val="1E5EF3"/>
-              </a:buClr>
-              <a:buChar char="—"/>
-            </a:pPr>
-            <a:r>
-              <a:rPr sz="1450" b="0">
-                <a:solidFill>
-                  <a:srgbClr val="202B38"/>
-                </a:solidFill>
-                <a:latin typeface="Arial"/>
-              </a:rPr>
-              <a:t>The tool results are most of the cost: the full document enters the context</a:t>
-            </a:r>
-          </a:p>
-          <a:p>
-            <a:pPr algn="l" indent="-228600" marL="228600">
-              <a:spcAft>
-                <a:spcPts val="800"/>
-              </a:spcAft>
-              <a:buClr>
-                <a:srgbClr val="1E5EF3"/>
-              </a:buClr>
-              <a:buChar char="—"/>
-            </a:pPr>
-            <a:r>
-              <a:rPr sz="1450" b="0">
-                <a:solidFill>
-                  <a:srgbClr val="202B38"/>
-                </a:solidFill>
-                <a:latin typeface="Arial"/>
-              </a:rPr>
-              <a:t>In plain words: a harness trades tokens for facts and checks - measure the trade</a:t>
-            </a:r>
-          </a:p>
-          <a:p>
-            <a:pPr algn="l" indent="-228600" marL="228600">
-              <a:spcAft>
-                <a:spcPts val="800"/>
-              </a:spcAft>
-              <a:buClr>
-                <a:srgbClr val="1E5EF3"/>
-              </a:buClr>
-              <a:buChar char="—"/>
-            </a:pPr>
-            <a:r>
-              <a:rPr sz="1450" b="0">
-                <a:solidFill>
-                  <a:srgbClr val="202B38"/>
-                </a:solidFill>
-                <a:latin typeface="Arial"/>
-              </a:rPr>
-              <a:t>Session 2 shows how to keep that bill down: token-efficient tools and compaction</a:t>
-            </a:r>
-          </a:p>
-        </p:txBody>
-      </p:sp>
-      <p:pic>
-        <p:nvPicPr>
-          <p:cNvPr id="8" name="Picture 7" descr="s1_tokens.png"/>
-          <p:cNvPicPr>
-            <a:picLocks noChangeAspect="1"/>
-          </p:cNvPicPr>
-          <p:nvPr/>
-        </p:nvPicPr>
-        <p:blipFill>
-          <a:blip r:embed="rId2"/>
-          <a:stretch>
-            <a:fillRect/>
-          </a:stretch>
-        </p:blipFill>
-        <p:spPr>
-          <a:xfrm>
-            <a:off x="5120640" y="1874519"/>
-            <a:ext cx="6492240" cy="3845243"/>
-          </a:xfrm>
-          <a:prstGeom prst="rect">
-            <a:avLst/>
-          </a:prstGeom>
-        </p:spPr>
-      </p:pic>
-      <p:sp>
-        <p:nvSpPr>
-          <p:cNvPr id="9" name="TextBox 8"/>
-          <p:cNvSpPr txBox="1"/>
-          <p:nvPr/>
-        </p:nvSpPr>
-        <p:spPr>
-          <a:xfrm>
-            <a:off x="5120640" y="6062471"/>
-            <a:ext cx="6492240" cy="365760"/>
-          </a:xfrm>
-          <a:prstGeom prst="rect">
-            <a:avLst/>
-          </a:prstGeom>
-          <a:noFill/>
-        </p:spPr>
-        <p:txBody>
-          <a:bodyPr wrap="square">
-            <a:spAutoFit/>
-          </a:bodyPr>
-          <a:lstStyle/>
-          <a:p>
-            <a:pPr algn="ctr">
-              <a:spcAft>
-                <a:spcPts val="600"/>
-              </a:spcAft>
-              <a:buNone/>
-            </a:pPr>
-            <a:r>
-              <a:rPr sz="1100" b="0">
-                <a:solidFill>
-                  <a:srgbClr val="5B6774"/>
-                </a:solidFill>
-                <a:latin typeface="Arial"/>
-              </a:rPr>
-              <a:t>Reference run on the deterministic stand-in; the live run on Claude varies and reports real tokens. Anthropic's research system ran at ~15x a chat's tokens (Jun 2025).</a:t>
-            </a:r>
-          </a:p>
-        </p:txBody>
-      </p:sp>
-      <p:sp>
-        <p:nvSpPr>
-          <p:cNvPr id="10" name="TextBox 9"/>
-          <p:cNvSpPr txBox="1"/>
-          <p:nvPr/>
-        </p:nvSpPr>
-        <p:spPr>
-          <a:xfrm>
-            <a:off x="548640" y="6473952"/>
-            <a:ext cx="7315200" cy="292608"/>
-          </a:xfrm>
-          <a:prstGeom prst="rect">
-            <a:avLst/>
-          </a:prstGeom>
-          <a:noFill/>
-        </p:spPr>
-        <p:txBody>
-          <a:bodyPr wrap="square">
-            <a:spAutoFit/>
-          </a:bodyPr>
-          <a:lstStyle/>
-          <a:p>
-            <a:pPr algn="l">
-              <a:spcAft>
-                <a:spcPts val="600"/>
-              </a:spcAft>
-              <a:buNone/>
-            </a:pPr>
-            <a:r>
-              <a:rPr sz="900" b="0">
-                <a:solidFill>
-                  <a:srgbClr val="5B6774"/>
-                </a:solidFill>
-                <a:latin typeface="Arial"/>
-              </a:rPr>
-              <a:t>M5 Session 1 - From Prompts to Harnesses</a:t>
-            </a:r>
-          </a:p>
-        </p:txBody>
-      </p:sp>
-      <p:sp>
-        <p:nvSpPr>
-          <p:cNvPr id="11" name="TextBox 10"/>
-          <p:cNvSpPr txBox="1"/>
-          <p:nvPr/>
-        </p:nvSpPr>
-        <p:spPr>
-          <a:xfrm>
-            <a:off x="11292840" y="6473952"/>
-            <a:ext cx="548640" cy="292608"/>
-          </a:xfrm>
-          <a:prstGeom prst="rect">
-            <a:avLst/>
-          </a:prstGeom>
-          <a:noFill/>
-        </p:spPr>
-        <p:txBody>
-          <a:bodyPr wrap="square">
-            <a:spAutoFit/>
-          </a:bodyPr>
-          <a:lstStyle/>
-          <a:p>
-            <a:pPr algn="r">
-              <a:spcAft>
-                <a:spcPts val="600"/>
-              </a:spcAft>
-              <a:buNone/>
-            </a:pPr>
-            <a:r>
-              <a:rPr sz="900" b="0">
-                <a:solidFill>
-                  <a:srgbClr val="5B6774"/>
-                </a:solidFill>
-                <a:latin typeface="Arial"/>
-              </a:rPr>
-              <a:t>17</a:t>
-            </a:r>
-          </a:p>
-        </p:txBody>
-      </p:sp>
-    </p:spTree>
-  </p:cSld>
-  <p:clrMapOvr>
-    <a:masterClrMapping/>
-  </p:clrMapOvr>
-</p:sld>
-</file>
-
-<file path=ppt/slides/slide18.xml><?xml version="1.0" encoding="utf-8"?>
-<p:sld xmlns:a="http://schemas.openxmlformats.org/drawingml/2006/main" xmlns:p="http://schemas.openxmlformats.org/presentationml/2006/main" xmlns:r="http://schemas.openxmlformats.org/officeDocument/2006/relationships">
-  <p:cSld>
-    <p:spTree>
-      <p:nvGrpSpPr>
-        <p:cNvPr id="1" name=""/>
-        <p:cNvGrpSpPr/>
-        <p:nvPr/>
-      </p:nvGrpSpPr>
-      <p:grpSpPr/>
-      <p:sp>
-        <p:nvSpPr>
-          <p:cNvPr id="2" name="Rectangle 1"/>
-          <p:cNvSpPr/>
-          <p:nvPr/>
-        </p:nvSpPr>
-        <p:spPr>
-          <a:xfrm>
-            <a:off x="0" y="0"/>
-            <a:ext cx="12191695" cy="6858000"/>
-          </a:xfrm>
-          <a:prstGeom prst="rect">
-            <a:avLst/>
-          </a:prstGeom>
-          <a:solidFill>
-            <a:srgbClr val="FFFFFF"/>
-          </a:solidFill>
-          <a:ln>
-            <a:noFill/>
-          </a:ln>
-          <a:effectLst/>
-        </p:spPr>
-        <p:style>
-          <a:lnRef idx="1">
-            <a:schemeClr val="accent1"/>
-          </a:lnRef>
-          <a:fillRef idx="3">
-            <a:schemeClr val="accent1"/>
-          </a:fillRef>
-          <a:effectRef idx="2">
-            <a:schemeClr val="accent1"/>
-          </a:effectRef>
-          <a:fontRef idx="minor">
-            <a:schemeClr val="lt1"/>
-          </a:fontRef>
-        </p:style>
-        <p:txBody>
-          <a:bodyPr rtlCol="0" anchor="ctr"/>
-          <a:lstStyle/>
-          <a:p>
-            <a:pPr algn="ctr"/>
-          </a:p>
-        </p:txBody>
-      </p:sp>
-      <p:sp>
-        <p:nvSpPr>
-          <p:cNvPr id="3" name="Rectangle 2"/>
-          <p:cNvSpPr/>
-          <p:nvPr/>
-        </p:nvSpPr>
-        <p:spPr>
-          <a:xfrm>
-            <a:off x="548640" y="475488"/>
-            <a:ext cx="457200" cy="54864"/>
-          </a:xfrm>
-          <a:prstGeom prst="rect">
-            <a:avLst/>
-          </a:prstGeom>
-          <a:solidFill>
-            <a:srgbClr val="1E5EF3"/>
-          </a:solidFill>
-          <a:ln>
-            <a:noFill/>
-          </a:ln>
-          <a:effectLst/>
-        </p:spPr>
-        <p:style>
-          <a:lnRef idx="1">
-            <a:schemeClr val="accent1"/>
-          </a:lnRef>
-          <a:fillRef idx="3">
-            <a:schemeClr val="accent1"/>
-          </a:fillRef>
-          <a:effectRef idx="2">
-            <a:schemeClr val="accent1"/>
-          </a:effectRef>
-          <a:fontRef idx="minor">
-            <a:schemeClr val="lt1"/>
-          </a:fontRef>
-        </p:style>
-        <p:txBody>
-          <a:bodyPr rtlCol="0" anchor="ctr"/>
-          <a:lstStyle/>
-          <a:p>
-            <a:pPr algn="ctr"/>
-          </a:p>
-        </p:txBody>
-      </p:sp>
-      <p:sp>
-        <p:nvSpPr>
-          <p:cNvPr id="4" name="TextBox 3"/>
-          <p:cNvSpPr txBox="1"/>
-          <p:nvPr/>
-        </p:nvSpPr>
-        <p:spPr>
-          <a:xfrm>
-            <a:off x="548640" y="603504"/>
-            <a:ext cx="11091672" cy="274320"/>
-          </a:xfrm>
-          <a:prstGeom prst="rect">
-            <a:avLst/>
-          </a:prstGeom>
-          <a:noFill/>
-        </p:spPr>
-        <p:txBody>
-          <a:bodyPr wrap="square">
-            <a:spAutoFit/>
-          </a:bodyPr>
-          <a:lstStyle/>
-          <a:p>
-            <a:pPr algn="l">
-              <a:spcAft>
-                <a:spcPts val="600"/>
-              </a:spcAft>
-              <a:buNone/>
-            </a:pPr>
-            <a:r>
-              <a:rPr sz="1100" b="1">
-                <a:solidFill>
-                  <a:srgbClr val="1E5EF3"/>
-                </a:solidFill>
-                <a:latin typeface="Arial"/>
-              </a:rPr>
-              <a:t>NOTEBOOK 01, SECTION 3</a:t>
-            </a:r>
-          </a:p>
-        </p:txBody>
-      </p:sp>
-      <p:sp>
-        <p:nvSpPr>
-          <p:cNvPr id="5" name="TextBox 4"/>
-          <p:cNvSpPr txBox="1"/>
-          <p:nvPr/>
-        </p:nvSpPr>
-        <p:spPr>
-          <a:xfrm>
-            <a:off x="548640" y="868680"/>
-            <a:ext cx="11091672" cy="777240"/>
-          </a:xfrm>
-          <a:prstGeom prst="rect">
-            <a:avLst/>
-          </a:prstGeom>
-          <a:noFill/>
-        </p:spPr>
-        <p:txBody>
-          <a:bodyPr wrap="square">
-            <a:spAutoFit/>
-          </a:bodyPr>
-          <a:lstStyle/>
-          <a:p>
-            <a:pPr algn="l">
-              <a:spcAft>
-                <a:spcPts val="0"/>
-              </a:spcAft>
-              <a:buNone/>
-            </a:pPr>
-            <a:r>
-              <a:rPr sz="2600" b="1">
-                <a:solidFill>
-                  <a:srgbClr val="0A2540"/>
-                </a:solidFill>
-                <a:latin typeface="Arial"/>
-              </a:rPr>
-              <a:t>The smallest harness fits in 15 lines: a loop, a model call, a tool call, a stop</a:t>
-            </a:r>
-          </a:p>
-        </p:txBody>
-      </p:sp>
-      <p:sp>
-        <p:nvSpPr>
-          <p:cNvPr id="6" name="Rectangle 5"/>
-          <p:cNvSpPr/>
-          <p:nvPr/>
-        </p:nvSpPr>
-        <p:spPr>
-          <a:xfrm>
-            <a:off x="548640" y="1664208"/>
-            <a:ext cx="11091672" cy="12801"/>
-          </a:xfrm>
-          <a:prstGeom prst="rect">
-            <a:avLst/>
-          </a:prstGeom>
-          <a:solidFill>
-            <a:srgbClr val="B9D0FA"/>
-          </a:solidFill>
-          <a:ln>
-            <a:noFill/>
-          </a:ln>
-          <a:effectLst/>
-        </p:spPr>
-        <p:style>
-          <a:lnRef idx="1">
-            <a:schemeClr val="accent1"/>
-          </a:lnRef>
-          <a:fillRef idx="3">
-            <a:schemeClr val="accent1"/>
-          </a:fillRef>
-          <a:effectRef idx="2">
-            <a:schemeClr val="accent1"/>
-          </a:effectRef>
-          <a:fontRef idx="minor">
-            <a:schemeClr val="lt1"/>
-          </a:fontRef>
-        </p:style>
-        <p:txBody>
-          <a:bodyPr rtlCol="0" anchor="ctr"/>
-          <a:lstStyle/>
-          <a:p>
-            <a:pPr algn="ctr"/>
-          </a:p>
-        </p:txBody>
-      </p:sp>
-      <p:graphicFrame>
-        <p:nvGraphicFramePr>
-          <p:cNvPr id="7" name="Table 6"/>
-          <p:cNvGraphicFramePr>
-            <a:graphicFrameLocks noGrp="1"/>
-          </p:cNvGraphicFramePr>
-          <p:nvPr/>
-        </p:nvGraphicFramePr>
-        <p:xfrm>
-          <a:off x="548640" y="1874519"/>
-          <a:ext cx="11091671" cy="4114800"/>
-        </p:xfrm>
-        <a:graphic>
-          <a:graphicData uri="http://schemas.openxmlformats.org/drawingml/2006/table">
-            <a:tbl>
-              <a:tblPr firstRow="1" bandRow="1">
-                <a:tableStyleId>{5C22544A-7EE6-4342-B048-85BDC9FD1C3A}</a:tableStyleId>
-              </a:tblPr>
-              <a:tblGrid>
-                <a:gridCol w="5941967"/>
-                <a:gridCol w="5149704"/>
-              </a:tblGrid>
-              <a:tr h="457200">
-                <a:tc>
-                  <a:txBody>
-                    <a:bodyPr wrap="square"/>
-                    <a:lstStyle/>
-                    <a:p>
-                      <a:pPr algn="l">
-                        <a:spcAft>
-                          <a:spcPts val="0"/>
-                        </a:spcAft>
-                        <a:buNone/>
-                      </a:pPr>
-                      <a:r>
-                        <a:rPr sz="1300" b="1">
-                          <a:solidFill>
-                            <a:srgbClr val="FFFFFF"/>
-                          </a:solidFill>
-                          <a:latin typeface="Arial"/>
-                        </a:rPr>
-                        <a:t>Pseudo-code</a:t>
+                        <a:t>The line, from run_agent in notebook 01</a:t>
                       </a:r>
                     </a:p>
                   </a:txBody>
@@ -11311,13 +9381,1602 @@
                         <a:buNone/>
                       </a:pPr>
                       <a:r>
-                        <a:rPr sz="1150" b="0">
+                        <a:rPr sz="950" b="0">
                           <a:solidFill>
                             <a:srgbClr val="0A2540"/>
                           </a:solidFill>
                           <a:latin typeface="Courier New"/>
                         </a:rPr>
-                        <a:t>messages = [user(question)]</a:t>
+                        <a:t>messages = [{"role": "user", "content": question}]</a:t>
+                      </a:r>
+                    </a:p>
+                  </a:txBody>
+                  <a:tcPr>
+                    <a:solidFill>
+                      <a:srgbClr val="FFFFFF"/>
+                    </a:solidFill>
+                  </a:tcPr>
+                </a:tc>
+                <a:tc>
+                  <a:txBody>
+                    <a:bodyPr wrap="square"/>
+                    <a:lstStyle/>
+                    <a:p>
+                      <a:pPr algn="l">
+                        <a:spcAft>
+                          <a:spcPts val="0"/>
+                        </a:spcAft>
+                        <a:buNone/>
+                      </a:pPr>
+                      <a:r>
+                        <a:rPr sz="1150" b="0">
+                          <a:solidFill>
+                            <a:srgbClr val="202B38"/>
+                          </a:solidFill>
+                          <a:latin typeface="Arial"/>
+                        </a:rPr>
+                        <a:t>The context starts with the task; everything the model sees is in this list</a:t>
+                      </a:r>
+                    </a:p>
+                  </a:txBody>
+                  <a:tcPr>
+                    <a:solidFill>
+                      <a:srgbClr val="FFFFFF"/>
+                    </a:solidFill>
+                  </a:tcPr>
+                </a:tc>
+              </a:tr>
+              <a:tr h="457200">
+                <a:tc>
+                  <a:txBody>
+                    <a:bodyPr wrap="square"/>
+                    <a:lstStyle/>
+                    <a:p>
+                      <a:pPr algn="l">
+                        <a:spcAft>
+                          <a:spcPts val="0"/>
+                        </a:spcAft>
+                        <a:buNone/>
+                      </a:pPr>
+                      <a:r>
+                        <a:rPr sz="950" b="0">
+                          <a:solidFill>
+                            <a:srgbClr val="0A2540"/>
+                          </a:solidFill>
+                          <a:latin typeface="Courier New"/>
+                        </a:rPr>
+                        <a:t>for turn in range(1, max_turns + 1):</a:t>
+                      </a:r>
+                    </a:p>
+                  </a:txBody>
+                  <a:tcPr>
+                    <a:solidFill>
+                      <a:srgbClr val="EEF3FD"/>
+                    </a:solidFill>
+                  </a:tcPr>
+                </a:tc>
+                <a:tc>
+                  <a:txBody>
+                    <a:bodyPr wrap="square"/>
+                    <a:lstStyle/>
+                    <a:p>
+                      <a:pPr algn="l">
+                        <a:spcAft>
+                          <a:spcPts val="0"/>
+                        </a:spcAft>
+                        <a:buNone/>
+                      </a:pPr>
+                      <a:r>
+                        <a:rPr sz="1150" b="0">
+                          <a:solidFill>
+                            <a:srgbClr val="202B38"/>
+                          </a:solidFill>
+                          <a:latin typeface="Arial"/>
+                        </a:rPr>
+                        <a:t>Stop condition 1: a ceiling on model calls, so an agent never runs forever</a:t>
+                      </a:r>
+                    </a:p>
+                  </a:txBody>
+                  <a:tcPr>
+                    <a:solidFill>
+                      <a:srgbClr val="EEF3FD"/>
+                    </a:solidFill>
+                  </a:tcPr>
+                </a:tc>
+              </a:tr>
+              <a:tr h="457200">
+                <a:tc>
+                  <a:txBody>
+                    <a:bodyPr wrap="square"/>
+                    <a:lstStyle/>
+                    <a:p>
+                      <a:pPr algn="l">
+                        <a:spcAft>
+                          <a:spcPts val="0"/>
+                        </a:spcAft>
+                        <a:buNone/>
+                      </a:pPr>
+                      <a:r>
+                        <a:rPr sz="950" b="0">
+                          <a:solidFill>
+                            <a:srgbClr val="0A2540"/>
+                          </a:solidFill>
+                          <a:latin typeface="Courier New"/>
+                        </a:rPr>
+                        <a:t>response = client.messages.create(model=model, max_tokens=2000, system=system, tools=tools, messages=messages, output_config={"effort": effort})</a:t>
+                      </a:r>
+                    </a:p>
+                  </a:txBody>
+                  <a:tcPr>
+                    <a:solidFill>
+                      <a:srgbClr val="FFFFFF"/>
+                    </a:solidFill>
+                  </a:tcPr>
+                </a:tc>
+                <a:tc>
+                  <a:txBody>
+                    <a:bodyPr wrap="square"/>
+                    <a:lstStyle/>
+                    <a:p>
+                      <a:pPr algn="l">
+                        <a:spcAft>
+                          <a:spcPts val="0"/>
+                        </a:spcAft>
+                        <a:buNone/>
+                      </a:pPr>
+                      <a:r>
+                        <a:rPr sz="1150" b="0">
+                          <a:solidFill>
+                            <a:srgbClr val="202B38"/>
+                          </a:solidFill>
+                          <a:latin typeface="Arial"/>
+                        </a:rPr>
+                        <a:t>One real API call; tools is the JSON list of names, descriptions and input schemas</a:t>
+                      </a:r>
+                    </a:p>
+                  </a:txBody>
+                  <a:tcPr>
+                    <a:solidFill>
+                      <a:srgbClr val="FFFFFF"/>
+                    </a:solidFill>
+                  </a:tcPr>
+                </a:tc>
+              </a:tr>
+              <a:tr h="457200">
+                <a:tc>
+                  <a:txBody>
+                    <a:bodyPr wrap="square"/>
+                    <a:lstStyle/>
+                    <a:p>
+                      <a:pPr algn="l">
+                        <a:spcAft>
+                          <a:spcPts val="0"/>
+                        </a:spcAft>
+                        <a:buNone/>
+                      </a:pPr>
+                      <a:r>
+                        <a:rPr sz="950" b="0">
+                          <a:solidFill>
+                            <a:srgbClr val="0A2540"/>
+                          </a:solidFill>
+                          <a:latin typeface="Courier New"/>
+                        </a:rPr>
+                        <a:t>messages.append({"role": "assistant", "content": response.content})</a:t>
+                      </a:r>
+                    </a:p>
+                  </a:txBody>
+                  <a:tcPr>
+                    <a:solidFill>
+                      <a:srgbClr val="EEF3FD"/>
+                    </a:solidFill>
+                  </a:tcPr>
+                </a:tc>
+                <a:tc>
+                  <a:txBody>
+                    <a:bodyPr wrap="square"/>
+                    <a:lstStyle/>
+                    <a:p>
+                      <a:pPr algn="l">
+                        <a:spcAft>
+                          <a:spcPts val="0"/>
+                        </a:spcAft>
+                        <a:buNone/>
+                      </a:pPr>
+                      <a:r>
+                        <a:rPr sz="1150" b="0">
+                          <a:solidFill>
+                            <a:srgbClr val="202B38"/>
+                          </a:solidFill>
+                          <a:latin typeface="Arial"/>
+                        </a:rPr>
+                        <a:t>Replay the whole reply verbatim: thinking, text and tool_use blocks</a:t>
+                      </a:r>
+                    </a:p>
+                  </a:txBody>
+                  <a:tcPr>
+                    <a:solidFill>
+                      <a:srgbClr val="EEF3FD"/>
+                    </a:solidFill>
+                  </a:tcPr>
+                </a:tc>
+              </a:tr>
+              <a:tr h="457200">
+                <a:tc>
+                  <a:txBody>
+                    <a:bodyPr wrap="square"/>
+                    <a:lstStyle/>
+                    <a:p>
+                      <a:pPr algn="l">
+                        <a:spcAft>
+                          <a:spcPts val="0"/>
+                        </a:spcAft>
+                        <a:buNone/>
+                      </a:pPr>
+                      <a:r>
+                        <a:rPr sz="950" b="0">
+                          <a:solidFill>
+                            <a:srgbClr val="0A2540"/>
+                          </a:solidFill>
+                          <a:latin typeface="Courier New"/>
+                        </a:rPr>
+                        <a:t>if response.stop_reason != "tool_use": break</a:t>
+                      </a:r>
+                    </a:p>
+                  </a:txBody>
+                  <a:tcPr>
+                    <a:solidFill>
+                      <a:srgbClr val="FFFFFF"/>
+                    </a:solidFill>
+                  </a:tcPr>
+                </a:tc>
+                <a:tc>
+                  <a:txBody>
+                    <a:bodyPr wrap="square"/>
+                    <a:lstStyle/>
+                    <a:p>
+                      <a:pPr algn="l">
+                        <a:spcAft>
+                          <a:spcPts val="0"/>
+                        </a:spcAft>
+                        <a:buNone/>
+                      </a:pPr>
+                      <a:r>
+                        <a:rPr sz="1150" b="0">
+                          <a:solidFill>
+                            <a:srgbClr val="202B38"/>
+                          </a:solidFill>
+                          <a:latin typeface="Arial"/>
+                        </a:rPr>
+                        <a:t>Stop condition 2: end_turn means answered; max_tokens and refusal stop the loop too</a:t>
+                      </a:r>
+                    </a:p>
+                  </a:txBody>
+                  <a:tcPr>
+                    <a:solidFill>
+                      <a:srgbClr val="FFFFFF"/>
+                    </a:solidFill>
+                  </a:tcPr>
+                </a:tc>
+              </a:tr>
+              <a:tr h="457200">
+                <a:tc>
+                  <a:txBody>
+                    <a:bodyPr wrap="square"/>
+                    <a:lstStyle/>
+                    <a:p>
+                      <a:pPr algn="l">
+                        <a:spcAft>
+                          <a:spcPts val="0"/>
+                        </a:spcAft>
+                        <a:buNone/>
+                      </a:pPr>
+                      <a:r>
+                        <a:rPr sz="950" b="0">
+                          <a:solidFill>
+                            <a:srgbClr val="0A2540"/>
+                          </a:solidFill>
+                          <a:latin typeface="Courier New"/>
+                        </a:rPr>
+                        <a:t>for block in response.content: if block.type == "tool_use": output = functions[block.name](**block.input)</a:t>
+                      </a:r>
+                    </a:p>
+                  </a:txBody>
+                  <a:tcPr>
+                    <a:solidFill>
+                      <a:srgbClr val="EEF3FD"/>
+                    </a:solidFill>
+                  </a:tcPr>
+                </a:tc>
+                <a:tc>
+                  <a:txBody>
+                    <a:bodyPr wrap="square"/>
+                    <a:lstStyle/>
+                    <a:p>
+                      <a:pPr algn="l">
+                        <a:spcAft>
+                          <a:spcPts val="0"/>
+                        </a:spcAft>
+                        <a:buNone/>
+                      </a:pPr>
+                      <a:r>
+                        <a:rPr sz="1150" b="0">
+                          <a:solidFill>
+                            <a:srgbClr val="202B38"/>
+                          </a:solidFill>
+                          <a:latin typeface="Arial"/>
+                        </a:rPr>
+                        <a:t>Your code runs the function the model asked for by name, with its JSON arguments</a:t>
+                      </a:r>
+                    </a:p>
+                  </a:txBody>
+                  <a:tcPr>
+                    <a:solidFill>
+                      <a:srgbClr val="EEF3FD"/>
+                    </a:solidFill>
+                  </a:tcPr>
+                </a:tc>
+              </a:tr>
+              <a:tr h="457200">
+                <a:tc>
+                  <a:txBody>
+                    <a:bodyPr wrap="square"/>
+                    <a:lstStyle/>
+                    <a:p>
+                      <a:pPr algn="l">
+                        <a:spcAft>
+                          <a:spcPts val="0"/>
+                        </a:spcAft>
+                        <a:buNone/>
+                      </a:pPr>
+                      <a:r>
+                        <a:rPr sz="950" b="0">
+                          <a:solidFill>
+                            <a:srgbClr val="0A2540"/>
+                          </a:solidFill>
+                          <a:latin typeface="Courier New"/>
+                        </a:rPr>
+                        <a:t>{"type": "tool_result", "tool_use_id": block.id, "content": output, "is_error": True}  # is_error only on failure</a:t>
+                      </a:r>
+                    </a:p>
+                  </a:txBody>
+                  <a:tcPr>
+                    <a:solidFill>
+                      <a:srgbClr val="FFFFFF"/>
+                    </a:solidFill>
+                  </a:tcPr>
+                </a:tc>
+                <a:tc>
+                  <a:txBody>
+                    <a:bodyPr wrap="square"/>
+                    <a:lstStyle/>
+                    <a:p>
+                      <a:pPr algn="l">
+                        <a:spcAft>
+                          <a:spcPts val="0"/>
+                        </a:spcAft>
+                        <a:buNone/>
+                      </a:pPr>
+                      <a:r>
+                        <a:rPr sz="1150" b="0">
+                          <a:solidFill>
+                            <a:srgbClr val="202B38"/>
+                          </a:solidFill>
+                          <a:latin typeface="Arial"/>
+                        </a:rPr>
+                        <a:t>Each result answers one request by id; a failure goes back as an error the model can read, not a crash</a:t>
+                      </a:r>
+                    </a:p>
+                  </a:txBody>
+                  <a:tcPr>
+                    <a:solidFill>
+                      <a:srgbClr val="FFFFFF"/>
+                    </a:solidFill>
+                  </a:tcPr>
+                </a:tc>
+              </a:tr>
+              <a:tr h="457200">
+                <a:tc>
+                  <a:txBody>
+                    <a:bodyPr wrap="square"/>
+                    <a:lstStyle/>
+                    <a:p>
+                      <a:pPr algn="l">
+                        <a:spcAft>
+                          <a:spcPts val="0"/>
+                        </a:spcAft>
+                        <a:buNone/>
+                      </a:pPr>
+                      <a:r>
+                        <a:rPr sz="950" b="0">
+                          <a:solidFill>
+                            <a:srgbClr val="0A2540"/>
+                          </a:solidFill>
+                          <a:latin typeface="Courier New"/>
+                        </a:rPr>
+                        <a:t>messages.append({"role": "user", "content": results})</a:t>
+                      </a:r>
+                    </a:p>
+                  </a:txBody>
+                  <a:tcPr>
+                    <a:solidFill>
+                      <a:srgbClr val="EEF3FD"/>
+                    </a:solidFill>
+                  </a:tcPr>
+                </a:tc>
+                <a:tc>
+                  <a:txBody>
+                    <a:bodyPr wrap="square"/>
+                    <a:lstStyle/>
+                    <a:p>
+                      <a:pPr algn="l">
+                        <a:spcAft>
+                          <a:spcPts val="0"/>
+                        </a:spcAft>
+                        <a:buNone/>
+                      </a:pPr>
+                      <a:r>
+                        <a:rPr sz="1150" b="0">
+                          <a:solidFill>
+                            <a:srgbClr val="202B38"/>
+                          </a:solidFill>
+                          <a:latin typeface="Arial"/>
+                        </a:rPr>
+                        <a:t>All results of one turn travel in one user message; then the loop goes round again</a:t>
+                      </a:r>
+                    </a:p>
+                  </a:txBody>
+                  <a:tcPr>
+                    <a:solidFill>
+                      <a:srgbClr val="EEF3FD"/>
+                    </a:solidFill>
+                  </a:tcPr>
+                </a:tc>
+              </a:tr>
+            </a:tbl>
+          </a:graphicData>
+        </a:graphic>
+      </p:graphicFrame>
+      <p:sp>
+        <p:nvSpPr>
+          <p:cNvPr id="8" name="TextBox 7"/>
+          <p:cNvSpPr txBox="1"/>
+          <p:nvPr/>
+        </p:nvSpPr>
+        <p:spPr>
+          <a:xfrm>
+            <a:off x="548640" y="6053328"/>
+            <a:ext cx="11091672" cy="502920"/>
+          </a:xfrm>
+          <a:prstGeom prst="rect">
+            <a:avLst/>
+          </a:prstGeom>
+          <a:noFill/>
+        </p:spPr>
+        <p:txBody>
+          <a:bodyPr wrap="square">
+            <a:spAutoFit/>
+          </a:bodyPr>
+          <a:lstStyle/>
+          <a:p>
+            <a:pPr algn="l">
+              <a:spcAft>
+                <a:spcPts val="600"/>
+              </a:spcAft>
+              <a:buNone/>
+            </a:pPr>
+            <a:r>
+              <a:rPr sz="1200" b="0">
+                <a:solidFill>
+                  <a:srgbClr val="1E5EF3"/>
+                </a:solidFill>
+                <a:latin typeface="Arial"/>
+              </a:rPr>
+              <a:t>How to read it: left, the lines of run_agent (about forty with printing and bookkeeping, which are left out here); right, what each line does. The loop printed every tool_use and tool_result as it ran.</a:t>
+            </a:r>
+          </a:p>
+        </p:txBody>
+      </p:sp>
+      <p:sp>
+        <p:nvSpPr>
+          <p:cNvPr id="9" name="TextBox 8"/>
+          <p:cNvSpPr txBox="1"/>
+          <p:nvPr/>
+        </p:nvSpPr>
+        <p:spPr>
+          <a:xfrm>
+            <a:off x="548640" y="6473952"/>
+            <a:ext cx="7315200" cy="292608"/>
+          </a:xfrm>
+          <a:prstGeom prst="rect">
+            <a:avLst/>
+          </a:prstGeom>
+          <a:noFill/>
+        </p:spPr>
+        <p:txBody>
+          <a:bodyPr wrap="square">
+            <a:spAutoFit/>
+          </a:bodyPr>
+          <a:lstStyle/>
+          <a:p>
+            <a:pPr algn="l">
+              <a:spcAft>
+                <a:spcPts val="600"/>
+              </a:spcAft>
+              <a:buNone/>
+            </a:pPr>
+            <a:r>
+              <a:rPr sz="900" b="0">
+                <a:solidFill>
+                  <a:srgbClr val="5B6774"/>
+                </a:solidFill>
+                <a:latin typeface="Arial"/>
+              </a:rPr>
+              <a:t>M5 Session 1 - From Prompts to Harnesses</a:t>
+            </a:r>
+          </a:p>
+        </p:txBody>
+      </p:sp>
+      <p:sp>
+        <p:nvSpPr>
+          <p:cNvPr id="10" name="TextBox 9"/>
+          <p:cNvSpPr txBox="1"/>
+          <p:nvPr/>
+        </p:nvSpPr>
+        <p:spPr>
+          <a:xfrm>
+            <a:off x="11292840" y="6473952"/>
+            <a:ext cx="548640" cy="292608"/>
+          </a:xfrm>
+          <a:prstGeom prst="rect">
+            <a:avLst/>
+          </a:prstGeom>
+          <a:noFill/>
+        </p:spPr>
+        <p:txBody>
+          <a:bodyPr wrap="square">
+            <a:spAutoFit/>
+          </a:bodyPr>
+          <a:lstStyle/>
+          <a:p>
+            <a:pPr algn="r">
+              <a:spcAft>
+                <a:spcPts val="600"/>
+              </a:spcAft>
+              <a:buNone/>
+            </a:pPr>
+            <a:r>
+              <a:rPr sz="900" b="0">
+                <a:solidFill>
+                  <a:srgbClr val="5B6774"/>
+                </a:solidFill>
+                <a:latin typeface="Arial"/>
+              </a:rPr>
+              <a:t>15</a:t>
+            </a:r>
+          </a:p>
+        </p:txBody>
+      </p:sp>
+    </p:spTree>
+  </p:cSld>
+  <p:clrMapOvr>
+    <a:masterClrMapping/>
+  </p:clrMapOvr>
+</p:sld>
+</file>
+
+<file path=ppt/slides/slide16.xml><?xml version="1.0" encoding="utf-8"?>
+<p:sld xmlns:a="http://schemas.openxmlformats.org/drawingml/2006/main" xmlns:p="http://schemas.openxmlformats.org/presentationml/2006/main" xmlns:r="http://schemas.openxmlformats.org/officeDocument/2006/relationships">
+  <p:cSld>
+    <p:spTree>
+      <p:nvGrpSpPr>
+        <p:cNvPr id="1" name=""/>
+        <p:cNvGrpSpPr/>
+        <p:nvPr/>
+      </p:nvGrpSpPr>
+      <p:grpSpPr/>
+      <p:sp>
+        <p:nvSpPr>
+          <p:cNvPr id="2" name="Rectangle 1"/>
+          <p:cNvSpPr/>
+          <p:nvPr/>
+        </p:nvSpPr>
+        <p:spPr>
+          <a:xfrm>
+            <a:off x="0" y="0"/>
+            <a:ext cx="12191695" cy="6858000"/>
+          </a:xfrm>
+          <a:prstGeom prst="rect">
+            <a:avLst/>
+          </a:prstGeom>
+          <a:solidFill>
+            <a:srgbClr val="FFFFFF"/>
+          </a:solidFill>
+          <a:ln>
+            <a:noFill/>
+          </a:ln>
+          <a:effectLst/>
+        </p:spPr>
+        <p:style>
+          <a:lnRef idx="1">
+            <a:schemeClr val="accent1"/>
+          </a:lnRef>
+          <a:fillRef idx="3">
+            <a:schemeClr val="accent1"/>
+          </a:fillRef>
+          <a:effectRef idx="2">
+            <a:schemeClr val="accent1"/>
+          </a:effectRef>
+          <a:fontRef idx="minor">
+            <a:schemeClr val="lt1"/>
+          </a:fontRef>
+        </p:style>
+        <p:txBody>
+          <a:bodyPr rtlCol="0" anchor="ctr"/>
+          <a:lstStyle/>
+          <a:p>
+            <a:pPr algn="ctr"/>
+          </a:p>
+        </p:txBody>
+      </p:sp>
+      <p:sp>
+        <p:nvSpPr>
+          <p:cNvPr id="3" name="Rectangle 2"/>
+          <p:cNvSpPr/>
+          <p:nvPr/>
+        </p:nvSpPr>
+        <p:spPr>
+          <a:xfrm>
+            <a:off x="548640" y="475488"/>
+            <a:ext cx="457200" cy="54864"/>
+          </a:xfrm>
+          <a:prstGeom prst="rect">
+            <a:avLst/>
+          </a:prstGeom>
+          <a:solidFill>
+            <a:srgbClr val="1E5EF3"/>
+          </a:solidFill>
+          <a:ln>
+            <a:noFill/>
+          </a:ln>
+          <a:effectLst/>
+        </p:spPr>
+        <p:style>
+          <a:lnRef idx="1">
+            <a:schemeClr val="accent1"/>
+          </a:lnRef>
+          <a:fillRef idx="3">
+            <a:schemeClr val="accent1"/>
+          </a:fillRef>
+          <a:effectRef idx="2">
+            <a:schemeClr val="accent1"/>
+          </a:effectRef>
+          <a:fontRef idx="minor">
+            <a:schemeClr val="lt1"/>
+          </a:fontRef>
+        </p:style>
+        <p:txBody>
+          <a:bodyPr rtlCol="0" anchor="ctr"/>
+          <a:lstStyle/>
+          <a:p>
+            <a:pPr algn="ctr"/>
+          </a:p>
+        </p:txBody>
+      </p:sp>
+      <p:sp>
+        <p:nvSpPr>
+          <p:cNvPr id="4" name="TextBox 3"/>
+          <p:cNvSpPr txBox="1"/>
+          <p:nvPr/>
+        </p:nvSpPr>
+        <p:spPr>
+          <a:xfrm>
+            <a:off x="548640" y="603504"/>
+            <a:ext cx="11091672" cy="274320"/>
+          </a:xfrm>
+          <a:prstGeom prst="rect">
+            <a:avLst/>
+          </a:prstGeom>
+          <a:noFill/>
+        </p:spPr>
+        <p:txBody>
+          <a:bodyPr wrap="square">
+            <a:spAutoFit/>
+          </a:bodyPr>
+          <a:lstStyle/>
+          <a:p>
+            <a:pPr algn="l">
+              <a:spcAft>
+                <a:spcPts val="600"/>
+              </a:spcAft>
+              <a:buNone/>
+            </a:pPr>
+            <a:r>
+              <a:rPr sz="1100" b="1">
+                <a:solidFill>
+                  <a:srgbClr val="1E5EF3"/>
+                </a:solidFill>
+                <a:latin typeface="Arial"/>
+              </a:rPr>
+              <a:t>NOTEBOOK 01, SECTION 3.3, RECORDED RUN</a:t>
+            </a:r>
+          </a:p>
+        </p:txBody>
+      </p:sp>
+      <p:sp>
+        <p:nvSpPr>
+          <p:cNvPr id="5" name="TextBox 4"/>
+          <p:cNvSpPr txBox="1"/>
+          <p:nvPr/>
+        </p:nvSpPr>
+        <p:spPr>
+          <a:xfrm>
+            <a:off x="548640" y="868680"/>
+            <a:ext cx="11091672" cy="777240"/>
+          </a:xfrm>
+          <a:prstGeom prst="rect">
+            <a:avLst/>
+          </a:prstGeom>
+          <a:noFill/>
+        </p:spPr>
+        <p:txBody>
+          <a:bodyPr wrap="square">
+            <a:spAutoFit/>
+          </a:bodyPr>
+          <a:lstStyle/>
+          <a:p>
+            <a:pPr algn="l">
+              <a:spcAft>
+                <a:spcPts val="0"/>
+              </a:spcAft>
+              <a:buNone/>
+            </a:pPr>
+            <a:r>
+              <a:rPr sz="2600" b="1">
+                <a:solidFill>
+                  <a:srgbClr val="0A2540"/>
+                </a:solidFill>
+                <a:latin typeface="Arial"/>
+              </a:rPr>
+              <a:t>What the loop printed: two listings, one read, then the answer, in 3 model calls</a:t>
+            </a:r>
+          </a:p>
+        </p:txBody>
+      </p:sp>
+      <p:sp>
+        <p:nvSpPr>
+          <p:cNvPr id="6" name="Rectangle 5"/>
+          <p:cNvSpPr/>
+          <p:nvPr/>
+        </p:nvSpPr>
+        <p:spPr>
+          <a:xfrm>
+            <a:off x="548640" y="1664208"/>
+            <a:ext cx="11091672" cy="12801"/>
+          </a:xfrm>
+          <a:prstGeom prst="rect">
+            <a:avLst/>
+          </a:prstGeom>
+          <a:solidFill>
+            <a:srgbClr val="B9D0FA"/>
+          </a:solidFill>
+          <a:ln>
+            <a:noFill/>
+          </a:ln>
+          <a:effectLst/>
+        </p:spPr>
+        <p:style>
+          <a:lnRef idx="1">
+            <a:schemeClr val="accent1"/>
+          </a:lnRef>
+          <a:fillRef idx="3">
+            <a:schemeClr val="accent1"/>
+          </a:fillRef>
+          <a:effectRef idx="2">
+            <a:schemeClr val="accent1"/>
+          </a:effectRef>
+          <a:fontRef idx="minor">
+            <a:schemeClr val="lt1"/>
+          </a:fontRef>
+        </p:style>
+        <p:txBody>
+          <a:bodyPr rtlCol="0" anchor="ctr"/>
+          <a:lstStyle/>
+          <a:p>
+            <a:pPr algn="ctr"/>
+          </a:p>
+        </p:txBody>
+      </p:sp>
+      <p:sp>
+        <p:nvSpPr>
+          <p:cNvPr id="7" name="TextBox 6"/>
+          <p:cNvSpPr txBox="1"/>
+          <p:nvPr/>
+        </p:nvSpPr>
+        <p:spPr>
+          <a:xfrm>
+            <a:off x="548640" y="1874519"/>
+            <a:ext cx="4297680" cy="4206240"/>
+          </a:xfrm>
+          <a:prstGeom prst="rect">
+            <a:avLst/>
+          </a:prstGeom>
+          <a:noFill/>
+        </p:spPr>
+        <p:txBody>
+          <a:bodyPr wrap="square">
+            <a:spAutoFit/>
+          </a:bodyPr>
+          <a:lstStyle/>
+          <a:p>
+            <a:pPr algn="l" indent="-228600" marL="228600">
+              <a:spcAft>
+                <a:spcPts val="800"/>
+              </a:spcAft>
+              <a:buClr>
+                <a:srgbClr val="1E5EF3"/>
+              </a:buClr>
+              <a:buChar char="—"/>
+            </a:pPr>
+            <a:r>
+              <a:rPr sz="1450" b="0">
+                <a:solidFill>
+                  <a:srgbClr val="202B38"/>
+                </a:solidFill>
+                <a:latin typeface="Arial"/>
+              </a:rPr>
+              <a:t>How to read it: top lane = model calls, bottom lane = tool calls, left to right in time</a:t>
+            </a:r>
+          </a:p>
+          <a:p>
+            <a:pPr algn="l" indent="-228600" marL="228600">
+              <a:spcAft>
+                <a:spcPts val="800"/>
+              </a:spcAft>
+              <a:buClr>
+                <a:srgbClr val="1E5EF3"/>
+              </a:buClr>
+              <a:buChar char="—"/>
+            </a:pPr>
+            <a:r>
+              <a:rPr sz="1450" b="0">
+                <a:solidFill>
+                  <a:srgbClr val="202B38"/>
+                </a:solidFill>
+                <a:latin typeface="Arial"/>
+              </a:rPr>
+              <a:t>Call 1 asks for two listings at once; the loop runs both and returns both in one message</a:t>
+            </a:r>
+          </a:p>
+          <a:p>
+            <a:pPr algn="l" indent="-228600" marL="228600">
+              <a:spcAft>
+                <a:spcPts val="800"/>
+              </a:spcAft>
+              <a:buClr>
+                <a:srgbClr val="1E5EF3"/>
+              </a:buClr>
+              <a:buChar char="—"/>
+            </a:pPr>
+            <a:r>
+              <a:rPr sz="1450" b="0">
+                <a:solidFill>
+                  <a:srgbClr val="202B38"/>
+                </a:solidFill>
+                <a:latin typeface="Arial"/>
+              </a:rPr>
+              <a:t>Call 2 asks to read notebooks.yml; 2,809 characters come back as one tool_result</a:t>
+            </a:r>
+          </a:p>
+          <a:p>
+            <a:pPr algn="l" indent="-228600" marL="228600">
+              <a:spcAft>
+                <a:spcPts val="800"/>
+              </a:spcAft>
+              <a:buClr>
+                <a:srgbClr val="1E5EF3"/>
+              </a:buClr>
+              <a:buChar char="—"/>
+            </a:pPr>
+            <a:r>
+              <a:rPr sz="1450" b="0">
+                <a:solidFill>
+                  <a:srgbClr val="202B38"/>
+                </a:solidFill>
+                <a:latin typeface="Arial"/>
+              </a:rPr>
+              <a:t>Call 3 has no tool_use block: stop_reason end_turn, the loop stops. 3 model calls, 3 tool calls</a:t>
+            </a:r>
+          </a:p>
+          <a:p>
+            <a:pPr algn="l" indent="-228600" marL="228600">
+              <a:spcAft>
+                <a:spcPts val="800"/>
+              </a:spcAft>
+              <a:buClr>
+                <a:srgbClr val="1E5EF3"/>
+              </a:buClr>
+              <a:buChar char="—"/>
+            </a:pPr>
+            <a:r>
+              <a:rPr sz="1450" b="0">
+                <a:solidFill>
+                  <a:srgbClr val="202B38"/>
+                </a:solidFill>
+                <a:latin typeface="Arial"/>
+              </a:rPr>
+              <a:t>Input tokens grow call by call: 702, then 1,052, then 2,359. Each call carries all of it</a:t>
+            </a:r>
+          </a:p>
+          <a:p>
+            <a:pPr algn="l" indent="-228600" marL="228600">
+              <a:spcAft>
+                <a:spcPts val="800"/>
+              </a:spcAft>
+              <a:buClr>
+                <a:srgbClr val="1E5EF3"/>
+              </a:buClr>
+              <a:buChar char="—"/>
+            </a:pPr>
+            <a:r>
+              <a:rPr sz="1450" b="0">
+                <a:solidFill>
+                  <a:srgbClr val="202B38"/>
+                </a:solidFill>
+                <a:latin typeface="Arial"/>
+              </a:rPr>
+              <a:t>In plain words: the model never got smarter; it was given a way to look and a loop that kept asking</a:t>
+            </a:r>
+          </a:p>
+        </p:txBody>
+      </p:sp>
+      <p:pic>
+        <p:nvPicPr>
+          <p:cNvPr id="8" name="Picture 7" descr="s1_trace.png"/>
+          <p:cNvPicPr>
+            <a:picLocks noChangeAspect="1"/>
+          </p:cNvPicPr>
+          <p:nvPr/>
+        </p:nvPicPr>
+        <p:blipFill>
+          <a:blip r:embed="rId2"/>
+          <a:stretch>
+            <a:fillRect/>
+          </a:stretch>
+        </p:blipFill>
+        <p:spPr>
+          <a:xfrm>
+            <a:off x="5274395" y="1874519"/>
+            <a:ext cx="6184730" cy="4114800"/>
+          </a:xfrm>
+          <a:prstGeom prst="rect">
+            <a:avLst/>
+          </a:prstGeom>
+        </p:spPr>
+      </p:pic>
+      <p:sp>
+        <p:nvSpPr>
+          <p:cNvPr id="9" name="TextBox 8"/>
+          <p:cNvSpPr txBox="1"/>
+          <p:nvPr/>
+        </p:nvSpPr>
+        <p:spPr>
+          <a:xfrm>
+            <a:off x="5120640" y="6062471"/>
+            <a:ext cx="6492240" cy="365760"/>
+          </a:xfrm>
+          <a:prstGeom prst="rect">
+            <a:avLst/>
+          </a:prstGeom>
+          <a:noFill/>
+        </p:spPr>
+        <p:txBody>
+          <a:bodyPr wrap="square">
+            <a:spAutoFit/>
+          </a:bodyPr>
+          <a:lstStyle/>
+          <a:p>
+            <a:pPr algn="ctr">
+              <a:spcAft>
+                <a:spcPts val="600"/>
+              </a:spcAft>
+              <a:buNone/>
+            </a:pPr>
+            <a:r>
+              <a:rPr sz="1100" b="0">
+                <a:solidFill>
+                  <a:srgbClr val="5B6774"/>
+                </a:solidFill>
+                <a:latin typeface="Arial"/>
+              </a:rPr>
+              <a:t>Recorded run on claude-opus-5, 30 Sep 2026; live runs vary in route and tokens. Total 4,113 input and 350 output tokens, 0.0293 USD.</a:t>
+            </a:r>
+          </a:p>
+        </p:txBody>
+      </p:sp>
+      <p:sp>
+        <p:nvSpPr>
+          <p:cNvPr id="10" name="TextBox 9"/>
+          <p:cNvSpPr txBox="1"/>
+          <p:nvPr/>
+        </p:nvSpPr>
+        <p:spPr>
+          <a:xfrm>
+            <a:off x="548640" y="6473952"/>
+            <a:ext cx="7315200" cy="292608"/>
+          </a:xfrm>
+          <a:prstGeom prst="rect">
+            <a:avLst/>
+          </a:prstGeom>
+          <a:noFill/>
+        </p:spPr>
+        <p:txBody>
+          <a:bodyPr wrap="square">
+            <a:spAutoFit/>
+          </a:bodyPr>
+          <a:lstStyle/>
+          <a:p>
+            <a:pPr algn="l">
+              <a:spcAft>
+                <a:spcPts val="600"/>
+              </a:spcAft>
+              <a:buNone/>
+            </a:pPr>
+            <a:r>
+              <a:rPr sz="900" b="0">
+                <a:solidFill>
+                  <a:srgbClr val="5B6774"/>
+                </a:solidFill>
+                <a:latin typeface="Arial"/>
+              </a:rPr>
+              <a:t>M5 Session 1 - From Prompts to Harnesses</a:t>
+            </a:r>
+          </a:p>
+        </p:txBody>
+      </p:sp>
+      <p:sp>
+        <p:nvSpPr>
+          <p:cNvPr id="11" name="TextBox 10"/>
+          <p:cNvSpPr txBox="1"/>
+          <p:nvPr/>
+        </p:nvSpPr>
+        <p:spPr>
+          <a:xfrm>
+            <a:off x="11292840" y="6473952"/>
+            <a:ext cx="548640" cy="292608"/>
+          </a:xfrm>
+          <a:prstGeom prst="rect">
+            <a:avLst/>
+          </a:prstGeom>
+          <a:noFill/>
+        </p:spPr>
+        <p:txBody>
+          <a:bodyPr wrap="square">
+            <a:spAutoFit/>
+          </a:bodyPr>
+          <a:lstStyle/>
+          <a:p>
+            <a:pPr algn="r">
+              <a:spcAft>
+                <a:spcPts val="600"/>
+              </a:spcAft>
+              <a:buNone/>
+            </a:pPr>
+            <a:r>
+              <a:rPr sz="900" b="0">
+                <a:solidFill>
+                  <a:srgbClr val="5B6774"/>
+                </a:solidFill>
+                <a:latin typeface="Arial"/>
+              </a:rPr>
+              <a:t>16</a:t>
+            </a:r>
+          </a:p>
+        </p:txBody>
+      </p:sp>
+    </p:spTree>
+  </p:cSld>
+  <p:clrMapOvr>
+    <a:masterClrMapping/>
+  </p:clrMapOvr>
+</p:sld>
+</file>
+
+<file path=ppt/slides/slide17.xml><?xml version="1.0" encoding="utf-8"?>
+<p:sld xmlns:a="http://schemas.openxmlformats.org/drawingml/2006/main" xmlns:p="http://schemas.openxmlformats.org/presentationml/2006/main" xmlns:r="http://schemas.openxmlformats.org/officeDocument/2006/relationships">
+  <p:cSld>
+    <p:spTree>
+      <p:nvGrpSpPr>
+        <p:cNvPr id="1" name=""/>
+        <p:cNvGrpSpPr/>
+        <p:nvPr/>
+      </p:nvGrpSpPr>
+      <p:grpSpPr/>
+      <p:sp>
+        <p:nvSpPr>
+          <p:cNvPr id="2" name="Rectangle 1"/>
+          <p:cNvSpPr/>
+          <p:nvPr/>
+        </p:nvSpPr>
+        <p:spPr>
+          <a:xfrm>
+            <a:off x="0" y="0"/>
+            <a:ext cx="12191695" cy="6858000"/>
+          </a:xfrm>
+          <a:prstGeom prst="rect">
+            <a:avLst/>
+          </a:prstGeom>
+          <a:solidFill>
+            <a:srgbClr val="FFFFFF"/>
+          </a:solidFill>
+          <a:ln>
+            <a:noFill/>
+          </a:ln>
+          <a:effectLst/>
+        </p:spPr>
+        <p:style>
+          <a:lnRef idx="1">
+            <a:schemeClr val="accent1"/>
+          </a:lnRef>
+          <a:fillRef idx="3">
+            <a:schemeClr val="accent1"/>
+          </a:fillRef>
+          <a:effectRef idx="2">
+            <a:schemeClr val="accent1"/>
+          </a:effectRef>
+          <a:fontRef idx="minor">
+            <a:schemeClr val="lt1"/>
+          </a:fontRef>
+        </p:style>
+        <p:txBody>
+          <a:bodyPr rtlCol="0" anchor="ctr"/>
+          <a:lstStyle/>
+          <a:p>
+            <a:pPr algn="ctr"/>
+          </a:p>
+        </p:txBody>
+      </p:sp>
+      <p:sp>
+        <p:nvSpPr>
+          <p:cNvPr id="3" name="Rectangle 2"/>
+          <p:cNvSpPr/>
+          <p:nvPr/>
+        </p:nvSpPr>
+        <p:spPr>
+          <a:xfrm>
+            <a:off x="548640" y="475488"/>
+            <a:ext cx="457200" cy="54864"/>
+          </a:xfrm>
+          <a:prstGeom prst="rect">
+            <a:avLst/>
+          </a:prstGeom>
+          <a:solidFill>
+            <a:srgbClr val="1E5EF3"/>
+          </a:solidFill>
+          <a:ln>
+            <a:noFill/>
+          </a:ln>
+          <a:effectLst/>
+        </p:spPr>
+        <p:style>
+          <a:lnRef idx="1">
+            <a:schemeClr val="accent1"/>
+          </a:lnRef>
+          <a:fillRef idx="3">
+            <a:schemeClr val="accent1"/>
+          </a:fillRef>
+          <a:effectRef idx="2">
+            <a:schemeClr val="accent1"/>
+          </a:effectRef>
+          <a:fontRef idx="minor">
+            <a:schemeClr val="lt1"/>
+          </a:fontRef>
+        </p:style>
+        <p:txBody>
+          <a:bodyPr rtlCol="0" anchor="ctr"/>
+          <a:lstStyle/>
+          <a:p>
+            <a:pPr algn="ctr"/>
+          </a:p>
+        </p:txBody>
+      </p:sp>
+      <p:sp>
+        <p:nvSpPr>
+          <p:cNvPr id="4" name="TextBox 3"/>
+          <p:cNvSpPr txBox="1"/>
+          <p:nvPr/>
+        </p:nvSpPr>
+        <p:spPr>
+          <a:xfrm>
+            <a:off x="548640" y="603504"/>
+            <a:ext cx="11091672" cy="274320"/>
+          </a:xfrm>
+          <a:prstGeom prst="rect">
+            <a:avLst/>
+          </a:prstGeom>
+          <a:noFill/>
+        </p:spPr>
+        <p:txBody>
+          <a:bodyPr wrap="square">
+            <a:spAutoFit/>
+          </a:bodyPr>
+          <a:lstStyle/>
+          <a:p>
+            <a:pPr algn="l">
+              <a:spcAft>
+                <a:spcPts val="600"/>
+              </a:spcAft>
+              <a:buNone/>
+            </a:pPr>
+            <a:r>
+              <a:rPr sz="1100" b="1">
+                <a:solidFill>
+                  <a:srgbClr val="1E5EF3"/>
+                </a:solidFill>
+                <a:latin typeface="Arial"/>
+              </a:rPr>
+              <a:t>NOTEBOOK 01, SECTION 3.4</a:t>
+            </a:r>
+          </a:p>
+        </p:txBody>
+      </p:sp>
+      <p:sp>
+        <p:nvSpPr>
+          <p:cNvPr id="5" name="TextBox 4"/>
+          <p:cNvSpPr txBox="1"/>
+          <p:nvPr/>
+        </p:nvSpPr>
+        <p:spPr>
+          <a:xfrm>
+            <a:off x="548640" y="868680"/>
+            <a:ext cx="11091672" cy="777240"/>
+          </a:xfrm>
+          <a:prstGeom prst="rect">
+            <a:avLst/>
+          </a:prstGeom>
+          <a:noFill/>
+        </p:spPr>
+        <p:txBody>
+          <a:bodyPr wrap="square">
+            <a:spAutoFit/>
+          </a:bodyPr>
+          <a:lstStyle/>
+          <a:p>
+            <a:pPr algn="l">
+              <a:spcAft>
+                <a:spcPts val="0"/>
+              </a:spcAft>
+              <a:buNone/>
+            </a:pPr>
+            <a:r>
+              <a:rPr sz="2600" b="1">
+                <a:solidFill>
+                  <a:srgbClr val="0A2540"/>
+                </a:solidFill>
+                <a:latin typeface="Arial"/>
+              </a:rPr>
+              <a:t>Three ways side by side: only the harness gives the fact, and it pays for it in input tokens</a:t>
+            </a:r>
+          </a:p>
+        </p:txBody>
+      </p:sp>
+      <p:sp>
+        <p:nvSpPr>
+          <p:cNvPr id="6" name="Rectangle 5"/>
+          <p:cNvSpPr/>
+          <p:nvPr/>
+        </p:nvSpPr>
+        <p:spPr>
+          <a:xfrm>
+            <a:off x="548640" y="1664208"/>
+            <a:ext cx="11091672" cy="12801"/>
+          </a:xfrm>
+          <a:prstGeom prst="rect">
+            <a:avLst/>
+          </a:prstGeom>
+          <a:solidFill>
+            <a:srgbClr val="B9D0FA"/>
+          </a:solidFill>
+          <a:ln>
+            <a:noFill/>
+          </a:ln>
+          <a:effectLst/>
+        </p:spPr>
+        <p:style>
+          <a:lnRef idx="1">
+            <a:schemeClr val="accent1"/>
+          </a:lnRef>
+          <a:fillRef idx="3">
+            <a:schemeClr val="accent1"/>
+          </a:fillRef>
+          <a:effectRef idx="2">
+            <a:schemeClr val="accent1"/>
+          </a:effectRef>
+          <a:fontRef idx="minor">
+            <a:schemeClr val="lt1"/>
+          </a:fontRef>
+        </p:style>
+        <p:txBody>
+          <a:bodyPr rtlCol="0" anchor="ctr"/>
+          <a:lstStyle/>
+          <a:p>
+            <a:pPr algn="ctr"/>
+          </a:p>
+        </p:txBody>
+      </p:sp>
+      <p:graphicFrame>
+        <p:nvGraphicFramePr>
+          <p:cNvPr id="7" name="Table 6"/>
+          <p:cNvGraphicFramePr>
+            <a:graphicFrameLocks noGrp="1"/>
+          </p:cNvGraphicFramePr>
+          <p:nvPr/>
+        </p:nvGraphicFramePr>
+        <p:xfrm>
+          <a:off x="548640" y="1874519"/>
+          <a:ext cx="11091668" cy="1828800"/>
+        </p:xfrm>
+        <a:graphic>
+          <a:graphicData uri="http://schemas.openxmlformats.org/drawingml/2006/table">
+            <a:tbl>
+              <a:tblPr firstRow="1" bandRow="1">
+                <a:tableStyleId>{5C22544A-7EE6-4342-B048-85BDC9FD1C3A}</a:tableStyleId>
+              </a:tblPr>
+              <a:tblGrid>
+                <a:gridCol w="2401289"/>
+                <a:gridCol w="1143471"/>
+                <a:gridCol w="1029124"/>
+                <a:gridCol w="1257818"/>
+                <a:gridCol w="1372165"/>
+                <a:gridCol w="1143471"/>
+                <a:gridCol w="1372165"/>
+                <a:gridCol w="1372165"/>
+              </a:tblGrid>
+              <a:tr h="457200">
+                <a:tc>
+                  <a:txBody>
+                    <a:bodyPr wrap="square"/>
+                    <a:lstStyle/>
+                    <a:p>
+                      <a:pPr algn="l">
+                        <a:spcAft>
+                          <a:spcPts val="0"/>
+                        </a:spcAft>
+                        <a:buNone/>
+                      </a:pPr>
+                      <a:r>
+                        <a:rPr sz="1300" b="1">
+                          <a:solidFill>
+                            <a:srgbClr val="FFFFFF"/>
+                          </a:solidFill>
+                          <a:latin typeface="Arial"/>
+                        </a:rPr>
+                        <a:t>Approach</a:t>
+                      </a:r>
+                    </a:p>
+                  </a:txBody>
+                  <a:tcPr>
+                    <a:solidFill>
+                      <a:srgbClr val="0A2540"/>
+                    </a:solidFill>
+                  </a:tcPr>
+                </a:tc>
+                <a:tc>
+                  <a:txBody>
+                    <a:bodyPr wrap="square"/>
+                    <a:lstStyle/>
+                    <a:p>
+                      <a:pPr algn="l">
+                        <a:spcAft>
+                          <a:spcPts val="0"/>
+                        </a:spcAft>
+                        <a:buNone/>
+                      </a:pPr>
+                      <a:r>
+                        <a:rPr sz="1300" b="1">
+                          <a:solidFill>
+                            <a:srgbClr val="FFFFFF"/>
+                          </a:solidFill>
+                          <a:latin typeface="Arial"/>
+                        </a:rPr>
+                        <a:t>Model calls</a:t>
+                      </a:r>
+                    </a:p>
+                  </a:txBody>
+                  <a:tcPr>
+                    <a:solidFill>
+                      <a:srgbClr val="0A2540"/>
+                    </a:solidFill>
+                  </a:tcPr>
+                </a:tc>
+                <a:tc>
+                  <a:txBody>
+                    <a:bodyPr wrap="square"/>
+                    <a:lstStyle/>
+                    <a:p>
+                      <a:pPr algn="l">
+                        <a:spcAft>
+                          <a:spcPts val="0"/>
+                        </a:spcAft>
+                        <a:buNone/>
+                      </a:pPr>
+                      <a:r>
+                        <a:rPr sz="1300" b="1">
+                          <a:solidFill>
+                            <a:srgbClr val="FFFFFF"/>
+                          </a:solidFill>
+                          <a:latin typeface="Arial"/>
+                        </a:rPr>
+                        <a:t>Tool calls</a:t>
+                      </a:r>
+                    </a:p>
+                  </a:txBody>
+                  <a:tcPr>
+                    <a:solidFill>
+                      <a:srgbClr val="0A2540"/>
+                    </a:solidFill>
+                  </a:tcPr>
+                </a:tc>
+                <a:tc>
+                  <a:txBody>
+                    <a:bodyPr wrap="square"/>
+                    <a:lstStyle/>
+                    <a:p>
+                      <a:pPr algn="l">
+                        <a:spcAft>
+                          <a:spcPts val="0"/>
+                        </a:spcAft>
+                        <a:buNone/>
+                      </a:pPr>
+                      <a:r>
+                        <a:rPr sz="1300" b="1">
+                          <a:solidFill>
+                            <a:srgbClr val="FFFFFF"/>
+                          </a:solidFill>
+                          <a:latin typeface="Arial"/>
+                        </a:rPr>
+                        <a:t>Input tokens</a:t>
+                      </a:r>
+                    </a:p>
+                  </a:txBody>
+                  <a:tcPr>
+                    <a:solidFill>
+                      <a:srgbClr val="0A2540"/>
+                    </a:solidFill>
+                  </a:tcPr>
+                </a:tc>
+                <a:tc>
+                  <a:txBody>
+                    <a:bodyPr wrap="square"/>
+                    <a:lstStyle/>
+                    <a:p>
+                      <a:pPr algn="l">
+                        <a:spcAft>
+                          <a:spcPts val="0"/>
+                        </a:spcAft>
+                        <a:buNone/>
+                      </a:pPr>
+                      <a:r>
+                        <a:rPr sz="1300" b="1">
+                          <a:solidFill>
+                            <a:srgbClr val="FFFFFF"/>
+                          </a:solidFill>
+                          <a:latin typeface="Arial"/>
+                        </a:rPr>
+                        <a:t>Output tokens</a:t>
+                      </a:r>
+                    </a:p>
+                  </a:txBody>
+                  <a:tcPr>
+                    <a:solidFill>
+                      <a:srgbClr val="0A2540"/>
+                    </a:solidFill>
+                  </a:tcPr>
+                </a:tc>
+                <a:tc>
+                  <a:txBody>
+                    <a:bodyPr wrap="square"/>
+                    <a:lstStyle/>
+                    <a:p>
+                      <a:pPr algn="l">
+                        <a:spcAft>
+                          <a:spcPts val="0"/>
+                        </a:spcAft>
+                        <a:buNone/>
+                      </a:pPr>
+                      <a:r>
+                        <a:rPr sz="1300" b="1">
+                          <a:solidFill>
+                            <a:srgbClr val="FFFFFF"/>
+                          </a:solidFill>
+                          <a:latin typeface="Arial"/>
+                        </a:rPr>
+                        <a:t>Cost (USD)</a:t>
+                      </a:r>
+                    </a:p>
+                  </a:txBody>
+                  <a:tcPr>
+                    <a:solidFill>
+                      <a:srgbClr val="0A2540"/>
+                    </a:solidFill>
+                  </a:tcPr>
+                </a:tc>
+                <a:tc>
+                  <a:txBody>
+                    <a:bodyPr wrap="square"/>
+                    <a:lstStyle/>
+                    <a:p>
+                      <a:pPr algn="l">
+                        <a:spcAft>
+                          <a:spcPts val="0"/>
+                        </a:spcAft>
+                        <a:buNone/>
+                      </a:pPr>
+                      <a:r>
+                        <a:rPr sz="1300" b="1">
+                          <a:solidFill>
+                            <a:srgbClr val="FFFFFF"/>
+                          </a:solidFill>
+                          <a:latin typeface="Arial"/>
+                        </a:rPr>
+                        <a:t>Gives the fact</a:t>
+                      </a:r>
+                    </a:p>
+                  </a:txBody>
+                  <a:tcPr>
+                    <a:solidFill>
+                      <a:srgbClr val="0A2540"/>
+                    </a:solidFill>
+                  </a:tcPr>
+                </a:tc>
+                <a:tc>
+                  <a:txBody>
+                    <a:bodyPr wrap="square"/>
+                    <a:lstStyle/>
+                    <a:p>
+                      <a:pPr algn="l">
+                        <a:spcAft>
+                          <a:spcPts val="0"/>
+                        </a:spcAft>
+                        <a:buNone/>
+                      </a:pPr>
+                      <a:r>
+                        <a:rPr sz="1300" b="1">
+                          <a:solidFill>
+                            <a:srgbClr val="FFFFFF"/>
+                          </a:solidFill>
+                          <a:latin typeface="Arial"/>
+                        </a:rPr>
+                        <a:t>Names the file</a:t>
+                      </a:r>
+                    </a:p>
+                  </a:txBody>
+                  <a:tcPr>
+                    <a:solidFill>
+                      <a:srgbClr val="0A2540"/>
+                    </a:solidFill>
+                  </a:tcPr>
+                </a:tc>
+              </a:tr>
+              <a:tr h="457200">
+                <a:tc>
+                  <a:txBody>
+                    <a:bodyPr wrap="square"/>
+                    <a:lstStyle/>
+                    <a:p>
+                      <a:pPr algn="l">
+                        <a:spcAft>
+                          <a:spcPts val="0"/>
+                        </a:spcAft>
+                        <a:buNone/>
+                      </a:pPr>
+                      <a:r>
+                        <a:rPr sz="1250" b="0">
+                          <a:solidFill>
+                            <a:srgbClr val="202B38"/>
+                          </a:solidFill>
+                          <a:latin typeface="Arial"/>
+                        </a:rPr>
+                        <a:t>Bare prompt</a:t>
                       </a:r>
                     </a:p>
                   </a:txBody>
@@ -11345,7 +11004,175 @@
                           </a:solidFill>
                           <a:latin typeface="Arial"/>
                         </a:rPr>
-                        <a:t>Start the context with the task</a:t>
+                        <a:t>1</a:t>
+                      </a:r>
+                    </a:p>
+                  </a:txBody>
+                  <a:tcPr>
+                    <a:solidFill>
+                      <a:srgbClr val="FFFFFF"/>
+                    </a:solidFill>
+                  </a:tcPr>
+                </a:tc>
+                <a:tc>
+                  <a:txBody>
+                    <a:bodyPr wrap="square"/>
+                    <a:lstStyle/>
+                    <a:p>
+                      <a:pPr algn="l">
+                        <a:spcAft>
+                          <a:spcPts val="0"/>
+                        </a:spcAft>
+                        <a:buNone/>
+                      </a:pPr>
+                      <a:r>
+                        <a:rPr sz="1250" b="0">
+                          <a:solidFill>
+                            <a:srgbClr val="202B38"/>
+                          </a:solidFill>
+                          <a:latin typeface="Arial"/>
+                        </a:rPr>
+                        <a:t>0</a:t>
+                      </a:r>
+                    </a:p>
+                  </a:txBody>
+                  <a:tcPr>
+                    <a:solidFill>
+                      <a:srgbClr val="FFFFFF"/>
+                    </a:solidFill>
+                  </a:tcPr>
+                </a:tc>
+                <a:tc>
+                  <a:txBody>
+                    <a:bodyPr wrap="square"/>
+                    <a:lstStyle/>
+                    <a:p>
+                      <a:pPr algn="l">
+                        <a:spcAft>
+                          <a:spcPts val="0"/>
+                        </a:spcAft>
+                        <a:buNone/>
+                      </a:pPr>
+                      <a:r>
+                        <a:rPr sz="1250" b="0">
+                          <a:solidFill>
+                            <a:srgbClr val="202B38"/>
+                          </a:solidFill>
+                          <a:latin typeface="Arial"/>
+                        </a:rPr>
+                        <a:t>39</a:t>
+                      </a:r>
+                    </a:p>
+                  </a:txBody>
+                  <a:tcPr>
+                    <a:solidFill>
+                      <a:srgbClr val="FFFFFF"/>
+                    </a:solidFill>
+                  </a:tcPr>
+                </a:tc>
+                <a:tc>
+                  <a:txBody>
+                    <a:bodyPr wrap="square"/>
+                    <a:lstStyle/>
+                    <a:p>
+                      <a:pPr algn="l">
+                        <a:spcAft>
+                          <a:spcPts val="0"/>
+                        </a:spcAft>
+                        <a:buNone/>
+                      </a:pPr>
+                      <a:r>
+                        <a:rPr sz="1250" b="0">
+                          <a:solidFill>
+                            <a:srgbClr val="202B38"/>
+                          </a:solidFill>
+                          <a:latin typeface="Arial"/>
+                        </a:rPr>
+                        <a:t>549</a:t>
+                      </a:r>
+                    </a:p>
+                  </a:txBody>
+                  <a:tcPr>
+                    <a:solidFill>
+                      <a:srgbClr val="FFFFFF"/>
+                    </a:solidFill>
+                  </a:tcPr>
+                </a:tc>
+                <a:tc>
+                  <a:txBody>
+                    <a:bodyPr wrap="square"/>
+                    <a:lstStyle/>
+                    <a:p>
+                      <a:pPr algn="l">
+                        <a:spcAft>
+                          <a:spcPts val="0"/>
+                        </a:spcAft>
+                        <a:buNone/>
+                      </a:pPr>
+                      <a:r>
+                        <a:rPr sz="1250" b="0">
+                          <a:solidFill>
+                            <a:srgbClr val="202B38"/>
+                          </a:solidFill>
+                          <a:latin typeface="Arial"/>
+                        </a:rPr>
+                        <a:t>0.0139</a:t>
+                      </a:r>
+                    </a:p>
+                  </a:txBody>
+                  <a:tcPr>
+                    <a:solidFill>
+                      <a:srgbClr val="FFFFFF"/>
+                    </a:solidFill>
+                  </a:tcPr>
+                </a:tc>
+                <a:tc>
+                  <a:txBody>
+                    <a:bodyPr wrap="square"/>
+                    <a:lstStyle/>
+                    <a:p>
+                      <a:pPr algn="l">
+                        <a:spcAft>
+                          <a:spcPts val="0"/>
+                        </a:spcAft>
+                        <a:buNone/>
+                      </a:pPr>
+                      <a:r>
+                        <a:rPr sz="1250" b="0">
+                          <a:solidFill>
+                            <a:srgbClr val="202B38"/>
+                          </a:solidFill>
+                          <a:latin typeface="Arial"/>
+                        </a:rPr>
+                        <a:t>No</a:t>
+                      </a:r>
+                    </a:p>
+                  </a:txBody>
+                  <a:tcPr>
+                    <a:solidFill>
+                      <a:srgbClr val="FFFFFF"/>
+                    </a:solidFill>
+                  </a:tcPr>
+                </a:tc>
+                <a:tc>
+                  <a:txBody>
+                    <a:bodyPr wrap="square"/>
+                    <a:lstStyle/>
+                    <a:p>
+                      <a:pPr algn="l">
+                        <a:spcAft>
+                          <a:spcPts val="0"/>
+                        </a:spcAft>
+                        <a:buNone/>
+                      </a:pPr>
+                      <a:r>
+                        <a:rPr sz="1250" b="0">
+                          <a:solidFill>
+                            <a:srgbClr val="202B38"/>
+                          </a:solidFill>
+                          <a:latin typeface="Arial"/>
+                        </a:rPr>
+                        <a:t>Yes</a:t>
                       </a:r>
                     </a:p>
                   </a:txBody>
@@ -11369,13 +11196,13 @@
                         <a:buNone/>
                       </a:pPr>
                       <a:r>
-                        <a:rPr sz="1150" b="0">
+                        <a:rPr sz="1250" b="0">
                           <a:solidFill>
-                            <a:srgbClr val="0A2540"/>
+                            <a:srgbClr val="202B38"/>
                           </a:solidFill>
-                          <a:latin typeface="Courier New"/>
+                          <a:latin typeface="Arial"/>
                         </a:rPr>
-                        <a:t>for turn in range(max_turns):</a:t>
+                        <a:t>Careful prompt</a:t>
                       </a:r>
                     </a:p>
                   </a:txBody>
@@ -11403,7 +11230,175 @@
                           </a:solidFill>
                           <a:latin typeface="Arial"/>
                         </a:rPr>
-                        <a:t>Stop condition 1: never loop forever</a:t>
+                        <a:t>1</a:t>
+                      </a:r>
+                    </a:p>
+                  </a:txBody>
+                  <a:tcPr>
+                    <a:solidFill>
+                      <a:srgbClr val="EEF3FD"/>
+                    </a:solidFill>
+                  </a:tcPr>
+                </a:tc>
+                <a:tc>
+                  <a:txBody>
+                    <a:bodyPr wrap="square"/>
+                    <a:lstStyle/>
+                    <a:p>
+                      <a:pPr algn="l">
+                        <a:spcAft>
+                          <a:spcPts val="0"/>
+                        </a:spcAft>
+                        <a:buNone/>
+                      </a:pPr>
+                      <a:r>
+                        <a:rPr sz="1250" b="0">
+                          <a:solidFill>
+                            <a:srgbClr val="202B38"/>
+                          </a:solidFill>
+                          <a:latin typeface="Arial"/>
+                        </a:rPr>
+                        <a:t>0</a:t>
+                      </a:r>
+                    </a:p>
+                  </a:txBody>
+                  <a:tcPr>
+                    <a:solidFill>
+                      <a:srgbClr val="EEF3FD"/>
+                    </a:solidFill>
+                  </a:tcPr>
+                </a:tc>
+                <a:tc>
+                  <a:txBody>
+                    <a:bodyPr wrap="square"/>
+                    <a:lstStyle/>
+                    <a:p>
+                      <a:pPr algn="l">
+                        <a:spcAft>
+                          <a:spcPts val="0"/>
+                        </a:spcAft>
+                        <a:buNone/>
+                      </a:pPr>
+                      <a:r>
+                        <a:rPr sz="1250" b="0">
+                          <a:solidFill>
+                            <a:srgbClr val="202B38"/>
+                          </a:solidFill>
+                          <a:latin typeface="Arial"/>
+                        </a:rPr>
+                        <a:t>115</a:t>
+                      </a:r>
+                    </a:p>
+                  </a:txBody>
+                  <a:tcPr>
+                    <a:solidFill>
+                      <a:srgbClr val="EEF3FD"/>
+                    </a:solidFill>
+                  </a:tcPr>
+                </a:tc>
+                <a:tc>
+                  <a:txBody>
+                    <a:bodyPr wrap="square"/>
+                    <a:lstStyle/>
+                    <a:p>
+                      <a:pPr algn="l">
+                        <a:spcAft>
+                          <a:spcPts val="0"/>
+                        </a:spcAft>
+                        <a:buNone/>
+                      </a:pPr>
+                      <a:r>
+                        <a:rPr sz="1250" b="0">
+                          <a:solidFill>
+                            <a:srgbClr val="202B38"/>
+                          </a:solidFill>
+                          <a:latin typeface="Arial"/>
+                        </a:rPr>
+                        <a:t>481</a:t>
+                      </a:r>
+                    </a:p>
+                  </a:txBody>
+                  <a:tcPr>
+                    <a:solidFill>
+                      <a:srgbClr val="EEF3FD"/>
+                    </a:solidFill>
+                  </a:tcPr>
+                </a:tc>
+                <a:tc>
+                  <a:txBody>
+                    <a:bodyPr wrap="square"/>
+                    <a:lstStyle/>
+                    <a:p>
+                      <a:pPr algn="l">
+                        <a:spcAft>
+                          <a:spcPts val="0"/>
+                        </a:spcAft>
+                        <a:buNone/>
+                      </a:pPr>
+                      <a:r>
+                        <a:rPr sz="1250" b="0">
+                          <a:solidFill>
+                            <a:srgbClr val="202B38"/>
+                          </a:solidFill>
+                          <a:latin typeface="Arial"/>
+                        </a:rPr>
+                        <a:t>0.0126</a:t>
+                      </a:r>
+                    </a:p>
+                  </a:txBody>
+                  <a:tcPr>
+                    <a:solidFill>
+                      <a:srgbClr val="EEF3FD"/>
+                    </a:solidFill>
+                  </a:tcPr>
+                </a:tc>
+                <a:tc>
+                  <a:txBody>
+                    <a:bodyPr wrap="square"/>
+                    <a:lstStyle/>
+                    <a:p>
+                      <a:pPr algn="l">
+                        <a:spcAft>
+                          <a:spcPts val="0"/>
+                        </a:spcAft>
+                        <a:buNone/>
+                      </a:pPr>
+                      <a:r>
+                        <a:rPr sz="1250" b="0">
+                          <a:solidFill>
+                            <a:srgbClr val="202B38"/>
+                          </a:solidFill>
+                          <a:latin typeface="Arial"/>
+                        </a:rPr>
+                        <a:t>No</a:t>
+                      </a:r>
+                    </a:p>
+                  </a:txBody>
+                  <a:tcPr>
+                    <a:solidFill>
+                      <a:srgbClr val="EEF3FD"/>
+                    </a:solidFill>
+                  </a:tcPr>
+                </a:tc>
+                <a:tc>
+                  <a:txBody>
+                    <a:bodyPr wrap="square"/>
+                    <a:lstStyle/>
+                    <a:p>
+                      <a:pPr algn="l">
+                        <a:spcAft>
+                          <a:spcPts val="0"/>
+                        </a:spcAft>
+                        <a:buNone/>
+                      </a:pPr>
+                      <a:r>
+                        <a:rPr sz="1250" b="0">
+                          <a:solidFill>
+                            <a:srgbClr val="202B38"/>
+                          </a:solidFill>
+                          <a:latin typeface="Arial"/>
+                        </a:rPr>
+                        <a:t>Yes</a:t>
                       </a:r>
                     </a:p>
                   </a:txBody>
@@ -11427,13 +11422,13 @@
                         <a:buNone/>
                       </a:pPr>
                       <a:r>
-                        <a:rPr sz="1150" b="0">
+                        <a:rPr sz="1250" b="0">
                           <a:solidFill>
-                            <a:srgbClr val="0A2540"/>
+                            <a:srgbClr val="202B38"/>
                           </a:solidFill>
-                          <a:latin typeface="Courier New"/>
+                          <a:latin typeface="Arial"/>
                         </a:rPr>
-                        <a:t>    reply = model.complete(system, messages, tool_schemas)</a:t>
+                        <a:t>Harness: two tools, a loop</a:t>
                       </a:r>
                     </a:p>
                   </a:txBody>
@@ -11461,95 +11456,7 @@
                           </a:solidFill>
                           <a:latin typeface="Arial"/>
                         </a:rPr>
-                        <a:t>Context in, next message out - the whole model contract</a:t>
-                      </a:r>
-                    </a:p>
-                  </a:txBody>
-                  <a:tcPr>
-                    <a:solidFill>
-                      <a:srgbClr val="FFFFFF"/>
-                    </a:solidFill>
-                  </a:tcPr>
-                </a:tc>
-              </a:tr>
-              <a:tr h="457200">
-                <a:tc>
-                  <a:txBody>
-                    <a:bodyPr wrap="square"/>
-                    <a:lstStyle/>
-                    <a:p>
-                      <a:pPr algn="l">
-                        <a:spcAft>
-                          <a:spcPts val="0"/>
-                        </a:spcAft>
-                        <a:buNone/>
-                      </a:pPr>
-                      <a:r>
-                        <a:rPr sz="1150" b="0">
-                          <a:solidFill>
-                            <a:srgbClr val="0A2540"/>
-                          </a:solidFill>
-                          <a:latin typeface="Courier New"/>
-                        </a:rPr>
-                        <a:t>    if not reply.tool_calls: return reply.text</a:t>
-                      </a:r>
-                    </a:p>
-                  </a:txBody>
-                  <a:tcPr>
-                    <a:solidFill>
-                      <a:srgbClr val="EEF3FD"/>
-                    </a:solidFill>
-                  </a:tcPr>
-                </a:tc>
-                <a:tc>
-                  <a:txBody>
-                    <a:bodyPr wrap="square"/>
-                    <a:lstStyle/>
-                    <a:p>
-                      <a:pPr algn="l">
-                        <a:spcAft>
-                          <a:spcPts val="0"/>
-                        </a:spcAft>
-                        <a:buNone/>
-                      </a:pPr>
-                      <a:r>
-                        <a:rPr sz="1250" b="0">
-                          <a:solidFill>
-                            <a:srgbClr val="202B38"/>
-                          </a:solidFill>
-                          <a:latin typeface="Arial"/>
-                        </a:rPr>
-                        <a:t>Stop condition 2: no tool asked for means done</a:t>
-                      </a:r>
-                    </a:p>
-                  </a:txBody>
-                  <a:tcPr>
-                    <a:solidFill>
-                      <a:srgbClr val="EEF3FD"/>
-                    </a:solidFill>
-                  </a:tcPr>
-                </a:tc>
-              </a:tr>
-              <a:tr h="457200">
-                <a:tc>
-                  <a:txBody>
-                    <a:bodyPr wrap="square"/>
-                    <a:lstStyle/>
-                    <a:p>
-                      <a:pPr algn="l">
-                        <a:spcAft>
-                          <a:spcPts val="0"/>
-                        </a:spcAft>
-                        <a:buNone/>
-                      </a:pPr>
-                      <a:r>
-                        <a:rPr sz="1150" b="0">
-                          <a:solidFill>
-                            <a:srgbClr val="0A2540"/>
-                          </a:solidFill>
-                          <a:latin typeface="Courier New"/>
-                        </a:rPr>
-                        <a:t>    for call in reply.tool_calls:</a:t>
+                        <a:t>3</a:t>
                       </a:r>
                     </a:p>
                   </a:txBody>
@@ -11577,95 +11484,7 @@
                           </a:solidFill>
                           <a:latin typeface="Arial"/>
                         </a:rPr>
-                        <a:t>The model may ask for several tools in one turn</a:t>
-                      </a:r>
-                    </a:p>
-                  </a:txBody>
-                  <a:tcPr>
-                    <a:solidFill>
-                      <a:srgbClr val="FFFFFF"/>
-                    </a:solidFill>
-                  </a:tcPr>
-                </a:tc>
-              </a:tr>
-              <a:tr h="457200">
-                <a:tc>
-                  <a:txBody>
-                    <a:bodyPr wrap="square"/>
-                    <a:lstStyle/>
-                    <a:p>
-                      <a:pPr algn="l">
-                        <a:spcAft>
-                          <a:spcPts val="0"/>
-                        </a:spcAft>
-                        <a:buNone/>
-                      </a:pPr>
-                      <a:r>
-                        <a:rPr sz="1150" b="0">
-                          <a:solidFill>
-                            <a:srgbClr val="0A2540"/>
-                          </a:solidFill>
-                          <a:latin typeface="Courier New"/>
-                        </a:rPr>
-                        <a:t>        if not permitted(call): result = 'Denied: ...'</a:t>
-                      </a:r>
-                    </a:p>
-                  </a:txBody>
-                  <a:tcPr>
-                    <a:solidFill>
-                      <a:srgbClr val="EEF3FD"/>
-                    </a:solidFill>
-                  </a:tcPr>
-                </a:tc>
-                <a:tc>
-                  <a:txBody>
-                    <a:bodyPr wrap="square"/>
-                    <a:lstStyle/>
-                    <a:p>
-                      <a:pPr algn="l">
-                        <a:spcAft>
-                          <a:spcPts val="0"/>
-                        </a:spcAft>
-                        <a:buNone/>
-                      </a:pPr>
-                      <a:r>
-                        <a:rPr sz="1250" b="0">
-                          <a:solidFill>
-                            <a:srgbClr val="202B38"/>
-                          </a:solidFill>
-                          <a:latin typeface="Arial"/>
-                        </a:rPr>
-                        <a:t>A guardrail outside the model (Session 3)</a:t>
-                      </a:r>
-                    </a:p>
-                  </a:txBody>
-                  <a:tcPr>
-                    <a:solidFill>
-                      <a:srgbClr val="EEF3FD"/>
-                    </a:solidFill>
-                  </a:tcPr>
-                </a:tc>
-              </a:tr>
-              <a:tr h="457200">
-                <a:tc>
-                  <a:txBody>
-                    <a:bodyPr wrap="square"/>
-                    <a:lstStyle/>
-                    <a:p>
-                      <a:pPr algn="l">
-                        <a:spcAft>
-                          <a:spcPts val="0"/>
-                        </a:spcAft>
-                        <a:buNone/>
-                      </a:pPr>
-                      <a:r>
-                        <a:rPr sz="1150" b="0">
-                          <a:solidFill>
-                            <a:srgbClr val="0A2540"/>
-                          </a:solidFill>
-                          <a:latin typeface="Courier New"/>
-                        </a:rPr>
-                        <a:t>        else: result = tools.run(call.name, call.args)</a:t>
+                        <a:t>3</a:t>
                       </a:r>
                     </a:p>
                   </a:txBody>
@@ -11693,7 +11512,2325 @@
                           </a:solidFill>
                           <a:latin typeface="Arial"/>
                         </a:rPr>
-                        <a:t>The harness runs the function and keeps the text</a:t>
+                        <a:t>4,113</a:t>
+                      </a:r>
+                    </a:p>
+                  </a:txBody>
+                  <a:tcPr>
+                    <a:solidFill>
+                      <a:srgbClr val="FFFFFF"/>
+                    </a:solidFill>
+                  </a:tcPr>
+                </a:tc>
+                <a:tc>
+                  <a:txBody>
+                    <a:bodyPr wrap="square"/>
+                    <a:lstStyle/>
+                    <a:p>
+                      <a:pPr algn="l">
+                        <a:spcAft>
+                          <a:spcPts val="0"/>
+                        </a:spcAft>
+                        <a:buNone/>
+                      </a:pPr>
+                      <a:r>
+                        <a:rPr sz="1250" b="0">
+                          <a:solidFill>
+                            <a:srgbClr val="202B38"/>
+                          </a:solidFill>
+                          <a:latin typeface="Arial"/>
+                        </a:rPr>
+                        <a:t>350</a:t>
+                      </a:r>
+                    </a:p>
+                  </a:txBody>
+                  <a:tcPr>
+                    <a:solidFill>
+                      <a:srgbClr val="FFFFFF"/>
+                    </a:solidFill>
+                  </a:tcPr>
+                </a:tc>
+                <a:tc>
+                  <a:txBody>
+                    <a:bodyPr wrap="square"/>
+                    <a:lstStyle/>
+                    <a:p>
+                      <a:pPr algn="l">
+                        <a:spcAft>
+                          <a:spcPts val="0"/>
+                        </a:spcAft>
+                        <a:buNone/>
+                      </a:pPr>
+                      <a:r>
+                        <a:rPr sz="1250" b="0">
+                          <a:solidFill>
+                            <a:srgbClr val="202B38"/>
+                          </a:solidFill>
+                          <a:latin typeface="Arial"/>
+                        </a:rPr>
+                        <a:t>0.0293</a:t>
+                      </a:r>
+                    </a:p>
+                  </a:txBody>
+                  <a:tcPr>
+                    <a:solidFill>
+                      <a:srgbClr val="FFFFFF"/>
+                    </a:solidFill>
+                  </a:tcPr>
+                </a:tc>
+                <a:tc>
+                  <a:txBody>
+                    <a:bodyPr wrap="square"/>
+                    <a:lstStyle/>
+                    <a:p>
+                      <a:pPr algn="l">
+                        <a:spcAft>
+                          <a:spcPts val="0"/>
+                        </a:spcAft>
+                        <a:buNone/>
+                      </a:pPr>
+                      <a:r>
+                        <a:rPr sz="1250" b="0">
+                          <a:solidFill>
+                            <a:srgbClr val="202B38"/>
+                          </a:solidFill>
+                          <a:latin typeface="Arial"/>
+                        </a:rPr>
+                        <a:t>Yes</a:t>
+                      </a:r>
+                    </a:p>
+                  </a:txBody>
+                  <a:tcPr>
+                    <a:solidFill>
+                      <a:srgbClr val="FFFFFF"/>
+                    </a:solidFill>
+                  </a:tcPr>
+                </a:tc>
+                <a:tc>
+                  <a:txBody>
+                    <a:bodyPr wrap="square"/>
+                    <a:lstStyle/>
+                    <a:p>
+                      <a:pPr algn="l">
+                        <a:spcAft>
+                          <a:spcPts val="0"/>
+                        </a:spcAft>
+                        <a:buNone/>
+                      </a:pPr>
+                      <a:r>
+                        <a:rPr sz="1250" b="0">
+                          <a:solidFill>
+                            <a:srgbClr val="202B38"/>
+                          </a:solidFill>
+                          <a:latin typeface="Arial"/>
+                        </a:rPr>
+                        <a:t>Yes</a:t>
+                      </a:r>
+                    </a:p>
+                  </a:txBody>
+                  <a:tcPr>
+                    <a:solidFill>
+                      <a:srgbClr val="FFFFFF"/>
+                    </a:solidFill>
+                  </a:tcPr>
+                </a:tc>
+              </a:tr>
+            </a:tbl>
+          </a:graphicData>
+        </a:graphic>
+      </p:graphicFrame>
+      <p:sp>
+        <p:nvSpPr>
+          <p:cNvPr id="8" name="TextBox 7"/>
+          <p:cNvSpPr txBox="1"/>
+          <p:nvPr/>
+        </p:nvSpPr>
+        <p:spPr>
+          <a:xfrm>
+            <a:off x="548640" y="6053328"/>
+            <a:ext cx="11091672" cy="502920"/>
+          </a:xfrm>
+          <a:prstGeom prst="rect">
+            <a:avLst/>
+          </a:prstGeom>
+          <a:noFill/>
+        </p:spPr>
+        <p:txBody>
+          <a:bodyPr wrap="square">
+            <a:spAutoFit/>
+          </a:bodyPr>
+          <a:lstStyle/>
+          <a:p>
+            <a:pPr algn="l">
+              <a:spcAft>
+                <a:spcPts val="600"/>
+              </a:spcAft>
+              <a:buNone/>
+            </a:pPr>
+            <a:r>
+              <a:rPr sz="1200" b="0">
+                <a:solidFill>
+                  <a:srgbClr val="1E5EF3"/>
+                </a:solidFill>
+                <a:latin typeface="Arial"/>
+              </a:rPr>
+              <a:t>Recorded run on claude-opus-5, 30 Sep 2026; live runs vary. 'Gives the fact': the answer holds 3.12 and 9, parsed from the workflow file by the notebook. 'Names the file': it mentions notebooks.yml. All three name it; only the harness read it.</a:t>
+            </a:r>
+          </a:p>
+        </p:txBody>
+      </p:sp>
+      <p:sp>
+        <p:nvSpPr>
+          <p:cNvPr id="9" name="TextBox 8"/>
+          <p:cNvSpPr txBox="1"/>
+          <p:nvPr/>
+        </p:nvSpPr>
+        <p:spPr>
+          <a:xfrm>
+            <a:off x="548640" y="6473952"/>
+            <a:ext cx="7315200" cy="292608"/>
+          </a:xfrm>
+          <a:prstGeom prst="rect">
+            <a:avLst/>
+          </a:prstGeom>
+          <a:noFill/>
+        </p:spPr>
+        <p:txBody>
+          <a:bodyPr wrap="square">
+            <a:spAutoFit/>
+          </a:bodyPr>
+          <a:lstStyle/>
+          <a:p>
+            <a:pPr algn="l">
+              <a:spcAft>
+                <a:spcPts val="600"/>
+              </a:spcAft>
+              <a:buNone/>
+            </a:pPr>
+            <a:r>
+              <a:rPr sz="900" b="0">
+                <a:solidFill>
+                  <a:srgbClr val="5B6774"/>
+                </a:solidFill>
+                <a:latin typeface="Arial"/>
+              </a:rPr>
+              <a:t>M5 Session 1 - From Prompts to Harnesses</a:t>
+            </a:r>
+          </a:p>
+        </p:txBody>
+      </p:sp>
+      <p:sp>
+        <p:nvSpPr>
+          <p:cNvPr id="10" name="TextBox 9"/>
+          <p:cNvSpPr txBox="1"/>
+          <p:nvPr/>
+        </p:nvSpPr>
+        <p:spPr>
+          <a:xfrm>
+            <a:off x="11292840" y="6473952"/>
+            <a:ext cx="548640" cy="292608"/>
+          </a:xfrm>
+          <a:prstGeom prst="rect">
+            <a:avLst/>
+          </a:prstGeom>
+          <a:noFill/>
+        </p:spPr>
+        <p:txBody>
+          <a:bodyPr wrap="square">
+            <a:spAutoFit/>
+          </a:bodyPr>
+          <a:lstStyle/>
+          <a:p>
+            <a:pPr algn="r">
+              <a:spcAft>
+                <a:spcPts val="600"/>
+              </a:spcAft>
+              <a:buNone/>
+            </a:pPr>
+            <a:r>
+              <a:rPr sz="900" b="0">
+                <a:solidFill>
+                  <a:srgbClr val="5B6774"/>
+                </a:solidFill>
+                <a:latin typeface="Arial"/>
+              </a:rPr>
+              <a:t>17</a:t>
+            </a:r>
+          </a:p>
+        </p:txBody>
+      </p:sp>
+    </p:spTree>
+  </p:cSld>
+  <p:clrMapOvr>
+    <a:masterClrMapping/>
+  </p:clrMapOvr>
+</p:sld>
+</file>
+
+<file path=ppt/slides/slide18.xml><?xml version="1.0" encoding="utf-8"?>
+<p:sld xmlns:a="http://schemas.openxmlformats.org/drawingml/2006/main" xmlns:p="http://schemas.openxmlformats.org/presentationml/2006/main" xmlns:r="http://schemas.openxmlformats.org/officeDocument/2006/relationships">
+  <p:cSld>
+    <p:spTree>
+      <p:nvGrpSpPr>
+        <p:cNvPr id="1" name=""/>
+        <p:cNvGrpSpPr/>
+        <p:nvPr/>
+      </p:nvGrpSpPr>
+      <p:grpSpPr/>
+      <p:sp>
+        <p:nvSpPr>
+          <p:cNvPr id="2" name="Rectangle 1"/>
+          <p:cNvSpPr/>
+          <p:nvPr/>
+        </p:nvSpPr>
+        <p:spPr>
+          <a:xfrm>
+            <a:off x="0" y="0"/>
+            <a:ext cx="12191695" cy="6858000"/>
+          </a:xfrm>
+          <a:prstGeom prst="rect">
+            <a:avLst/>
+          </a:prstGeom>
+          <a:solidFill>
+            <a:srgbClr val="FFFFFF"/>
+          </a:solidFill>
+          <a:ln>
+            <a:noFill/>
+          </a:ln>
+          <a:effectLst/>
+        </p:spPr>
+        <p:style>
+          <a:lnRef idx="1">
+            <a:schemeClr val="accent1"/>
+          </a:lnRef>
+          <a:fillRef idx="3">
+            <a:schemeClr val="accent1"/>
+          </a:fillRef>
+          <a:effectRef idx="2">
+            <a:schemeClr val="accent1"/>
+          </a:effectRef>
+          <a:fontRef idx="minor">
+            <a:schemeClr val="lt1"/>
+          </a:fontRef>
+        </p:style>
+        <p:txBody>
+          <a:bodyPr rtlCol="0" anchor="ctr"/>
+          <a:lstStyle/>
+          <a:p>
+            <a:pPr algn="ctr"/>
+          </a:p>
+        </p:txBody>
+      </p:sp>
+      <p:sp>
+        <p:nvSpPr>
+          <p:cNvPr id="3" name="Rectangle 2"/>
+          <p:cNvSpPr/>
+          <p:nvPr/>
+        </p:nvSpPr>
+        <p:spPr>
+          <a:xfrm>
+            <a:off x="548640" y="475488"/>
+            <a:ext cx="457200" cy="54864"/>
+          </a:xfrm>
+          <a:prstGeom prst="rect">
+            <a:avLst/>
+          </a:prstGeom>
+          <a:solidFill>
+            <a:srgbClr val="1E5EF3"/>
+          </a:solidFill>
+          <a:ln>
+            <a:noFill/>
+          </a:ln>
+          <a:effectLst/>
+        </p:spPr>
+        <p:style>
+          <a:lnRef idx="1">
+            <a:schemeClr val="accent1"/>
+          </a:lnRef>
+          <a:fillRef idx="3">
+            <a:schemeClr val="accent1"/>
+          </a:fillRef>
+          <a:effectRef idx="2">
+            <a:schemeClr val="accent1"/>
+          </a:effectRef>
+          <a:fontRef idx="minor">
+            <a:schemeClr val="lt1"/>
+          </a:fontRef>
+        </p:style>
+        <p:txBody>
+          <a:bodyPr rtlCol="0" anchor="ctr"/>
+          <a:lstStyle/>
+          <a:p>
+            <a:pPr algn="ctr"/>
+          </a:p>
+        </p:txBody>
+      </p:sp>
+      <p:sp>
+        <p:nvSpPr>
+          <p:cNvPr id="4" name="TextBox 3"/>
+          <p:cNvSpPr txBox="1"/>
+          <p:nvPr/>
+        </p:nvSpPr>
+        <p:spPr>
+          <a:xfrm>
+            <a:off x="548640" y="603504"/>
+            <a:ext cx="11091672" cy="274320"/>
+          </a:xfrm>
+          <a:prstGeom prst="rect">
+            <a:avLst/>
+          </a:prstGeom>
+          <a:noFill/>
+        </p:spPr>
+        <p:txBody>
+          <a:bodyPr wrap="square">
+            <a:spAutoFit/>
+          </a:bodyPr>
+          <a:lstStyle/>
+          <a:p>
+            <a:pPr algn="l">
+              <a:spcAft>
+                <a:spcPts val="600"/>
+              </a:spcAft>
+              <a:buNone/>
+            </a:pPr>
+            <a:r>
+              <a:rPr sz="1100" b="1">
+                <a:solidFill>
+                  <a:srgbClr val="1E5EF3"/>
+                </a:solidFill>
+                <a:latin typeface="Arial"/>
+              </a:rPr>
+              <a:t>NOTEBOOK 01, SECTION 3.4</a:t>
+            </a:r>
+          </a:p>
+        </p:txBody>
+      </p:sp>
+      <p:sp>
+        <p:nvSpPr>
+          <p:cNvPr id="5" name="TextBox 4"/>
+          <p:cNvSpPr txBox="1"/>
+          <p:nvPr/>
+        </p:nvSpPr>
+        <p:spPr>
+          <a:xfrm>
+            <a:off x="548640" y="868680"/>
+            <a:ext cx="11091672" cy="777240"/>
+          </a:xfrm>
+          <a:prstGeom prst="rect">
+            <a:avLst/>
+          </a:prstGeom>
+          <a:noFill/>
+        </p:spPr>
+        <p:txBody>
+          <a:bodyPr wrap="square">
+            <a:spAutoFit/>
+          </a:bodyPr>
+          <a:lstStyle/>
+          <a:p>
+            <a:pPr algn="l">
+              <a:spcAft>
+                <a:spcPts val="0"/>
+              </a:spcAft>
+              <a:buNone/>
+            </a:pPr>
+            <a:r>
+              <a:rPr sz="2600" b="1">
+                <a:solidFill>
+                  <a:srgbClr val="0A2540"/>
+                </a:solidFill>
+                <a:latin typeface="Arial"/>
+              </a:rPr>
+              <a:t>The fact cost 4,113 input tokens; the two prompts cost 39 and 115 and gave none</a:t>
+            </a:r>
+          </a:p>
+        </p:txBody>
+      </p:sp>
+      <p:sp>
+        <p:nvSpPr>
+          <p:cNvPr id="6" name="Rectangle 5"/>
+          <p:cNvSpPr/>
+          <p:nvPr/>
+        </p:nvSpPr>
+        <p:spPr>
+          <a:xfrm>
+            <a:off x="548640" y="1664208"/>
+            <a:ext cx="11091672" cy="12801"/>
+          </a:xfrm>
+          <a:prstGeom prst="rect">
+            <a:avLst/>
+          </a:prstGeom>
+          <a:solidFill>
+            <a:srgbClr val="B9D0FA"/>
+          </a:solidFill>
+          <a:ln>
+            <a:noFill/>
+          </a:ln>
+          <a:effectLst/>
+        </p:spPr>
+        <p:style>
+          <a:lnRef idx="1">
+            <a:schemeClr val="accent1"/>
+          </a:lnRef>
+          <a:fillRef idx="3">
+            <a:schemeClr val="accent1"/>
+          </a:fillRef>
+          <a:effectRef idx="2">
+            <a:schemeClr val="accent1"/>
+          </a:effectRef>
+          <a:fontRef idx="minor">
+            <a:schemeClr val="lt1"/>
+          </a:fontRef>
+        </p:style>
+        <p:txBody>
+          <a:bodyPr rtlCol="0" anchor="ctr"/>
+          <a:lstStyle/>
+          <a:p>
+            <a:pPr algn="ctr"/>
+          </a:p>
+        </p:txBody>
+      </p:sp>
+      <p:sp>
+        <p:nvSpPr>
+          <p:cNvPr id="7" name="TextBox 6"/>
+          <p:cNvSpPr txBox="1"/>
+          <p:nvPr/>
+        </p:nvSpPr>
+        <p:spPr>
+          <a:xfrm>
+            <a:off x="548640" y="1874519"/>
+            <a:ext cx="4297680" cy="4206240"/>
+          </a:xfrm>
+          <a:prstGeom prst="rect">
+            <a:avLst/>
+          </a:prstGeom>
+          <a:noFill/>
+        </p:spPr>
+        <p:txBody>
+          <a:bodyPr wrap="square">
+            <a:spAutoFit/>
+          </a:bodyPr>
+          <a:lstStyle/>
+          <a:p>
+            <a:pPr algn="l" indent="-228600" marL="228600">
+              <a:spcAft>
+                <a:spcPts val="800"/>
+              </a:spcAft>
+              <a:buClr>
+                <a:srgbClr val="1E5EF3"/>
+              </a:buClr>
+              <a:buChar char="—"/>
+            </a:pPr>
+            <a:r>
+              <a:rPr sz="1450" b="0">
+                <a:solidFill>
+                  <a:srgbClr val="202B38"/>
+                </a:solidFill>
+                <a:latin typeface="Arial"/>
+              </a:rPr>
+              <a:t>How to read it: bar length = input tokens one approach sent, all its calls added up</a:t>
+            </a:r>
+          </a:p>
+          <a:p>
+            <a:pPr algn="l" indent="-228600" marL="228600">
+              <a:spcAft>
+                <a:spcPts val="800"/>
+              </a:spcAft>
+              <a:buClr>
+                <a:srgbClr val="1E5EF3"/>
+              </a:buClr>
+              <a:buChar char="—"/>
+            </a:pPr>
+            <a:r>
+              <a:rPr sz="1450" b="0">
+                <a:solidFill>
+                  <a:srgbClr val="202B38"/>
+                </a:solidFill>
+                <a:latin typeface="Arial"/>
+              </a:rPr>
+              <a:t>Bare prompt 39, careful prompt 115: one call each, almost no context, no checkable fact</a:t>
+            </a:r>
+          </a:p>
+          <a:p>
+            <a:pPr algn="l" indent="-228600" marL="228600">
+              <a:spcAft>
+                <a:spcPts val="800"/>
+              </a:spcAft>
+              <a:buClr>
+                <a:srgbClr val="1E5EF3"/>
+              </a:buClr>
+              <a:buChar char="—"/>
+            </a:pPr>
+            <a:r>
+              <a:rPr sz="1450" b="0">
+                <a:solidFill>
+                  <a:srgbClr val="202B38"/>
+                </a:solidFill>
+                <a:latin typeface="Arial"/>
+              </a:rPr>
+              <a:t>Harness 4,113 over 3 calls: tool descriptions plus every tool result so far, on every call</a:t>
+            </a:r>
+          </a:p>
+          <a:p>
+            <a:pPr algn="l" indent="-228600" marL="228600">
+              <a:spcAft>
+                <a:spcPts val="800"/>
+              </a:spcAft>
+              <a:buClr>
+                <a:srgbClr val="1E5EF3"/>
+              </a:buClr>
+              <a:buChar char="—"/>
+            </a:pPr>
+            <a:r>
+              <a:rPr sz="1450" b="0">
+                <a:solidFill>
+                  <a:srgbClr val="202B38"/>
+                </a:solidFill>
+                <a:latin typeface="Arial"/>
+              </a:rPr>
+              <a:t>Output went the other way: 549 and 481 tokens of hedging against 350 tokens of answer</a:t>
+            </a:r>
+          </a:p>
+          <a:p>
+            <a:pPr algn="l" indent="-228600" marL="228600">
+              <a:spcAft>
+                <a:spcPts val="800"/>
+              </a:spcAft>
+              <a:buClr>
+                <a:srgbClr val="1E5EF3"/>
+              </a:buClr>
+              <a:buChar char="—"/>
+            </a:pPr>
+            <a:r>
+              <a:rPr sz="1450" b="0">
+                <a:solidFill>
+                  <a:srgbClr val="202B38"/>
+                </a:solidFill>
+                <a:latin typeface="Arial"/>
+              </a:rPr>
+              <a:t>Cost: 0.0139 and 0.0126 USD without the fact, 0.0293 USD with the fact and the file</a:t>
+            </a:r>
+          </a:p>
+          <a:p>
+            <a:pPr algn="l" indent="-228600" marL="228600">
+              <a:spcAft>
+                <a:spcPts val="800"/>
+              </a:spcAft>
+              <a:buClr>
+                <a:srgbClr val="1E5EF3"/>
+              </a:buClr>
+              <a:buChar char="—"/>
+            </a:pPr>
+            <a:r>
+              <a:rPr sz="1450" b="0">
+                <a:solidFill>
+                  <a:srgbClr val="202B38"/>
+                </a:solidFill>
+                <a:latin typeface="Arial"/>
+              </a:rPr>
+              <a:t>In plain words: tokens are the currency of harness engineering; spend them where they buy facts</a:t>
+            </a:r>
+          </a:p>
+        </p:txBody>
+      </p:sp>
+      <p:pic>
+        <p:nvPicPr>
+          <p:cNvPr id="8" name="Picture 7" descr="s1_tokens.png"/>
+          <p:cNvPicPr>
+            <a:picLocks noChangeAspect="1"/>
+          </p:cNvPicPr>
+          <p:nvPr/>
+        </p:nvPicPr>
+        <p:blipFill>
+          <a:blip r:embed="rId2"/>
+          <a:stretch>
+            <a:fillRect/>
+          </a:stretch>
+        </p:blipFill>
+        <p:spPr>
+          <a:xfrm>
+            <a:off x="5120640" y="1874519"/>
+            <a:ext cx="6492240" cy="3641506"/>
+          </a:xfrm>
+          <a:prstGeom prst="rect">
+            <a:avLst/>
+          </a:prstGeom>
+        </p:spPr>
+      </p:pic>
+      <p:sp>
+        <p:nvSpPr>
+          <p:cNvPr id="9" name="TextBox 8"/>
+          <p:cNvSpPr txBox="1"/>
+          <p:nvPr/>
+        </p:nvSpPr>
+        <p:spPr>
+          <a:xfrm>
+            <a:off x="5120640" y="6062471"/>
+            <a:ext cx="6492240" cy="365760"/>
+          </a:xfrm>
+          <a:prstGeom prst="rect">
+            <a:avLst/>
+          </a:prstGeom>
+          <a:noFill/>
+        </p:spPr>
+        <p:txBody>
+          <a:bodyPr wrap="square">
+            <a:spAutoFit/>
+          </a:bodyPr>
+          <a:lstStyle/>
+          <a:p>
+            <a:pPr algn="ctr">
+              <a:spcAft>
+                <a:spcPts val="600"/>
+              </a:spcAft>
+              <a:buNone/>
+            </a:pPr>
+            <a:r>
+              <a:rPr sz="1100" b="0">
+                <a:solidFill>
+                  <a:srgbClr val="5B6774"/>
+                </a:solidFill>
+                <a:latin typeface="Arial"/>
+              </a:rPr>
+              <a:t>Recorded run on claude-opus-5, 30 Sep 2026; live runs vary. Prices from the Claude API reference: 5.00 USD per million input tokens, 25.00 per million output tokens.</a:t>
+            </a:r>
+          </a:p>
+        </p:txBody>
+      </p:sp>
+      <p:sp>
+        <p:nvSpPr>
+          <p:cNvPr id="10" name="TextBox 9"/>
+          <p:cNvSpPr txBox="1"/>
+          <p:nvPr/>
+        </p:nvSpPr>
+        <p:spPr>
+          <a:xfrm>
+            <a:off x="548640" y="6473952"/>
+            <a:ext cx="7315200" cy="292608"/>
+          </a:xfrm>
+          <a:prstGeom prst="rect">
+            <a:avLst/>
+          </a:prstGeom>
+          <a:noFill/>
+        </p:spPr>
+        <p:txBody>
+          <a:bodyPr wrap="square">
+            <a:spAutoFit/>
+          </a:bodyPr>
+          <a:lstStyle/>
+          <a:p>
+            <a:pPr algn="l">
+              <a:spcAft>
+                <a:spcPts val="600"/>
+              </a:spcAft>
+              <a:buNone/>
+            </a:pPr>
+            <a:r>
+              <a:rPr sz="900" b="0">
+                <a:solidFill>
+                  <a:srgbClr val="5B6774"/>
+                </a:solidFill>
+                <a:latin typeface="Arial"/>
+              </a:rPr>
+              <a:t>M5 Session 1 - From Prompts to Harnesses</a:t>
+            </a:r>
+          </a:p>
+        </p:txBody>
+      </p:sp>
+      <p:sp>
+        <p:nvSpPr>
+          <p:cNvPr id="11" name="TextBox 10"/>
+          <p:cNvSpPr txBox="1"/>
+          <p:nvPr/>
+        </p:nvSpPr>
+        <p:spPr>
+          <a:xfrm>
+            <a:off x="11292840" y="6473952"/>
+            <a:ext cx="548640" cy="292608"/>
+          </a:xfrm>
+          <a:prstGeom prst="rect">
+            <a:avLst/>
+          </a:prstGeom>
+          <a:noFill/>
+        </p:spPr>
+        <p:txBody>
+          <a:bodyPr wrap="square">
+            <a:spAutoFit/>
+          </a:bodyPr>
+          <a:lstStyle/>
+          <a:p>
+            <a:pPr algn="r">
+              <a:spcAft>
+                <a:spcPts val="600"/>
+              </a:spcAft>
+              <a:buNone/>
+            </a:pPr>
+            <a:r>
+              <a:rPr sz="900" b="0">
+                <a:solidFill>
+                  <a:srgbClr val="5B6774"/>
+                </a:solidFill>
+                <a:latin typeface="Arial"/>
+              </a:rPr>
+              <a:t>18</a:t>
+            </a:r>
+          </a:p>
+        </p:txBody>
+      </p:sp>
+    </p:spTree>
+  </p:cSld>
+  <p:clrMapOvr>
+    <a:masterClrMapping/>
+  </p:clrMapOvr>
+</p:sld>
+</file>
+
+<file path=ppt/slides/slide19.xml><?xml version="1.0" encoding="utf-8"?>
+<p:sld xmlns:a="http://schemas.openxmlformats.org/drawingml/2006/main" xmlns:p="http://schemas.openxmlformats.org/presentationml/2006/main" xmlns:r="http://schemas.openxmlformats.org/officeDocument/2006/relationships">
+  <p:cSld>
+    <p:spTree>
+      <p:nvGrpSpPr>
+        <p:cNvPr id="1" name=""/>
+        <p:cNvGrpSpPr/>
+        <p:nvPr/>
+      </p:nvGrpSpPr>
+      <p:grpSpPr/>
+      <p:sp>
+        <p:nvSpPr>
+          <p:cNvPr id="2" name="Rectangle 1"/>
+          <p:cNvSpPr/>
+          <p:nvPr/>
+        </p:nvSpPr>
+        <p:spPr>
+          <a:xfrm>
+            <a:off x="0" y="0"/>
+            <a:ext cx="12191695" cy="6858000"/>
+          </a:xfrm>
+          <a:prstGeom prst="rect">
+            <a:avLst/>
+          </a:prstGeom>
+          <a:solidFill>
+            <a:srgbClr val="FFFFFF"/>
+          </a:solidFill>
+          <a:ln>
+            <a:noFill/>
+          </a:ln>
+          <a:effectLst/>
+        </p:spPr>
+        <p:style>
+          <a:lnRef idx="1">
+            <a:schemeClr val="accent1"/>
+          </a:lnRef>
+          <a:fillRef idx="3">
+            <a:schemeClr val="accent1"/>
+          </a:fillRef>
+          <a:effectRef idx="2">
+            <a:schemeClr val="accent1"/>
+          </a:effectRef>
+          <a:fontRef idx="minor">
+            <a:schemeClr val="lt1"/>
+          </a:fontRef>
+        </p:style>
+        <p:txBody>
+          <a:bodyPr rtlCol="0" anchor="ctr"/>
+          <a:lstStyle/>
+          <a:p>
+            <a:pPr algn="ctr"/>
+          </a:p>
+        </p:txBody>
+      </p:sp>
+      <p:sp>
+        <p:nvSpPr>
+          <p:cNvPr id="3" name="Rectangle 2"/>
+          <p:cNvSpPr/>
+          <p:nvPr/>
+        </p:nvSpPr>
+        <p:spPr>
+          <a:xfrm>
+            <a:off x="548640" y="475488"/>
+            <a:ext cx="457200" cy="54864"/>
+          </a:xfrm>
+          <a:prstGeom prst="rect">
+            <a:avLst/>
+          </a:prstGeom>
+          <a:solidFill>
+            <a:srgbClr val="1E5EF3"/>
+          </a:solidFill>
+          <a:ln>
+            <a:noFill/>
+          </a:ln>
+          <a:effectLst/>
+        </p:spPr>
+        <p:style>
+          <a:lnRef idx="1">
+            <a:schemeClr val="accent1"/>
+          </a:lnRef>
+          <a:fillRef idx="3">
+            <a:schemeClr val="accent1"/>
+          </a:fillRef>
+          <a:effectRef idx="2">
+            <a:schemeClr val="accent1"/>
+          </a:effectRef>
+          <a:fontRef idx="minor">
+            <a:schemeClr val="lt1"/>
+          </a:fontRef>
+        </p:style>
+        <p:txBody>
+          <a:bodyPr rtlCol="0" anchor="ctr"/>
+          <a:lstStyle/>
+          <a:p>
+            <a:pPr algn="ctr"/>
+          </a:p>
+        </p:txBody>
+      </p:sp>
+      <p:sp>
+        <p:nvSpPr>
+          <p:cNvPr id="4" name="TextBox 3"/>
+          <p:cNvSpPr txBox="1"/>
+          <p:nvPr/>
+        </p:nvSpPr>
+        <p:spPr>
+          <a:xfrm>
+            <a:off x="548640" y="603504"/>
+            <a:ext cx="11091672" cy="274320"/>
+          </a:xfrm>
+          <a:prstGeom prst="rect">
+            <a:avLst/>
+          </a:prstGeom>
+          <a:noFill/>
+        </p:spPr>
+        <p:txBody>
+          <a:bodyPr wrap="square">
+            <a:spAutoFit/>
+          </a:bodyPr>
+          <a:lstStyle/>
+          <a:p>
+            <a:pPr algn="l">
+              <a:spcAft>
+                <a:spcPts val="600"/>
+              </a:spcAft>
+              <a:buNone/>
+            </a:pPr>
+            <a:r>
+              <a:rPr sz="1100" b="1">
+                <a:solidFill>
+                  <a:srgbClr val="1E5EF3"/>
+                </a:solidFill>
+                <a:latin typeface="Arial"/>
+              </a:rPr>
+              <a:t>NOTEBOOK 01, SECTION 4</a:t>
+            </a:r>
+          </a:p>
+        </p:txBody>
+      </p:sp>
+      <p:sp>
+        <p:nvSpPr>
+          <p:cNvPr id="5" name="TextBox 4"/>
+          <p:cNvSpPr txBox="1"/>
+          <p:nvPr/>
+        </p:nvSpPr>
+        <p:spPr>
+          <a:xfrm>
+            <a:off x="548640" y="868680"/>
+            <a:ext cx="11091672" cy="777240"/>
+          </a:xfrm>
+          <a:prstGeom prst="rect">
+            <a:avLst/>
+          </a:prstGeom>
+          <a:noFill/>
+        </p:spPr>
+        <p:txBody>
+          <a:bodyPr wrap="square">
+            <a:spAutoFit/>
+          </a:bodyPr>
+          <a:lstStyle/>
+          <a:p>
+            <a:pPr algn="l">
+              <a:spcAft>
+                <a:spcPts val="0"/>
+              </a:spcAft>
+              <a:buNone/>
+            </a:pPr>
+            <a:r>
+              <a:rPr sz="2600" b="1">
+                <a:solidFill>
+                  <a:srgbClr val="0A2540"/>
+                </a:solidFill>
+                <a:latin typeface="Arial"/>
+              </a:rPr>
+              <a:t>The SDK ships the loop: beta_tool and tool_runner do in ten lines what you wrote in forty</a:t>
+            </a:r>
+          </a:p>
+        </p:txBody>
+      </p:sp>
+      <p:sp>
+        <p:nvSpPr>
+          <p:cNvPr id="6" name="Rectangle 5"/>
+          <p:cNvSpPr/>
+          <p:nvPr/>
+        </p:nvSpPr>
+        <p:spPr>
+          <a:xfrm>
+            <a:off x="548640" y="1664208"/>
+            <a:ext cx="11091672" cy="12801"/>
+          </a:xfrm>
+          <a:prstGeom prst="rect">
+            <a:avLst/>
+          </a:prstGeom>
+          <a:solidFill>
+            <a:srgbClr val="B9D0FA"/>
+          </a:solidFill>
+          <a:ln>
+            <a:noFill/>
+          </a:ln>
+          <a:effectLst/>
+        </p:spPr>
+        <p:style>
+          <a:lnRef idx="1">
+            <a:schemeClr val="accent1"/>
+          </a:lnRef>
+          <a:fillRef idx="3">
+            <a:schemeClr val="accent1"/>
+          </a:fillRef>
+          <a:effectRef idx="2">
+            <a:schemeClr val="accent1"/>
+          </a:effectRef>
+          <a:fontRef idx="minor">
+            <a:schemeClr val="lt1"/>
+          </a:fontRef>
+        </p:style>
+        <p:txBody>
+          <a:bodyPr rtlCol="0" anchor="ctr"/>
+          <a:lstStyle/>
+          <a:p>
+            <a:pPr algn="ctr"/>
+          </a:p>
+        </p:txBody>
+      </p:sp>
+      <p:sp>
+        <p:nvSpPr>
+          <p:cNvPr id="7" name="Rectangle 6"/>
+          <p:cNvSpPr/>
+          <p:nvPr/>
+        </p:nvSpPr>
+        <p:spPr>
+          <a:xfrm>
+            <a:off x="548640" y="1874519"/>
+            <a:ext cx="5394960" cy="3977639"/>
+          </a:xfrm>
+          <a:prstGeom prst="rect">
+            <a:avLst/>
+          </a:prstGeom>
+          <a:solidFill>
+            <a:srgbClr val="EEF3FD"/>
+          </a:solidFill>
+          <a:ln>
+            <a:noFill/>
+          </a:ln>
+          <a:effectLst/>
+        </p:spPr>
+        <p:style>
+          <a:lnRef idx="1">
+            <a:schemeClr val="accent1"/>
+          </a:lnRef>
+          <a:fillRef idx="3">
+            <a:schemeClr val="accent1"/>
+          </a:fillRef>
+          <a:effectRef idx="2">
+            <a:schemeClr val="accent1"/>
+          </a:effectRef>
+          <a:fontRef idx="minor">
+            <a:schemeClr val="lt1"/>
+          </a:fontRef>
+        </p:style>
+        <p:txBody>
+          <a:bodyPr rtlCol="0" anchor="ctr"/>
+          <a:lstStyle/>
+          <a:p>
+            <a:pPr algn="ctr"/>
+          </a:p>
+        </p:txBody>
+      </p:sp>
+      <p:sp>
+        <p:nvSpPr>
+          <p:cNvPr id="8" name="TextBox 7"/>
+          <p:cNvSpPr txBox="1"/>
+          <p:nvPr/>
+        </p:nvSpPr>
+        <p:spPr>
+          <a:xfrm>
+            <a:off x="777240" y="2039111"/>
+            <a:ext cx="4937760" cy="365760"/>
+          </a:xfrm>
+          <a:prstGeom prst="rect">
+            <a:avLst/>
+          </a:prstGeom>
+          <a:noFill/>
+        </p:spPr>
+        <p:txBody>
+          <a:bodyPr wrap="square">
+            <a:spAutoFit/>
+          </a:bodyPr>
+          <a:lstStyle/>
+          <a:p>
+            <a:pPr algn="l">
+              <a:spcAft>
+                <a:spcPts val="600"/>
+              </a:spcAft>
+              <a:buNone/>
+            </a:pPr>
+            <a:r>
+              <a:rPr sz="1500" b="1">
+                <a:solidFill>
+                  <a:srgbClr val="0A2540"/>
+                </a:solidFill>
+                <a:latin typeface="Arial"/>
+              </a:rPr>
+              <a:t>Ten lines on the SDK</a:t>
+            </a:r>
+          </a:p>
+        </p:txBody>
+      </p:sp>
+      <p:sp>
+        <p:nvSpPr>
+          <p:cNvPr id="9" name="TextBox 8"/>
+          <p:cNvSpPr txBox="1"/>
+          <p:nvPr/>
+        </p:nvSpPr>
+        <p:spPr>
+          <a:xfrm>
+            <a:off x="777240" y="2441447"/>
+            <a:ext cx="4937760" cy="3246119"/>
+          </a:xfrm>
+          <a:prstGeom prst="rect">
+            <a:avLst/>
+          </a:prstGeom>
+          <a:noFill/>
+        </p:spPr>
+        <p:txBody>
+          <a:bodyPr wrap="square">
+            <a:spAutoFit/>
+          </a:bodyPr>
+          <a:lstStyle/>
+          <a:p>
+            <a:pPr algn="l" indent="-228600" marL="228600">
+              <a:spcAft>
+                <a:spcPts val="600"/>
+              </a:spcAft>
+              <a:buClr>
+                <a:srgbClr val="1E5EF3"/>
+              </a:buClr>
+              <a:buChar char="—"/>
+            </a:pPr>
+            <a:r>
+              <a:rPr sz="1200" b="0">
+                <a:solidFill>
+                  <a:srgbClr val="202B38"/>
+                </a:solidFill>
+                <a:latin typeface="Arial"/>
+              </a:rPr>
+              <a:t>beta_tool(list_files), beta_tool(read_file): the JSON description is generated from the signature and the docstring</a:t>
+            </a:r>
+          </a:p>
+          <a:p>
+            <a:pPr algn="l" indent="-228600" marL="228600">
+              <a:spcAft>
+                <a:spcPts val="600"/>
+              </a:spcAft>
+              <a:buClr>
+                <a:srgbClr val="1E5EF3"/>
+              </a:buClr>
+              <a:buChar char="—"/>
+            </a:pPr>
+            <a:r>
+              <a:rPr sz="1200" b="0">
+                <a:solidFill>
+                  <a:srgbClr val="202B38"/>
+                </a:solidFill>
+                <a:latin typeface="Arial"/>
+              </a:rPr>
+              <a:t>Same name, description and schema as the hand-written dicts, plus a title per argument and additionalProperties: false</a:t>
+            </a:r>
+          </a:p>
+          <a:p>
+            <a:pPr algn="l" indent="-228600" marL="228600">
+              <a:spcAft>
+                <a:spcPts val="600"/>
+              </a:spcAft>
+              <a:buClr>
+                <a:srgbClr val="1E5EF3"/>
+              </a:buClr>
+              <a:buChar char="—"/>
+            </a:pPr>
+            <a:r>
+              <a:rPr sz="1200" b="0">
+                <a:solidFill>
+                  <a:srgbClr val="202B38"/>
+                </a:solidFill>
+                <a:latin typeface="Arial"/>
+              </a:rPr>
+              <a:t>client.beta.messages.tool_runner(model, max_tokens, system, tools, messages, max_iterations=8)</a:t>
+            </a:r>
+          </a:p>
+          <a:p>
+            <a:pPr algn="l" indent="-228600" marL="228600">
+              <a:spcAft>
+                <a:spcPts val="600"/>
+              </a:spcAft>
+              <a:buClr>
+                <a:srgbClr val="1E5EF3"/>
+              </a:buClr>
+              <a:buChar char="—"/>
+            </a:pPr>
+            <a:r>
+              <a:rPr sz="1200" b="0">
+                <a:solidFill>
+                  <a:srgbClr val="202B38"/>
+                </a:solidFill>
+                <a:latin typeface="Arial"/>
+              </a:rPr>
+              <a:t>One iteration per model call; generate_tool_call_response() runs the requested tools and returns the tool_result message</a:t>
+            </a:r>
+          </a:p>
+          <a:p>
+            <a:pPr algn="l" indent="-228600" marL="228600">
+              <a:spcAft>
+                <a:spcPts val="600"/>
+              </a:spcAft>
+              <a:buClr>
+                <a:srgbClr val="1E5EF3"/>
+              </a:buClr>
+              <a:buChar char="—"/>
+            </a:pPr>
+            <a:r>
+              <a:rPr sz="1200" b="0">
+                <a:solidFill>
+                  <a:srgbClr val="202B38"/>
+                </a:solidFill>
+                <a:latin typeface="Arial"/>
+              </a:rPr>
+              <a:t>Beta in the Python SDK, hence client.beta; the right default for a small agent</a:t>
+            </a:r>
+          </a:p>
+        </p:txBody>
+      </p:sp>
+      <p:sp>
+        <p:nvSpPr>
+          <p:cNvPr id="10" name="Rectangle 9"/>
+          <p:cNvSpPr/>
+          <p:nvPr/>
+        </p:nvSpPr>
+        <p:spPr>
+          <a:xfrm>
+            <a:off x="6245352" y="1874519"/>
+            <a:ext cx="5394960" cy="3977639"/>
+          </a:xfrm>
+          <a:prstGeom prst="rect">
+            <a:avLst/>
+          </a:prstGeom>
+          <a:solidFill>
+            <a:srgbClr val="EEF3FD"/>
+          </a:solidFill>
+          <a:ln>
+            <a:noFill/>
+          </a:ln>
+          <a:effectLst/>
+        </p:spPr>
+        <p:style>
+          <a:lnRef idx="1">
+            <a:schemeClr val="accent1"/>
+          </a:lnRef>
+          <a:fillRef idx="3">
+            <a:schemeClr val="accent1"/>
+          </a:fillRef>
+          <a:effectRef idx="2">
+            <a:schemeClr val="accent1"/>
+          </a:effectRef>
+          <a:fontRef idx="minor">
+            <a:schemeClr val="lt1"/>
+          </a:fontRef>
+        </p:style>
+        <p:txBody>
+          <a:bodyPr rtlCol="0" anchor="ctr"/>
+          <a:lstStyle/>
+          <a:p>
+            <a:pPr algn="ctr"/>
+          </a:p>
+        </p:txBody>
+      </p:sp>
+      <p:sp>
+        <p:nvSpPr>
+          <p:cNvPr id="11" name="TextBox 10"/>
+          <p:cNvSpPr txBox="1"/>
+          <p:nvPr/>
+        </p:nvSpPr>
+        <p:spPr>
+          <a:xfrm>
+            <a:off x="6473952" y="2039111"/>
+            <a:ext cx="4937760" cy="365760"/>
+          </a:xfrm>
+          <a:prstGeom prst="rect">
+            <a:avLst/>
+          </a:prstGeom>
+          <a:noFill/>
+        </p:spPr>
+        <p:txBody>
+          <a:bodyPr wrap="square">
+            <a:spAutoFit/>
+          </a:bodyPr>
+          <a:lstStyle/>
+          <a:p>
+            <a:pPr algn="l">
+              <a:spcAft>
+                <a:spcPts val="600"/>
+              </a:spcAft>
+              <a:buNone/>
+            </a:pPr>
+            <a:r>
+              <a:rPr sz="1500" b="1">
+                <a:solidFill>
+                  <a:srgbClr val="0A2540"/>
+                </a:solidFill>
+                <a:latin typeface="Arial"/>
+              </a:rPr>
+              <a:t>What it produced in the recorded run</a:t>
+            </a:r>
+          </a:p>
+        </p:txBody>
+      </p:sp>
+      <p:sp>
+        <p:nvSpPr>
+          <p:cNvPr id="12" name="TextBox 11"/>
+          <p:cNvSpPr txBox="1"/>
+          <p:nvPr/>
+        </p:nvSpPr>
+        <p:spPr>
+          <a:xfrm>
+            <a:off x="6473952" y="2441447"/>
+            <a:ext cx="4937760" cy="3246119"/>
+          </a:xfrm>
+          <a:prstGeom prst="rect">
+            <a:avLst/>
+          </a:prstGeom>
+          <a:noFill/>
+        </p:spPr>
+        <p:txBody>
+          <a:bodyPr wrap="square">
+            <a:spAutoFit/>
+          </a:bodyPr>
+          <a:lstStyle/>
+          <a:p>
+            <a:pPr algn="l" indent="-228600" marL="228600">
+              <a:spcAft>
+                <a:spcPts val="600"/>
+              </a:spcAft>
+              <a:buClr>
+                <a:srgbClr val="1E5EF3"/>
+              </a:buClr>
+              <a:buChar char="—"/>
+            </a:pPr>
+            <a:r>
+              <a:rPr sz="1200" b="0">
+                <a:solidFill>
+                  <a:srgbClr val="202B38"/>
+                </a:solidFill>
+                <a:latin typeface="Arial"/>
+              </a:rPr>
+              <a:t>The same route as your loop: list the root and .github/workflows, read notebooks.yml, answer</a:t>
+            </a:r>
+          </a:p>
+          <a:p>
+            <a:pPr algn="l" indent="-228600" marL="228600">
+              <a:spcAft>
+                <a:spcPts val="600"/>
+              </a:spcAft>
+              <a:buClr>
+                <a:srgbClr val="1E5EF3"/>
+              </a:buClr>
+              <a:buChar char="—"/>
+            </a:pPr>
+            <a:r>
+              <a:rPr sz="1200" b="0">
+                <a:solidFill>
+                  <a:srgbClr val="202B38"/>
+                </a:solidFill>
+                <a:latin typeface="Arial"/>
+              </a:rPr>
+              <a:t>3 model calls, 4,251 input tokens, 358 output tokens, 0.0302 USD (your loop: 4,113 and 350, 0.0293 USD)</a:t>
+            </a:r>
+          </a:p>
+          <a:p>
+            <a:pPr algn="l" indent="-228600" marL="228600">
+              <a:spcAft>
+                <a:spcPts val="600"/>
+              </a:spcAft>
+              <a:buClr>
+                <a:srgbClr val="1E5EF3"/>
+              </a:buClr>
+              <a:buChar char="—"/>
+            </a:pPr>
+            <a:r>
+              <a:rPr sz="1200" b="0">
+                <a:solidFill>
+                  <a:srgbClr val="202B38"/>
+                </a:solidFill>
+                <a:latin typeface="Arial"/>
+              </a:rPr>
+              <a:t>The same answer: Python 3.12, 9 notebooks, source notebooks.yml; gives the fact = True for both loops</a:t>
+            </a:r>
+          </a:p>
+          <a:p>
+            <a:pPr algn="l" indent="-228600" marL="228600">
+              <a:spcAft>
+                <a:spcPts val="600"/>
+              </a:spcAft>
+              <a:buClr>
+                <a:srgbClr val="1E5EF3"/>
+              </a:buClr>
+              <a:buChar char="—"/>
+            </a:pPr>
+            <a:r>
+              <a:rPr sz="1200" b="0">
+                <a:solidFill>
+                  <a:srgbClr val="202B38"/>
+                </a:solidFill>
+                <a:latin typeface="Arial"/>
+              </a:rPr>
+              <a:t>The same message shape: a user question, then assistant turns with tool_use blocks and user turns of tool_result blocks</a:t>
+            </a:r>
+          </a:p>
+          <a:p>
+            <a:pPr algn="l" indent="-228600" marL="228600">
+              <a:spcAft>
+                <a:spcPts val="600"/>
+              </a:spcAft>
+              <a:buClr>
+                <a:srgbClr val="1E5EF3"/>
+              </a:buClr>
+              <a:buChar char="—"/>
+            </a:pPr>
+            <a:r>
+              <a:rPr sz="1200" b="0">
+                <a:solidFill>
+                  <a:srgbClr val="202B38"/>
+                </a:solidFill>
+                <a:latin typeface="Arial"/>
+              </a:rPr>
+              <a:t>In plain words: the runner saves the typing; it decides nothing about what surrounds the loop. That is the harness</a:t>
+            </a:r>
+          </a:p>
+        </p:txBody>
+      </p:sp>
+      <p:sp>
+        <p:nvSpPr>
+          <p:cNvPr id="13" name="TextBox 12"/>
+          <p:cNvSpPr txBox="1"/>
+          <p:nvPr/>
+        </p:nvSpPr>
+        <p:spPr>
+          <a:xfrm>
+            <a:off x="548640" y="6053328"/>
+            <a:ext cx="11091672" cy="502920"/>
+          </a:xfrm>
+          <a:prstGeom prst="rect">
+            <a:avLst/>
+          </a:prstGeom>
+          <a:noFill/>
+        </p:spPr>
+        <p:txBody>
+          <a:bodyPr wrap="square">
+            <a:spAutoFit/>
+          </a:bodyPr>
+          <a:lstStyle/>
+          <a:p>
+            <a:pPr algn="l">
+              <a:spcAft>
+                <a:spcPts val="600"/>
+              </a:spcAft>
+              <a:buNone/>
+            </a:pPr>
+            <a:r>
+              <a:rPr sz="1200" b="0">
+                <a:solidFill>
+                  <a:srgbClr val="1E5EF3"/>
+                </a:solidFill>
+                <a:latin typeface="Arial"/>
+              </a:rPr>
+              <a:t>Recorded run on claude-opus-5, 30 Sep 2026; live runs vary. The runner sent a conversation of the same shape and size as the hand-written loop; what it does not decide is which tools to offer, what to refuse, when to stop, what to measure, how to test.</a:t>
+            </a:r>
+          </a:p>
+        </p:txBody>
+      </p:sp>
+      <p:sp>
+        <p:nvSpPr>
+          <p:cNvPr id="14" name="TextBox 13"/>
+          <p:cNvSpPr txBox="1"/>
+          <p:nvPr/>
+        </p:nvSpPr>
+        <p:spPr>
+          <a:xfrm>
+            <a:off x="548640" y="6473952"/>
+            <a:ext cx="7315200" cy="292608"/>
+          </a:xfrm>
+          <a:prstGeom prst="rect">
+            <a:avLst/>
+          </a:prstGeom>
+          <a:noFill/>
+        </p:spPr>
+        <p:txBody>
+          <a:bodyPr wrap="square">
+            <a:spAutoFit/>
+          </a:bodyPr>
+          <a:lstStyle/>
+          <a:p>
+            <a:pPr algn="l">
+              <a:spcAft>
+                <a:spcPts val="600"/>
+              </a:spcAft>
+              <a:buNone/>
+            </a:pPr>
+            <a:r>
+              <a:rPr sz="900" b="0">
+                <a:solidFill>
+                  <a:srgbClr val="5B6774"/>
+                </a:solidFill>
+                <a:latin typeface="Arial"/>
+              </a:rPr>
+              <a:t>M5 Session 1 - From Prompts to Harnesses</a:t>
+            </a:r>
+          </a:p>
+        </p:txBody>
+      </p:sp>
+      <p:sp>
+        <p:nvSpPr>
+          <p:cNvPr id="15" name="TextBox 14"/>
+          <p:cNvSpPr txBox="1"/>
+          <p:nvPr/>
+        </p:nvSpPr>
+        <p:spPr>
+          <a:xfrm>
+            <a:off x="11292840" y="6473952"/>
+            <a:ext cx="548640" cy="292608"/>
+          </a:xfrm>
+          <a:prstGeom prst="rect">
+            <a:avLst/>
+          </a:prstGeom>
+          <a:noFill/>
+        </p:spPr>
+        <p:txBody>
+          <a:bodyPr wrap="square">
+            <a:spAutoFit/>
+          </a:bodyPr>
+          <a:lstStyle/>
+          <a:p>
+            <a:pPr algn="r">
+              <a:spcAft>
+                <a:spcPts val="600"/>
+              </a:spcAft>
+              <a:buNone/>
+            </a:pPr>
+            <a:r>
+              <a:rPr sz="900" b="0">
+                <a:solidFill>
+                  <a:srgbClr val="5B6774"/>
+                </a:solidFill>
+                <a:latin typeface="Arial"/>
+              </a:rPr>
+              <a:t>19</a:t>
+            </a:r>
+          </a:p>
+        </p:txBody>
+      </p:sp>
+    </p:spTree>
+  </p:cSld>
+  <p:clrMapOvr>
+    <a:masterClrMapping/>
+  </p:clrMapOvr>
+</p:sld>
+</file>
+
+<file path=ppt/slides/slide2.xml><?xml version="1.0" encoding="utf-8"?>
+<p:sld xmlns:a="http://schemas.openxmlformats.org/drawingml/2006/main" xmlns:p="http://schemas.openxmlformats.org/presentationml/2006/main" xmlns:r="http://schemas.openxmlformats.org/officeDocument/2006/relationships">
+  <p:cSld>
+    <p:spTree>
+      <p:nvGrpSpPr>
+        <p:cNvPr id="1" name=""/>
+        <p:cNvGrpSpPr/>
+        <p:nvPr/>
+      </p:nvGrpSpPr>
+      <p:grpSpPr/>
+      <p:sp>
+        <p:nvSpPr>
+          <p:cNvPr id="2" name="Rectangle 1"/>
+          <p:cNvSpPr/>
+          <p:nvPr/>
+        </p:nvSpPr>
+        <p:spPr>
+          <a:xfrm>
+            <a:off x="0" y="0"/>
+            <a:ext cx="12191695" cy="6858000"/>
+          </a:xfrm>
+          <a:prstGeom prst="rect">
+            <a:avLst/>
+          </a:prstGeom>
+          <a:solidFill>
+            <a:srgbClr val="0A2540"/>
+          </a:solidFill>
+          <a:ln>
+            <a:noFill/>
+          </a:ln>
+          <a:effectLst/>
+        </p:spPr>
+        <p:style>
+          <a:lnRef idx="1">
+            <a:schemeClr val="accent1"/>
+          </a:lnRef>
+          <a:fillRef idx="3">
+            <a:schemeClr val="accent1"/>
+          </a:fillRef>
+          <a:effectRef idx="2">
+            <a:schemeClr val="accent1"/>
+          </a:effectRef>
+          <a:fontRef idx="minor">
+            <a:schemeClr val="lt1"/>
+          </a:fontRef>
+        </p:style>
+        <p:txBody>
+          <a:bodyPr rtlCol="0" anchor="ctr"/>
+          <a:lstStyle/>
+          <a:p>
+            <a:pPr algn="ctr"/>
+          </a:p>
+        </p:txBody>
+      </p:sp>
+      <p:sp>
+        <p:nvSpPr>
+          <p:cNvPr id="3" name="TextBox 2"/>
+          <p:cNvSpPr txBox="1"/>
+          <p:nvPr/>
+        </p:nvSpPr>
+        <p:spPr>
+          <a:xfrm>
+            <a:off x="822960" y="1463040"/>
+            <a:ext cx="3657600" cy="2011680"/>
+          </a:xfrm>
+          <a:prstGeom prst="rect">
+            <a:avLst/>
+          </a:prstGeom>
+          <a:noFill/>
+        </p:spPr>
+        <p:txBody>
+          <a:bodyPr wrap="square">
+            <a:spAutoFit/>
+          </a:bodyPr>
+          <a:lstStyle/>
+          <a:p>
+            <a:pPr algn="l">
+              <a:spcAft>
+                <a:spcPts val="600"/>
+              </a:spcAft>
+              <a:buNone/>
+            </a:pPr>
+            <a:r>
+              <a:rPr sz="11000" b="1">
+                <a:solidFill>
+                  <a:srgbClr val="1E5EF3"/>
+                </a:solidFill>
+                <a:latin typeface="Arial"/>
+              </a:rPr>
+              <a:t>01</a:t>
+            </a:r>
+          </a:p>
+        </p:txBody>
+      </p:sp>
+      <p:sp>
+        <p:nvSpPr>
+          <p:cNvPr id="4" name="TextBox 3"/>
+          <p:cNvSpPr txBox="1"/>
+          <p:nvPr/>
+        </p:nvSpPr>
+        <p:spPr>
+          <a:xfrm>
+            <a:off x="868680" y="3566160"/>
+            <a:ext cx="10424160" cy="1280160"/>
+          </a:xfrm>
+          <a:prstGeom prst="rect">
+            <a:avLst/>
+          </a:prstGeom>
+          <a:noFill/>
+        </p:spPr>
+        <p:txBody>
+          <a:bodyPr wrap="square">
+            <a:spAutoFit/>
+          </a:bodyPr>
+          <a:lstStyle/>
+          <a:p>
+            <a:pPr algn="l">
+              <a:spcAft>
+                <a:spcPts val="600"/>
+              </a:spcAft>
+              <a:buNone/>
+            </a:pPr>
+            <a:r>
+              <a:rPr sz="3400" b="1">
+                <a:solidFill>
+                  <a:srgbClr val="FFFFFF"/>
+                </a:solidFill>
+                <a:latin typeface="Arial"/>
+              </a:rPr>
+              <a:t>Part 1 - The theory: from the prompt to the harness</a:t>
+            </a:r>
+          </a:p>
+        </p:txBody>
+      </p:sp>
+      <p:sp>
+        <p:nvSpPr>
+          <p:cNvPr id="5" name="TextBox 4"/>
+          <p:cNvSpPr txBox="1"/>
+          <p:nvPr/>
+        </p:nvSpPr>
+        <p:spPr>
+          <a:xfrm>
+            <a:off x="868680" y="4709160"/>
+            <a:ext cx="10058400" cy="914400"/>
+          </a:xfrm>
+          <a:prstGeom prst="rect">
+            <a:avLst/>
+          </a:prstGeom>
+          <a:noFill/>
+        </p:spPr>
+        <p:txBody>
+          <a:bodyPr wrap="square">
+            <a:spAutoFit/>
+          </a:bodyPr>
+          <a:lstStyle/>
+          <a:p>
+            <a:pPr algn="l">
+              <a:spcAft>
+                <a:spcPts val="600"/>
+              </a:spcAft>
+              <a:buNone/>
+            </a:pPr>
+            <a:r>
+              <a:rPr sz="1600" b="0">
+                <a:solidFill>
+                  <a:srgbClr val="B9D0FA"/>
+                </a:solidFill>
+                <a:latin typeface="Arial"/>
+              </a:rPr>
+              <a:t>Where the word comes from, what a harness is made of, and the evidence that it changes results.</a:t>
+            </a:r>
+          </a:p>
+        </p:txBody>
+      </p:sp>
+      <p:sp>
+        <p:nvSpPr>
+          <p:cNvPr id="6" name="TextBox 5"/>
+          <p:cNvSpPr txBox="1"/>
+          <p:nvPr/>
+        </p:nvSpPr>
+        <p:spPr>
+          <a:xfrm>
+            <a:off x="548640" y="6473952"/>
+            <a:ext cx="7315200" cy="292608"/>
+          </a:xfrm>
+          <a:prstGeom prst="rect">
+            <a:avLst/>
+          </a:prstGeom>
+          <a:noFill/>
+        </p:spPr>
+        <p:txBody>
+          <a:bodyPr wrap="square">
+            <a:spAutoFit/>
+          </a:bodyPr>
+          <a:lstStyle/>
+          <a:p>
+            <a:pPr algn="l">
+              <a:spcAft>
+                <a:spcPts val="600"/>
+              </a:spcAft>
+              <a:buNone/>
+            </a:pPr>
+            <a:r>
+              <a:rPr sz="900" b="0">
+                <a:solidFill>
+                  <a:srgbClr val="B9D0FA"/>
+                </a:solidFill>
+                <a:latin typeface="Arial"/>
+              </a:rPr>
+              <a:t>M5 Session 1 - From Prompts to Harnesses</a:t>
+            </a:r>
+          </a:p>
+        </p:txBody>
+      </p:sp>
+      <p:sp>
+        <p:nvSpPr>
+          <p:cNvPr id="7" name="TextBox 6"/>
+          <p:cNvSpPr txBox="1"/>
+          <p:nvPr/>
+        </p:nvSpPr>
+        <p:spPr>
+          <a:xfrm>
+            <a:off x="11292840" y="6473952"/>
+            <a:ext cx="548640" cy="292608"/>
+          </a:xfrm>
+          <a:prstGeom prst="rect">
+            <a:avLst/>
+          </a:prstGeom>
+          <a:noFill/>
+        </p:spPr>
+        <p:txBody>
+          <a:bodyPr wrap="square">
+            <a:spAutoFit/>
+          </a:bodyPr>
+          <a:lstStyle/>
+          <a:p>
+            <a:pPr algn="r">
+              <a:spcAft>
+                <a:spcPts val="600"/>
+              </a:spcAft>
+              <a:buNone/>
+            </a:pPr>
+            <a:r>
+              <a:rPr sz="900" b="0">
+                <a:solidFill>
+                  <a:srgbClr val="B9D0FA"/>
+                </a:solidFill>
+                <a:latin typeface="Arial"/>
+              </a:rPr>
+              <a:t>2</a:t>
+            </a:r>
+          </a:p>
+        </p:txBody>
+      </p:sp>
+    </p:spTree>
+  </p:cSld>
+  <p:clrMapOvr>
+    <a:masterClrMapping/>
+  </p:clrMapOvr>
+</p:sld>
+</file>
+
+<file path=ppt/slides/slide20.xml><?xml version="1.0" encoding="utf-8"?>
+<p:sld xmlns:a="http://schemas.openxmlformats.org/drawingml/2006/main" xmlns:p="http://schemas.openxmlformats.org/presentationml/2006/main" xmlns:r="http://schemas.openxmlformats.org/officeDocument/2006/relationships">
+  <p:cSld>
+    <p:spTree>
+      <p:nvGrpSpPr>
+        <p:cNvPr id="1" name=""/>
+        <p:cNvGrpSpPr/>
+        <p:nvPr/>
+      </p:nvGrpSpPr>
+      <p:grpSpPr/>
+      <p:sp>
+        <p:nvSpPr>
+          <p:cNvPr id="2" name="Rectangle 1"/>
+          <p:cNvSpPr/>
+          <p:nvPr/>
+        </p:nvSpPr>
+        <p:spPr>
+          <a:xfrm>
+            <a:off x="0" y="0"/>
+            <a:ext cx="12191695" cy="6858000"/>
+          </a:xfrm>
+          <a:prstGeom prst="rect">
+            <a:avLst/>
+          </a:prstGeom>
+          <a:solidFill>
+            <a:srgbClr val="FFFFFF"/>
+          </a:solidFill>
+          <a:ln>
+            <a:noFill/>
+          </a:ln>
+          <a:effectLst/>
+        </p:spPr>
+        <p:style>
+          <a:lnRef idx="1">
+            <a:schemeClr val="accent1"/>
+          </a:lnRef>
+          <a:fillRef idx="3">
+            <a:schemeClr val="accent1"/>
+          </a:fillRef>
+          <a:effectRef idx="2">
+            <a:schemeClr val="accent1"/>
+          </a:effectRef>
+          <a:fontRef idx="minor">
+            <a:schemeClr val="lt1"/>
+          </a:fontRef>
+        </p:style>
+        <p:txBody>
+          <a:bodyPr rtlCol="0" anchor="ctr"/>
+          <a:lstStyle/>
+          <a:p>
+            <a:pPr algn="ctr"/>
+          </a:p>
+        </p:txBody>
+      </p:sp>
+      <p:sp>
+        <p:nvSpPr>
+          <p:cNvPr id="3" name="Rectangle 2"/>
+          <p:cNvSpPr/>
+          <p:nvPr/>
+        </p:nvSpPr>
+        <p:spPr>
+          <a:xfrm>
+            <a:off x="548640" y="475488"/>
+            <a:ext cx="457200" cy="54864"/>
+          </a:xfrm>
+          <a:prstGeom prst="rect">
+            <a:avLst/>
+          </a:prstGeom>
+          <a:solidFill>
+            <a:srgbClr val="1E5EF3"/>
+          </a:solidFill>
+          <a:ln>
+            <a:noFill/>
+          </a:ln>
+          <a:effectLst/>
+        </p:spPr>
+        <p:style>
+          <a:lnRef idx="1">
+            <a:schemeClr val="accent1"/>
+          </a:lnRef>
+          <a:fillRef idx="3">
+            <a:schemeClr val="accent1"/>
+          </a:fillRef>
+          <a:effectRef idx="2">
+            <a:schemeClr val="accent1"/>
+          </a:effectRef>
+          <a:fontRef idx="minor">
+            <a:schemeClr val="lt1"/>
+          </a:fontRef>
+        </p:style>
+        <p:txBody>
+          <a:bodyPr rtlCol="0" anchor="ctr"/>
+          <a:lstStyle/>
+          <a:p>
+            <a:pPr algn="ctr"/>
+          </a:p>
+        </p:txBody>
+      </p:sp>
+      <p:sp>
+        <p:nvSpPr>
+          <p:cNvPr id="4" name="TextBox 3"/>
+          <p:cNvSpPr txBox="1"/>
+          <p:nvPr/>
+        </p:nvSpPr>
+        <p:spPr>
+          <a:xfrm>
+            <a:off x="548640" y="603504"/>
+            <a:ext cx="11091672" cy="274320"/>
+          </a:xfrm>
+          <a:prstGeom prst="rect">
+            <a:avLst/>
+          </a:prstGeom>
+          <a:noFill/>
+        </p:spPr>
+        <p:txBody>
+          <a:bodyPr wrap="square">
+            <a:spAutoFit/>
+          </a:bodyPr>
+          <a:lstStyle/>
+          <a:p>
+            <a:pPr algn="l">
+              <a:spcAft>
+                <a:spcPts val="600"/>
+              </a:spcAft>
+              <a:buNone/>
+            </a:pPr>
+            <a:r>
+              <a:rPr sz="1100" b="1">
+                <a:solidFill>
+                  <a:srgbClr val="1E5EF3"/>
+                </a:solidFill>
+                <a:latin typeface="Arial"/>
+              </a:rPr>
+              <a:t>NOTEBOOK 01, SECTION 5</a:t>
+            </a:r>
+          </a:p>
+        </p:txBody>
+      </p:sp>
+      <p:sp>
+        <p:nvSpPr>
+          <p:cNvPr id="5" name="TextBox 4"/>
+          <p:cNvSpPr txBox="1"/>
+          <p:nvPr/>
+        </p:nvSpPr>
+        <p:spPr>
+          <a:xfrm>
+            <a:off x="548640" y="868680"/>
+            <a:ext cx="11091672" cy="777240"/>
+          </a:xfrm>
+          <a:prstGeom prst="rect">
+            <a:avLst/>
+          </a:prstGeom>
+          <a:noFill/>
+        </p:spPr>
+        <p:txBody>
+          <a:bodyPr wrap="square">
+            <a:spAutoFit/>
+          </a:bodyPr>
+          <a:lstStyle/>
+          <a:p>
+            <a:pPr algn="l">
+              <a:spcAft>
+                <a:spcPts val="0"/>
+              </a:spcAft>
+              <a:buNone/>
+            </a:pPr>
+            <a:r>
+              <a:rPr sz="2600" b="1">
+                <a:solidFill>
+                  <a:srgbClr val="0A2540"/>
+                </a:solidFill>
+                <a:latin typeface="Arial"/>
+              </a:rPr>
+              <a:t>The eight pieces and where each one lives in this module: SDK, harness package, Claude Code, CI</a:t>
+            </a:r>
+          </a:p>
+        </p:txBody>
+      </p:sp>
+      <p:sp>
+        <p:nvSpPr>
+          <p:cNvPr id="6" name="Rectangle 5"/>
+          <p:cNvSpPr/>
+          <p:nvPr/>
+        </p:nvSpPr>
+        <p:spPr>
+          <a:xfrm>
+            <a:off x="548640" y="1664208"/>
+            <a:ext cx="11091672" cy="12801"/>
+          </a:xfrm>
+          <a:prstGeom prst="rect">
+            <a:avLst/>
+          </a:prstGeom>
+          <a:solidFill>
+            <a:srgbClr val="B9D0FA"/>
+          </a:solidFill>
+          <a:ln>
+            <a:noFill/>
+          </a:ln>
+          <a:effectLst/>
+        </p:spPr>
+        <p:style>
+          <a:lnRef idx="1">
+            <a:schemeClr val="accent1"/>
+          </a:lnRef>
+          <a:fillRef idx="3">
+            <a:schemeClr val="accent1"/>
+          </a:fillRef>
+          <a:effectRef idx="2">
+            <a:schemeClr val="accent1"/>
+          </a:effectRef>
+          <a:fontRef idx="minor">
+            <a:schemeClr val="lt1"/>
+          </a:fontRef>
+        </p:style>
+        <p:txBody>
+          <a:bodyPr rtlCol="0" anchor="ctr"/>
+          <a:lstStyle/>
+          <a:p>
+            <a:pPr algn="ctr"/>
+          </a:p>
+        </p:txBody>
+      </p:sp>
+      <p:graphicFrame>
+        <p:nvGraphicFramePr>
+          <p:cNvPr id="7" name="Table 6"/>
+          <p:cNvGraphicFramePr>
+            <a:graphicFrameLocks noGrp="1"/>
+          </p:cNvGraphicFramePr>
+          <p:nvPr/>
+        </p:nvGraphicFramePr>
+        <p:xfrm>
+          <a:off x="548640" y="1874519"/>
+          <a:ext cx="11091670" cy="4114800"/>
+        </p:xfrm>
+        <a:graphic>
+          <a:graphicData uri="http://schemas.openxmlformats.org/drawingml/2006/table">
+            <a:tbl>
+              <a:tblPr firstRow="1" bandRow="1">
+                <a:tableStyleId>{5C22544A-7EE6-4342-B048-85BDC9FD1C3A}</a:tableStyleId>
+              </a:tblPr>
+              <a:tblGrid>
+                <a:gridCol w="1507605"/>
+                <a:gridCol w="2799839"/>
+                <a:gridCol w="2476781"/>
+                <a:gridCol w="2476781"/>
+                <a:gridCol w="1830664"/>
+              </a:tblGrid>
+              <a:tr h="457200">
+                <a:tc>
+                  <a:txBody>
+                    <a:bodyPr wrap="square"/>
+                    <a:lstStyle/>
+                    <a:p>
+                      <a:pPr algn="l">
+                        <a:spcAft>
+                          <a:spcPts val="0"/>
+                        </a:spcAft>
+                        <a:buNone/>
+                      </a:pPr>
+                      <a:r>
+                        <a:rPr sz="1150" b="1">
+                          <a:solidFill>
+                            <a:srgbClr val="FFFFFF"/>
+                          </a:solidFill>
+                          <a:latin typeface="Arial"/>
+                        </a:rPr>
+                        <a:t>Piece</a:t>
+                      </a:r>
+                    </a:p>
+                  </a:txBody>
+                  <a:tcPr>
+                    <a:solidFill>
+                      <a:srgbClr val="0A2540"/>
+                    </a:solidFill>
+                  </a:tcPr>
+                </a:tc>
+                <a:tc>
+                  <a:txBody>
+                    <a:bodyPr wrap="square"/>
+                    <a:lstStyle/>
+                    <a:p>
+                      <a:pPr algn="l">
+                        <a:spcAft>
+                          <a:spcPts val="0"/>
+                        </a:spcAft>
+                        <a:buNone/>
+                      </a:pPr>
+                      <a:r>
+                        <a:rPr sz="1150" b="1">
+                          <a:solidFill>
+                            <a:srgbClr val="FFFFFF"/>
+                          </a:solidFill>
+                          <a:latin typeface="Arial"/>
+                        </a:rPr>
+                        <a:t>Anthropic SDK (Sessions 1-2)</a:t>
+                      </a:r>
+                    </a:p>
+                  </a:txBody>
+                  <a:tcPr>
+                    <a:solidFill>
+                      <a:srgbClr val="0A2540"/>
+                    </a:solidFill>
+                  </a:tcPr>
+                </a:tc>
+                <a:tc>
+                  <a:txBody>
+                    <a:bodyPr wrap="square"/>
+                    <a:lstStyle/>
+                    <a:p>
+                      <a:pPr algn="l">
+                        <a:spcAft>
+                          <a:spcPts val="0"/>
+                        </a:spcAft>
+                        <a:buNone/>
+                      </a:pPr>
+                      <a:r>
+                        <a:rPr sz="1150" b="1">
+                          <a:solidFill>
+                            <a:srgbClr val="FFFFFF"/>
+                          </a:solidFill>
+                          <a:latin typeface="Arial"/>
+                        </a:rPr>
+                        <a:t>harness package (Sessions 3-4)</a:t>
+                      </a:r>
+                    </a:p>
+                  </a:txBody>
+                  <a:tcPr>
+                    <a:solidFill>
+                      <a:srgbClr val="0A2540"/>
+                    </a:solidFill>
+                  </a:tcPr>
+                </a:tc>
+                <a:tc>
+                  <a:txBody>
+                    <a:bodyPr wrap="square"/>
+                    <a:lstStyle/>
+                    <a:p>
+                      <a:pPr algn="l">
+                        <a:spcAft>
+                          <a:spcPts val="0"/>
+                        </a:spcAft>
+                        <a:buNone/>
+                      </a:pPr>
+                      <a:r>
+                        <a:rPr sz="1150" b="1">
+                          <a:solidFill>
+                            <a:srgbClr val="FFFFFF"/>
+                          </a:solidFill>
+                          <a:latin typeface="Arial"/>
+                        </a:rPr>
+                        <a:t>Claude Code labs (Sessions 2, 4)</a:t>
+                      </a:r>
+                    </a:p>
+                  </a:txBody>
+                  <a:tcPr>
+                    <a:solidFill>
+                      <a:srgbClr val="0A2540"/>
+                    </a:solidFill>
+                  </a:tcPr>
+                </a:tc>
+                <a:tc>
+                  <a:txBody>
+                    <a:bodyPr wrap="square"/>
+                    <a:lstStyle/>
+                    <a:p>
+                      <a:pPr algn="l">
+                        <a:spcAft>
+                          <a:spcPts val="0"/>
+                        </a:spcAft>
+                        <a:buNone/>
+                      </a:pPr>
+                      <a:r>
+                        <a:rPr sz="1150" b="1">
+                          <a:solidFill>
+                            <a:srgbClr val="FFFFFF"/>
+                          </a:solidFill>
+                          <a:latin typeface="Arial"/>
+                        </a:rPr>
+                        <a:t>CI (Session 3)</a:t>
+                      </a:r>
+                    </a:p>
+                  </a:txBody>
+                  <a:tcPr>
+                    <a:solidFill>
+                      <a:srgbClr val="0A2540"/>
+                    </a:solidFill>
+                  </a:tcPr>
+                </a:tc>
+              </a:tr>
+              <a:tr h="457200">
+                <a:tc>
+                  <a:txBody>
+                    <a:bodyPr wrap="square"/>
+                    <a:lstStyle/>
+                    <a:p>
+                      <a:pPr algn="l">
+                        <a:spcAft>
+                          <a:spcPts val="0"/>
+                        </a:spcAft>
+                        <a:buNone/>
+                      </a:pPr>
+                      <a:r>
+                        <a:rPr sz="1000" b="0">
+                          <a:solidFill>
+                            <a:srgbClr val="202B38"/>
+                          </a:solidFill>
+                          <a:latin typeface="Arial"/>
+                        </a:rPr>
+                        <a:t>1 Model</a:t>
+                      </a:r>
+                    </a:p>
+                  </a:txBody>
+                  <a:tcPr>
+                    <a:solidFill>
+                      <a:srgbClr val="FFFFFF"/>
+                    </a:solidFill>
+                  </a:tcPr>
+                </a:tc>
+                <a:tc>
+                  <a:txBody>
+                    <a:bodyPr wrap="square"/>
+                    <a:lstStyle/>
+                    <a:p>
+                      <a:pPr algn="l">
+                        <a:spcAft>
+                          <a:spcPts val="0"/>
+                        </a:spcAft>
+                        <a:buNone/>
+                      </a:pPr>
+                      <a:r>
+                        <a:rPr sz="1000" b="0">
+                          <a:solidFill>
+                            <a:srgbClr val="202B38"/>
+                          </a:solidFill>
+                          <a:latin typeface="Arial"/>
+                        </a:rPr>
+                        <a:t>messages.create(model=...), models.retrieve; choose by capability, cost, latency</a:t>
+                      </a:r>
+                    </a:p>
+                  </a:txBody>
+                  <a:tcPr>
+                    <a:solidFill>
+                      <a:srgbClr val="FFFFFF"/>
+                    </a:solidFill>
+                  </a:tcPr>
+                </a:tc>
+                <a:tc>
+                  <a:txBody>
+                    <a:bodyPr wrap="square"/>
+                    <a:lstStyle/>
+                    <a:p>
+                      <a:pPr algn="l">
+                        <a:spcAft>
+                          <a:spcPts val="0"/>
+                        </a:spcAft>
+                        <a:buNone/>
+                      </a:pPr>
+                      <a:r>
+                        <a:rPr sz="1000" b="0">
+                          <a:solidFill>
+                            <a:srgbClr val="202B38"/>
+                          </a:solidFill>
+                          <a:latin typeface="Arial"/>
+                        </a:rPr>
+                        <a:t>MAIN_MODEL opus-5, WORKER_MODEL sonnet-5</a:t>
+                      </a:r>
+                    </a:p>
+                  </a:txBody>
+                  <a:tcPr>
+                    <a:solidFill>
+                      <a:srgbClr val="FFFFFF"/>
+                    </a:solidFill>
+                  </a:tcPr>
+                </a:tc>
+                <a:tc>
+                  <a:txBody>
+                    <a:bodyPr wrap="square"/>
+                    <a:lstStyle/>
+                    <a:p>
+                      <a:pPr algn="l">
+                        <a:spcAft>
+                          <a:spcPts val="0"/>
+                        </a:spcAft>
+                        <a:buNone/>
+                      </a:pPr>
+                      <a:r>
+                        <a:rPr sz="1000" b="0">
+                          <a:solidFill>
+                            <a:srgbClr val="202B38"/>
+                          </a:solidFill>
+                          <a:latin typeface="Arial"/>
+                        </a:rPr>
+                        <a:t>-</a:t>
+                      </a:r>
+                    </a:p>
+                  </a:txBody>
+                  <a:tcPr>
+                    <a:solidFill>
+                      <a:srgbClr val="FFFFFF"/>
+                    </a:solidFill>
+                  </a:tcPr>
+                </a:tc>
+                <a:tc>
+                  <a:txBody>
+                    <a:bodyPr wrap="square"/>
+                    <a:lstStyle/>
+                    <a:p>
+                      <a:pPr algn="l">
+                        <a:spcAft>
+                          <a:spcPts val="0"/>
+                        </a:spcAft>
+                        <a:buNone/>
+                      </a:pPr>
+                      <a:r>
+                        <a:rPr sz="1000" b="0">
+                          <a:solidFill>
+                            <a:srgbClr val="202B38"/>
+                          </a:solidFill>
+                          <a:latin typeface="Arial"/>
+                        </a:rPr>
+                        <a:t>-</a:t>
                       </a:r>
                     </a:p>
                   </a:txBody>
@@ -11717,13 +13854,13 @@
                         <a:buNone/>
                       </a:pPr>
                       <a:r>
-                        <a:rPr sz="1150" b="0">
+                        <a:rPr sz="1000" b="0">
                           <a:solidFill>
-                            <a:srgbClr val="0A2540"/>
+                            <a:srgbClr val="202B38"/>
                           </a:solidFill>
-                          <a:latin typeface="Courier New"/>
+                          <a:latin typeface="Arial"/>
                         </a:rPr>
-                        <a:t>        messages.append(tool_result(call, result))</a:t>
+                        <a:t>2 Context</a:t>
                       </a:r>
                     </a:p>
                   </a:txBody>
@@ -11745,13 +13882,949 @@
                         <a:buNone/>
                       </a:pPr>
                       <a:r>
-                        <a:rPr sz="1250" b="0">
+                        <a:rPr sz="1000" b="0">
                           <a:solidFill>
                             <a:srgbClr val="202B38"/>
                           </a:solidFill>
                           <a:latin typeface="Arial"/>
                         </a:rPr>
-                        <a:t>Paste the result back so the next call sees it</a:t>
+                        <a:t>system, messages, usage.input_tokens; count_tokens, compaction, notes</a:t>
+                      </a:r>
+                    </a:p>
+                  </a:txBody>
+                  <a:tcPr>
+                    <a:solidFill>
+                      <a:srgbClr val="EEF3FD"/>
+                    </a:solidFill>
+                  </a:tcPr>
+                </a:tc>
+                <a:tc>
+                  <a:txBody>
+                    <a:bodyPr wrap="square"/>
+                    <a:lstStyle/>
+                    <a:p>
+                      <a:pPr algn="l">
+                        <a:spcAft>
+                          <a:spcPts val="0"/>
+                        </a:spcAft>
+                        <a:buNone/>
+                      </a:pPr>
+                      <a:r>
+                        <a:rPr sz="1000" b="0">
+                          <a:solidFill>
+                            <a:srgbClr val="202B38"/>
+                          </a:solidFill>
+                          <a:latin typeface="Arial"/>
+                        </a:rPr>
+                        <a:t>max_input_tokens budget stop</a:t>
+                      </a:r>
+                    </a:p>
+                  </a:txBody>
+                  <a:tcPr>
+                    <a:solidFill>
+                      <a:srgbClr val="EEF3FD"/>
+                    </a:solidFill>
+                  </a:tcPr>
+                </a:tc>
+                <a:tc>
+                  <a:txBody>
+                    <a:bodyPr wrap="square"/>
+                    <a:lstStyle/>
+                    <a:p>
+                      <a:pPr algn="l">
+                        <a:spcAft>
+                          <a:spcPts val="0"/>
+                        </a:spcAft>
+                        <a:buNone/>
+                      </a:pPr>
+                      <a:r>
+                        <a:rPr sz="1000" b="0">
+                          <a:solidFill>
+                            <a:srgbClr val="202B38"/>
+                          </a:solidFill>
+                          <a:latin typeface="Arial"/>
+                        </a:rPr>
+                        <a:t>CLAUDE.md in the project</a:t>
+                      </a:r>
+                    </a:p>
+                  </a:txBody>
+                  <a:tcPr>
+                    <a:solidFill>
+                      <a:srgbClr val="EEF3FD"/>
+                    </a:solidFill>
+                  </a:tcPr>
+                </a:tc>
+                <a:tc>
+                  <a:txBody>
+                    <a:bodyPr wrap="square"/>
+                    <a:lstStyle/>
+                    <a:p>
+                      <a:pPr algn="l">
+                        <a:spcAft>
+                          <a:spcPts val="0"/>
+                        </a:spcAft>
+                        <a:buNone/>
+                      </a:pPr>
+                      <a:r>
+                        <a:rPr sz="1000" b="0">
+                          <a:solidFill>
+                            <a:srgbClr val="202B38"/>
+                          </a:solidFill>
+                          <a:latin typeface="Arial"/>
+                        </a:rPr>
+                        <a:t>-</a:t>
+                      </a:r>
+                    </a:p>
+                  </a:txBody>
+                  <a:tcPr>
+                    <a:solidFill>
+                      <a:srgbClr val="EEF3FD"/>
+                    </a:solidFill>
+                  </a:tcPr>
+                </a:tc>
+              </a:tr>
+              <a:tr h="457200">
+                <a:tc>
+                  <a:txBody>
+                    <a:bodyPr wrap="square"/>
+                    <a:lstStyle/>
+                    <a:p>
+                      <a:pPr algn="l">
+                        <a:spcAft>
+                          <a:spcPts val="0"/>
+                        </a:spcAft>
+                        <a:buNone/>
+                      </a:pPr>
+                      <a:r>
+                        <a:rPr sz="1000" b="0">
+                          <a:solidFill>
+                            <a:srgbClr val="202B38"/>
+                          </a:solidFill>
+                          <a:latin typeface="Arial"/>
+                        </a:rPr>
+                        <a:t>3 Tools</a:t>
+                      </a:r>
+                    </a:p>
+                  </a:txBody>
+                  <a:tcPr>
+                    <a:solidFill>
+                      <a:srgbClr val="FFFFFF"/>
+                    </a:solidFill>
+                  </a:tcPr>
+                </a:tc>
+                <a:tc>
+                  <a:txBody>
+                    <a:bodyPr wrap="square"/>
+                    <a:lstStyle/>
+                    <a:p>
+                      <a:pPr algn="l">
+                        <a:spcAft>
+                          <a:spcPts val="0"/>
+                        </a:spcAft>
+                        <a:buNone/>
+                      </a:pPr>
+                      <a:r>
+                        <a:rPr sz="1000" b="0">
+                          <a:solidFill>
+                            <a:srgbClr val="202B38"/>
+                          </a:solidFill>
+                          <a:latin typeface="Arial"/>
+                        </a:rPr>
+                        <a:t>raw tool dicts, tool_use, tool_result, beta_tool</a:t>
+                      </a:r>
+                    </a:p>
+                  </a:txBody>
+                  <a:tcPr>
+                    <a:solidFill>
+                      <a:srgbClr val="FFFFFF"/>
+                    </a:solidFill>
+                  </a:tcPr>
+                </a:tc>
+                <a:tc>
+                  <a:txBody>
+                    <a:bodyPr wrap="square"/>
+                    <a:lstStyle/>
+                    <a:p>
+                      <a:pPr algn="l">
+                        <a:spcAft>
+                          <a:spcPts val="0"/>
+                        </a:spcAft>
+                        <a:buNone/>
+                      </a:pPr>
+                      <a:r>
+                        <a:rPr sz="1000" b="0">
+                          <a:solidFill>
+                            <a:srgbClr val="202B38"/>
+                          </a:solidFill>
+                          <a:latin typeface="Arial"/>
+                        </a:rPr>
+                        <a:t>@tool(risk=...), ToolRegistry</a:t>
+                      </a:r>
+                    </a:p>
+                  </a:txBody>
+                  <a:tcPr>
+                    <a:solidFill>
+                      <a:srgbClr val="FFFFFF"/>
+                    </a:solidFill>
+                  </a:tcPr>
+                </a:tc>
+                <a:tc>
+                  <a:txBody>
+                    <a:bodyPr wrap="square"/>
+                    <a:lstStyle/>
+                    <a:p>
+                      <a:pPr algn="l">
+                        <a:spcAft>
+                          <a:spcPts val="0"/>
+                        </a:spcAft>
+                        <a:buNone/>
+                      </a:pPr>
+                      <a:r>
+                        <a:rPr sz="1000" b="0">
+                          <a:solidFill>
+                            <a:srgbClr val="202B38"/>
+                          </a:solidFill>
+                          <a:latin typeface="Arial"/>
+                        </a:rPr>
+                        <a:t>MCP servers: claude mcp add</a:t>
+                      </a:r>
+                    </a:p>
+                  </a:txBody>
+                  <a:tcPr>
+                    <a:solidFill>
+                      <a:srgbClr val="FFFFFF"/>
+                    </a:solidFill>
+                  </a:tcPr>
+                </a:tc>
+                <a:tc>
+                  <a:txBody>
+                    <a:bodyPr wrap="square"/>
+                    <a:lstStyle/>
+                    <a:p>
+                      <a:pPr algn="l">
+                        <a:spcAft>
+                          <a:spcPts val="0"/>
+                        </a:spcAft>
+                        <a:buNone/>
+                      </a:pPr>
+                      <a:r>
+                        <a:rPr sz="1000" b="0">
+                          <a:solidFill>
+                            <a:srgbClr val="202B38"/>
+                          </a:solidFill>
+                          <a:latin typeface="Arial"/>
+                        </a:rPr>
+                        <a:t>-</a:t>
+                      </a:r>
+                    </a:p>
+                  </a:txBody>
+                  <a:tcPr>
+                    <a:solidFill>
+                      <a:srgbClr val="FFFFFF"/>
+                    </a:solidFill>
+                  </a:tcPr>
+                </a:tc>
+              </a:tr>
+              <a:tr h="457200">
+                <a:tc>
+                  <a:txBody>
+                    <a:bodyPr wrap="square"/>
+                    <a:lstStyle/>
+                    <a:p>
+                      <a:pPr algn="l">
+                        <a:spcAft>
+                          <a:spcPts val="0"/>
+                        </a:spcAft>
+                        <a:buNone/>
+                      </a:pPr>
+                      <a:r>
+                        <a:rPr sz="1000" b="0">
+                          <a:solidFill>
+                            <a:srgbClr val="202B38"/>
+                          </a:solidFill>
+                          <a:latin typeface="Arial"/>
+                        </a:rPr>
+                        <a:t>4 Skills</a:t>
+                      </a:r>
+                    </a:p>
+                  </a:txBody>
+                  <a:tcPr>
+                    <a:solidFill>
+                      <a:srgbClr val="EEF3FD"/>
+                    </a:solidFill>
+                  </a:tcPr>
+                </a:tc>
+                <a:tc>
+                  <a:txBody>
+                    <a:bodyPr wrap="square"/>
+                    <a:lstStyle/>
+                    <a:p>
+                      <a:pPr algn="l">
+                        <a:spcAft>
+                          <a:spcPts val="0"/>
+                        </a:spcAft>
+                        <a:buNone/>
+                      </a:pPr>
+                      <a:r>
+                        <a:rPr sz="1000" b="0">
+                          <a:solidFill>
+                            <a:srgbClr val="202B38"/>
+                          </a:solidFill>
+                          <a:latin typeface="Arial"/>
+                        </a:rPr>
+                        <a:t>a load_skill tool; SKILL.md measured on the real tokenizer</a:t>
+                      </a:r>
+                    </a:p>
+                  </a:txBody>
+                  <a:tcPr>
+                    <a:solidFill>
+                      <a:srgbClr val="EEF3FD"/>
+                    </a:solidFill>
+                  </a:tcPr>
+                </a:tc>
+                <a:tc>
+                  <a:txBody>
+                    <a:bodyPr wrap="square"/>
+                    <a:lstStyle/>
+                    <a:p>
+                      <a:pPr algn="l">
+                        <a:spcAft>
+                          <a:spcPts val="0"/>
+                        </a:spcAft>
+                        <a:buNone/>
+                      </a:pPr>
+                      <a:r>
+                        <a:rPr sz="1000" b="0">
+                          <a:solidFill>
+                            <a:srgbClr val="202B38"/>
+                          </a:solidFill>
+                          <a:latin typeface="Arial"/>
+                        </a:rPr>
+                        <a:t>-</a:t>
+                      </a:r>
+                    </a:p>
+                  </a:txBody>
+                  <a:tcPr>
+                    <a:solidFill>
+                      <a:srgbClr val="EEF3FD"/>
+                    </a:solidFill>
+                  </a:tcPr>
+                </a:tc>
+                <a:tc>
+                  <a:txBody>
+                    <a:bodyPr wrap="square"/>
+                    <a:lstStyle/>
+                    <a:p>
+                      <a:pPr algn="l">
+                        <a:spcAft>
+                          <a:spcPts val="0"/>
+                        </a:spcAft>
+                        <a:buNone/>
+                      </a:pPr>
+                      <a:r>
+                        <a:rPr sz="1000" b="0">
+                          <a:solidFill>
+                            <a:srgbClr val="202B38"/>
+                          </a:solidFill>
+                          <a:latin typeface="Arial"/>
+                        </a:rPr>
+                        <a:t>.claude/skills/&lt;name&gt;/SKILL.md</a:t>
+                      </a:r>
+                    </a:p>
+                  </a:txBody>
+                  <a:tcPr>
+                    <a:solidFill>
+                      <a:srgbClr val="EEF3FD"/>
+                    </a:solidFill>
+                  </a:tcPr>
+                </a:tc>
+                <a:tc>
+                  <a:txBody>
+                    <a:bodyPr wrap="square"/>
+                    <a:lstStyle/>
+                    <a:p>
+                      <a:pPr algn="l">
+                        <a:spcAft>
+                          <a:spcPts val="0"/>
+                        </a:spcAft>
+                        <a:buNone/>
+                      </a:pPr>
+                      <a:r>
+                        <a:rPr sz="1000" b="0">
+                          <a:solidFill>
+                            <a:srgbClr val="202B38"/>
+                          </a:solidFill>
+                          <a:latin typeface="Arial"/>
+                        </a:rPr>
+                        <a:t>-</a:t>
+                      </a:r>
+                    </a:p>
+                  </a:txBody>
+                  <a:tcPr>
+                    <a:solidFill>
+                      <a:srgbClr val="EEF3FD"/>
+                    </a:solidFill>
+                  </a:tcPr>
+                </a:tc>
+              </a:tr>
+              <a:tr h="457200">
+                <a:tc>
+                  <a:txBody>
+                    <a:bodyPr wrap="square"/>
+                    <a:lstStyle/>
+                    <a:p>
+                      <a:pPr algn="l">
+                        <a:spcAft>
+                          <a:spcPts val="0"/>
+                        </a:spcAft>
+                        <a:buNone/>
+                      </a:pPr>
+                      <a:r>
+                        <a:rPr sz="1000" b="0">
+                          <a:solidFill>
+                            <a:srgbClr val="202B38"/>
+                          </a:solidFill>
+                          <a:latin typeface="Arial"/>
+                        </a:rPr>
+                        <a:t>5 The loop</a:t>
+                      </a:r>
+                    </a:p>
+                  </a:txBody>
+                  <a:tcPr>
+                    <a:solidFill>
+                      <a:srgbClr val="FFFFFF"/>
+                    </a:solidFill>
+                  </a:tcPr>
+                </a:tc>
+                <a:tc>
+                  <a:txBody>
+                    <a:bodyPr wrap="square"/>
+                    <a:lstStyle/>
+                    <a:p>
+                      <a:pPr algn="l">
+                        <a:spcAft>
+                          <a:spcPts val="0"/>
+                        </a:spcAft>
+                        <a:buNone/>
+                      </a:pPr>
+                      <a:r>
+                        <a:rPr sz="1000" b="0">
+                          <a:solidFill>
+                            <a:srgbClr val="202B38"/>
+                          </a:solidFill>
+                          <a:latin typeface="Arial"/>
+                        </a:rPr>
+                        <a:t>run_agent, tool_runner</a:t>
+                      </a:r>
+                    </a:p>
+                  </a:txBody>
+                  <a:tcPr>
+                    <a:solidFill>
+                      <a:srgbClr val="FFFFFF"/>
+                    </a:solidFill>
+                  </a:tcPr>
+                </a:tc>
+                <a:tc>
+                  <a:txBody>
+                    <a:bodyPr wrap="square"/>
+                    <a:lstStyle/>
+                    <a:p>
+                      <a:pPr algn="l">
+                        <a:spcAft>
+                          <a:spcPts val="0"/>
+                        </a:spcAft>
+                        <a:buNone/>
+                      </a:pPr>
+                      <a:r>
+                        <a:rPr sz="1000" b="0">
+                          <a:solidFill>
+                            <a:srgbClr val="202B38"/>
+                          </a:solidFill>
+                          <a:latin typeface="Arial"/>
+                        </a:rPr>
+                        <a:t>Agent.run, stopped_because</a:t>
+                      </a:r>
+                    </a:p>
+                  </a:txBody>
+                  <a:tcPr>
+                    <a:solidFill>
+                      <a:srgbClr val="FFFFFF"/>
+                    </a:solidFill>
+                  </a:tcPr>
+                </a:tc>
+                <a:tc>
+                  <a:txBody>
+                    <a:bodyPr wrap="square"/>
+                    <a:lstStyle/>
+                    <a:p>
+                      <a:pPr algn="l">
+                        <a:spcAft>
+                          <a:spcPts val="0"/>
+                        </a:spcAft>
+                        <a:buNone/>
+                      </a:pPr>
+                      <a:r>
+                        <a:rPr sz="1000" b="0">
+                          <a:solidFill>
+                            <a:srgbClr val="202B38"/>
+                          </a:solidFill>
+                          <a:latin typeface="Arial"/>
+                        </a:rPr>
+                        <a:t>the CLI's own loop</a:t>
+                      </a:r>
+                    </a:p>
+                  </a:txBody>
+                  <a:tcPr>
+                    <a:solidFill>
+                      <a:srgbClr val="FFFFFF"/>
+                    </a:solidFill>
+                  </a:tcPr>
+                </a:tc>
+                <a:tc>
+                  <a:txBody>
+                    <a:bodyPr wrap="square"/>
+                    <a:lstStyle/>
+                    <a:p>
+                      <a:pPr algn="l">
+                        <a:spcAft>
+                          <a:spcPts val="0"/>
+                        </a:spcAft>
+                        <a:buNone/>
+                      </a:pPr>
+                      <a:r>
+                        <a:rPr sz="1000" b="0">
+                          <a:solidFill>
+                            <a:srgbClr val="202B38"/>
+                          </a:solidFill>
+                          <a:latin typeface="Arial"/>
+                        </a:rPr>
+                        <a:t>-</a:t>
+                      </a:r>
+                    </a:p>
+                  </a:txBody>
+                  <a:tcPr>
+                    <a:solidFill>
+                      <a:srgbClr val="FFFFFF"/>
+                    </a:solidFill>
+                  </a:tcPr>
+                </a:tc>
+              </a:tr>
+              <a:tr h="457200">
+                <a:tc>
+                  <a:txBody>
+                    <a:bodyPr wrap="square"/>
+                    <a:lstStyle/>
+                    <a:p>
+                      <a:pPr algn="l">
+                        <a:spcAft>
+                          <a:spcPts val="0"/>
+                        </a:spcAft>
+                        <a:buNone/>
+                      </a:pPr>
+                      <a:r>
+                        <a:rPr sz="1000" b="0">
+                          <a:solidFill>
+                            <a:srgbClr val="202B38"/>
+                          </a:solidFill>
+                          <a:latin typeface="Arial"/>
+                        </a:rPr>
+                        <a:t>6 Guardrails</a:t>
+                      </a:r>
+                    </a:p>
+                  </a:txBody>
+                  <a:tcPr>
+                    <a:solidFill>
+                      <a:srgbClr val="EEF3FD"/>
+                    </a:solidFill>
+                  </a:tcPr>
+                </a:tc>
+                <a:tc>
+                  <a:txBody>
+                    <a:bodyPr wrap="square"/>
+                    <a:lstStyle/>
+                    <a:p>
+                      <a:pPr algn="l">
+                        <a:spcAft>
+                          <a:spcPts val="0"/>
+                        </a:spcAft>
+                        <a:buNone/>
+                      </a:pPr>
+                      <a:r>
+                        <a:rPr sz="1000" b="0">
+                          <a:solidFill>
+                            <a:srgbClr val="202B38"/>
+                          </a:solidFill>
+                          <a:latin typeface="Arial"/>
+                        </a:rPr>
+                        <a:t>the .env refusal inside read_file</a:t>
+                      </a:r>
+                    </a:p>
+                  </a:txBody>
+                  <a:tcPr>
+                    <a:solidFill>
+                      <a:srgbClr val="EEF3FD"/>
+                    </a:solidFill>
+                  </a:tcPr>
+                </a:tc>
+                <a:tc>
+                  <a:txBody>
+                    <a:bodyPr wrap="square"/>
+                    <a:lstStyle/>
+                    <a:p>
+                      <a:pPr algn="l">
+                        <a:spcAft>
+                          <a:spcPts val="0"/>
+                        </a:spcAft>
+                        <a:buNone/>
+                      </a:pPr>
+                      <a:r>
+                        <a:rPr sz="1000" b="0">
+                          <a:solidFill>
+                            <a:srgbClr val="202B38"/>
+                          </a:solidFill>
+                          <a:latin typeface="Arial"/>
+                        </a:rPr>
+                        <a:t>Hooks.before_tool, deny_risk</a:t>
+                      </a:r>
+                    </a:p>
+                  </a:txBody>
+                  <a:tcPr>
+                    <a:solidFill>
+                      <a:srgbClr val="EEF3FD"/>
+                    </a:solidFill>
+                  </a:tcPr>
+                </a:tc>
+                <a:tc>
+                  <a:txBody>
+                    <a:bodyPr wrap="square"/>
+                    <a:lstStyle/>
+                    <a:p>
+                      <a:pPr algn="l">
+                        <a:spcAft>
+                          <a:spcPts val="0"/>
+                        </a:spcAft>
+                        <a:buNone/>
+                      </a:pPr>
+                      <a:r>
+                        <a:rPr sz="1000" b="0">
+                          <a:solidFill>
+                            <a:srgbClr val="202B38"/>
+                          </a:solidFill>
+                          <a:latin typeface="Arial"/>
+                        </a:rPr>
+                        <a:t>settings.json hooks, permission modes</a:t>
+                      </a:r>
+                    </a:p>
+                  </a:txBody>
+                  <a:tcPr>
+                    <a:solidFill>
+                      <a:srgbClr val="EEF3FD"/>
+                    </a:solidFill>
+                  </a:tcPr>
+                </a:tc>
+                <a:tc>
+                  <a:txBody>
+                    <a:bodyPr wrap="square"/>
+                    <a:lstStyle/>
+                    <a:p>
+                      <a:pPr algn="l">
+                        <a:spcAft>
+                          <a:spcPts val="0"/>
+                        </a:spcAft>
+                        <a:buNone/>
+                      </a:pPr>
+                      <a:r>
+                        <a:rPr sz="1000" b="0">
+                          <a:solidFill>
+                            <a:srgbClr val="202B38"/>
+                          </a:solidFill>
+                          <a:latin typeface="Arial"/>
+                        </a:rPr>
+                        <a:t>unit job: pytest on the path guard</a:t>
+                      </a:r>
+                    </a:p>
+                  </a:txBody>
+                  <a:tcPr>
+                    <a:solidFill>
+                      <a:srgbClr val="EEF3FD"/>
+                    </a:solidFill>
+                  </a:tcPr>
+                </a:tc>
+              </a:tr>
+              <a:tr h="457200">
+                <a:tc>
+                  <a:txBody>
+                    <a:bodyPr wrap="square"/>
+                    <a:lstStyle/>
+                    <a:p>
+                      <a:pPr algn="l">
+                        <a:spcAft>
+                          <a:spcPts val="0"/>
+                        </a:spcAft>
+                        <a:buNone/>
+                      </a:pPr>
+                      <a:r>
+                        <a:rPr sz="1000" b="0">
+                          <a:solidFill>
+                            <a:srgbClr val="202B38"/>
+                          </a:solidFill>
+                          <a:latin typeface="Arial"/>
+                        </a:rPr>
+                        <a:t>7 Orchestration</a:t>
+                      </a:r>
+                    </a:p>
+                  </a:txBody>
+                  <a:tcPr>
+                    <a:solidFill>
+                      <a:srgbClr val="FFFFFF"/>
+                    </a:solidFill>
+                  </a:tcPr>
+                </a:tc>
+                <a:tc>
+                  <a:txBody>
+                    <a:bodyPr wrap="square"/>
+                    <a:lstStyle/>
+                    <a:p>
+                      <a:pPr algn="l">
+                        <a:spcAft>
+                          <a:spcPts val="0"/>
+                        </a:spcAft>
+                        <a:buNone/>
+                      </a:pPr>
+                      <a:r>
+                        <a:rPr sz="1000" b="0">
+                          <a:solidFill>
+                            <a:srgbClr val="202B38"/>
+                          </a:solidFill>
+                          <a:latin typeface="Arial"/>
+                        </a:rPr>
+                        <a:t>-</a:t>
+                      </a:r>
+                    </a:p>
+                  </a:txBody>
+                  <a:tcPr>
+                    <a:solidFill>
+                      <a:srgbClr val="FFFFFF"/>
+                    </a:solidFill>
+                  </a:tcPr>
+                </a:tc>
+                <a:tc>
+                  <a:txBody>
+                    <a:bodyPr wrap="square"/>
+                    <a:lstStyle/>
+                    <a:p>
+                      <a:pPr algn="l">
+                        <a:spcAft>
+                          <a:spcPts val="0"/>
+                        </a:spcAft>
+                        <a:buNone/>
+                      </a:pPr>
+                      <a:r>
+                        <a:rPr sz="1000" b="0">
+                          <a:solidFill>
+                            <a:srgbClr val="202B38"/>
+                          </a:solidFill>
+                          <a:latin typeface="Arial"/>
+                        </a:rPr>
+                        <a:t>five workflow patterns; delegate, TaskBoard</a:t>
+                      </a:r>
+                    </a:p>
+                  </a:txBody>
+                  <a:tcPr>
+                    <a:solidFill>
+                      <a:srgbClr val="FFFFFF"/>
+                    </a:solidFill>
+                  </a:tcPr>
+                </a:tc>
+                <a:tc>
+                  <a:txBody>
+                    <a:bodyPr wrap="square"/>
+                    <a:lstStyle/>
+                    <a:p>
+                      <a:pPr algn="l">
+                        <a:spcAft>
+                          <a:spcPts val="0"/>
+                        </a:spcAft>
+                        <a:buNone/>
+                      </a:pPr>
+                      <a:r>
+                        <a:rPr sz="1000" b="0">
+                          <a:solidFill>
+                            <a:srgbClr val="202B38"/>
+                          </a:solidFill>
+                          <a:latin typeface="Arial"/>
+                        </a:rPr>
+                        <a:t>.claude/agents/*.md, agent teams</a:t>
+                      </a:r>
+                    </a:p>
+                  </a:txBody>
+                  <a:tcPr>
+                    <a:solidFill>
+                      <a:srgbClr val="FFFFFF"/>
+                    </a:solidFill>
+                  </a:tcPr>
+                </a:tc>
+                <a:tc>
+                  <a:txBody>
+                    <a:bodyPr wrap="square"/>
+                    <a:lstStyle/>
+                    <a:p>
+                      <a:pPr algn="l">
+                        <a:spcAft>
+                          <a:spcPts val="0"/>
+                        </a:spcAft>
+                        <a:buNone/>
+                      </a:pPr>
+                      <a:r>
+                        <a:rPr sz="1000" b="0">
+                          <a:solidFill>
+                            <a:srgbClr val="202B38"/>
+                          </a:solidFill>
+                          <a:latin typeface="Arial"/>
+                        </a:rPr>
+                        <a:t>-</a:t>
+                      </a:r>
+                    </a:p>
+                  </a:txBody>
+                  <a:tcPr>
+                    <a:solidFill>
+                      <a:srgbClr val="FFFFFF"/>
+                    </a:solidFill>
+                  </a:tcPr>
+                </a:tc>
+              </a:tr>
+              <a:tr h="457200">
+                <a:tc>
+                  <a:txBody>
+                    <a:bodyPr wrap="square"/>
+                    <a:lstStyle/>
+                    <a:p>
+                      <a:pPr algn="l">
+                        <a:spcAft>
+                          <a:spcPts val="0"/>
+                        </a:spcAft>
+                        <a:buNone/>
+                      </a:pPr>
+                      <a:r>
+                        <a:rPr sz="1000" b="0">
+                          <a:solidFill>
+                            <a:srgbClr val="202B38"/>
+                          </a:solidFill>
+                          <a:latin typeface="Arial"/>
+                        </a:rPr>
+                        <a:t>8 Evals + observability</a:t>
+                      </a:r>
+                    </a:p>
+                  </a:txBody>
+                  <a:tcPr>
+                    <a:solidFill>
+                      <a:srgbClr val="EEF3FD"/>
+                    </a:solidFill>
+                  </a:tcPr>
+                </a:tc>
+                <a:tc>
+                  <a:txBody>
+                    <a:bodyPr wrap="square"/>
+                    <a:lstStyle/>
+                    <a:p>
+                      <a:pPr algn="l">
+                        <a:spcAft>
+                          <a:spcPts val="0"/>
+                        </a:spcAft>
+                        <a:buNone/>
+                      </a:pPr>
+                      <a:r>
+                        <a:rPr sz="1000" b="0">
+                          <a:solidFill>
+                            <a:srgbClr val="202B38"/>
+                          </a:solidFill>
+                          <a:latin typeface="Arial"/>
+                        </a:rPr>
+                        <a:t>usage, the cost table, the ledger</a:t>
+                      </a:r>
+                    </a:p>
+                  </a:txBody>
+                  <a:tcPr>
+                    <a:solidFill>
+                      <a:srgbClr val="EEF3FD"/>
+                    </a:solidFill>
+                  </a:tcPr>
+                </a:tc>
+                <a:tc>
+                  <a:txBody>
+                    <a:bodyPr wrap="square"/>
+                    <a:lstStyle/>
+                    <a:p>
+                      <a:pPr algn="l">
+                        <a:spcAft>
+                          <a:spcPts val="0"/>
+                        </a:spcAft>
+                        <a:buNone/>
+                      </a:pPr>
+                      <a:r>
+                        <a:rPr sz="1000" b="0">
+                          <a:solidFill>
+                            <a:srgbClr val="202B38"/>
+                          </a:solidFill>
+                          <a:latin typeface="Arial"/>
+                        </a:rPr>
+                        <a:t>Trace, evals/cases.yaml, run_evals</a:t>
+                      </a:r>
+                    </a:p>
+                  </a:txBody>
+                  <a:tcPr>
+                    <a:solidFill>
+                      <a:srgbClr val="EEF3FD"/>
+                    </a:solidFill>
+                  </a:tcPr>
+                </a:tc>
+                <a:tc>
+                  <a:txBody>
+                    <a:bodyPr wrap="square"/>
+                    <a:lstStyle/>
+                    <a:p>
+                      <a:pPr algn="l">
+                        <a:spcAft>
+                          <a:spcPts val="0"/>
+                        </a:spcAft>
+                        <a:buNone/>
+                      </a:pPr>
+                      <a:r>
+                        <a:rPr sz="1000" b="0">
+                          <a:solidFill>
+                            <a:srgbClr val="202B38"/>
+                          </a:solidFill>
+                          <a:latin typeface="Arial"/>
+                        </a:rPr>
+                        <a:t>/cost</a:t>
+                      </a:r>
+                    </a:p>
+                  </a:txBody>
+                  <a:tcPr>
+                    <a:solidFill>
+                      <a:srgbClr val="EEF3FD"/>
+                    </a:solidFill>
+                  </a:tcPr>
+                </a:tc>
+                <a:tc>
+                  <a:txBody>
+                    <a:bodyPr wrap="square"/>
+                    <a:lstStyle/>
+                    <a:p>
+                      <a:pPr algn="l">
+                        <a:spcAft>
+                          <a:spcPts val="0"/>
+                        </a:spcAft>
+                        <a:buNone/>
+                      </a:pPr>
+                      <a:r>
+                        <a:rPr sz="1000" b="0">
+                          <a:solidFill>
+                            <a:srgbClr val="202B38"/>
+                          </a:solidFill>
+                          <a:latin typeface="Arial"/>
+                        </a:rPr>
+                        <a:t>evals job, only with the secret: results.json</a:t>
                       </a:r>
                     </a:p>
                   </a:txBody>
@@ -11801,7 +14874,7 @@
                 </a:solidFill>
                 <a:latin typeface="Arial"/>
               </a:rPr>
-              <a:t>How to read it: left, the loop notebook 01 writes inline (same loop for the stand-in and for Claude); right, what each line does. Anthropic, Claude Agent SDK, Sep 2025.</a:t>
+              <a:t>How to read it: one row per piece, in the canon order; each cell names the real artefact you will touch; a dash means none of its own there.</a:t>
             </a:r>
           </a:p>
         </p:txBody>
@@ -11881,7 +14954,7 @@
                 </a:solidFill>
                 <a:latin typeface="Arial"/>
               </a:rPr>
-              <a:t>18</a:t>
+              <a:t>20</a:t>
             </a:r>
           </a:p>
         </p:txBody>
@@ -11894,7 +14967,7 @@
 </p:sld>
 </file>
 
-<file path=ppt/slides/slide19.xml><?xml version="1.0" encoding="utf-8"?>
+<file path=ppt/slides/slide21.xml><?xml version="1.0" encoding="utf-8"?>
 <p:sld xmlns:a="http://schemas.openxmlformats.org/drawingml/2006/main" xmlns:p="http://schemas.openxmlformats.org/presentationml/2006/main" xmlns:r="http://schemas.openxmlformats.org/officeDocument/2006/relationships">
   <p:cSld>
     <p:spTree>
@@ -12231,7 +15304,7 @@
                 </a:solidFill>
                 <a:latin typeface="Arial"/>
               </a:rPr>
-              <a:t>arXiv 2605.23950, May 2026; arXiv 2609.11987, Sep 2026. Our notebook shows the same effect at toy scale: the stand-in reference run is wrong without a harness and cited with it; the live Claude run varies and reports real tokens.</a:t>
+              <a:t>arXiv 2605.23950, May 2026; arXiv 2609.11987, Sep 2026. Notebook 01 shows the same effect at small scale: the same claude-opus-5 gave no checkable fact without a harness and the fact with its file inside one (recorded run, 30 Sep 2026).</a:t>
             </a:r>
           </a:p>
         </p:txBody>
@@ -12311,7 +15384,7 @@
                 </a:solidFill>
                 <a:latin typeface="Arial"/>
               </a:rPr>
-              <a:t>19</a:t>
+              <a:t>21</a:t>
             </a:r>
           </a:p>
         </p:txBody>
@@ -12324,7 +15397,7 @@
 </p:sld>
 </file>
 
-<file path=ppt/slides/slide2.xml><?xml version="1.0" encoding="utf-8"?>
+<file path=ppt/slides/slide22.xml><?xml version="1.0" encoding="utf-8"?>
 <p:sld xmlns:a="http://schemas.openxmlformats.org/drawingml/2006/main" xmlns:p="http://schemas.openxmlformats.org/presentationml/2006/main" xmlns:r="http://schemas.openxmlformats.org/officeDocument/2006/relationships">
   <p:cSld>
     <p:spTree>
@@ -12386,268 +15459,6 @@
         </p:nvSpPr>
         <p:spPr>
           <a:xfrm>
-            <a:off x="822960" y="1463040"/>
-            <a:ext cx="3657600" cy="2011680"/>
-          </a:xfrm>
-          <a:prstGeom prst="rect">
-            <a:avLst/>
-          </a:prstGeom>
-          <a:noFill/>
-        </p:spPr>
-        <p:txBody>
-          <a:bodyPr wrap="square">
-            <a:spAutoFit/>
-          </a:bodyPr>
-          <a:lstStyle/>
-          <a:p>
-            <a:pPr algn="l">
-              <a:spcAft>
-                <a:spcPts val="600"/>
-              </a:spcAft>
-              <a:buNone/>
-            </a:pPr>
-            <a:r>
-              <a:rPr sz="11000" b="1">
-                <a:solidFill>
-                  <a:srgbClr val="1E5EF3"/>
-                </a:solidFill>
-                <a:latin typeface="Arial"/>
-              </a:rPr>
-              <a:t>01</a:t>
-            </a:r>
-          </a:p>
-        </p:txBody>
-      </p:sp>
-      <p:sp>
-        <p:nvSpPr>
-          <p:cNvPr id="4" name="TextBox 3"/>
-          <p:cNvSpPr txBox="1"/>
-          <p:nvPr/>
-        </p:nvSpPr>
-        <p:spPr>
-          <a:xfrm>
-            <a:off x="868680" y="3566160"/>
-            <a:ext cx="10424160" cy="1280160"/>
-          </a:xfrm>
-          <a:prstGeom prst="rect">
-            <a:avLst/>
-          </a:prstGeom>
-          <a:noFill/>
-        </p:spPr>
-        <p:txBody>
-          <a:bodyPr wrap="square">
-            <a:spAutoFit/>
-          </a:bodyPr>
-          <a:lstStyle/>
-          <a:p>
-            <a:pPr algn="l">
-              <a:spcAft>
-                <a:spcPts val="600"/>
-              </a:spcAft>
-              <a:buNone/>
-            </a:pPr>
-            <a:r>
-              <a:rPr sz="3400" b="1">
-                <a:solidFill>
-                  <a:srgbClr val="FFFFFF"/>
-                </a:solidFill>
-                <a:latin typeface="Arial"/>
-              </a:rPr>
-              <a:t>Part 1 - The theory: from the prompt to the harness</a:t>
-            </a:r>
-          </a:p>
-        </p:txBody>
-      </p:sp>
-      <p:sp>
-        <p:nvSpPr>
-          <p:cNvPr id="5" name="TextBox 4"/>
-          <p:cNvSpPr txBox="1"/>
-          <p:nvPr/>
-        </p:nvSpPr>
-        <p:spPr>
-          <a:xfrm>
-            <a:off x="868680" y="4709160"/>
-            <a:ext cx="10058400" cy="914400"/>
-          </a:xfrm>
-          <a:prstGeom prst="rect">
-            <a:avLst/>
-          </a:prstGeom>
-          <a:noFill/>
-        </p:spPr>
-        <p:txBody>
-          <a:bodyPr wrap="square">
-            <a:spAutoFit/>
-          </a:bodyPr>
-          <a:lstStyle/>
-          <a:p>
-            <a:pPr algn="l">
-              <a:spcAft>
-                <a:spcPts val="600"/>
-              </a:spcAft>
-              <a:buNone/>
-            </a:pPr>
-            <a:r>
-              <a:rPr sz="1600" b="0">
-                <a:solidFill>
-                  <a:srgbClr val="B9D0FA"/>
-                </a:solidFill>
-                <a:latin typeface="Arial"/>
-              </a:rPr>
-              <a:t>Where the word comes from, what a harness is made of, and the evidence that it changes results.</a:t>
-            </a:r>
-          </a:p>
-        </p:txBody>
-      </p:sp>
-      <p:sp>
-        <p:nvSpPr>
-          <p:cNvPr id="6" name="TextBox 5"/>
-          <p:cNvSpPr txBox="1"/>
-          <p:nvPr/>
-        </p:nvSpPr>
-        <p:spPr>
-          <a:xfrm>
-            <a:off x="548640" y="6473952"/>
-            <a:ext cx="7315200" cy="292608"/>
-          </a:xfrm>
-          <a:prstGeom prst="rect">
-            <a:avLst/>
-          </a:prstGeom>
-          <a:noFill/>
-        </p:spPr>
-        <p:txBody>
-          <a:bodyPr wrap="square">
-            <a:spAutoFit/>
-          </a:bodyPr>
-          <a:lstStyle/>
-          <a:p>
-            <a:pPr algn="l">
-              <a:spcAft>
-                <a:spcPts val="600"/>
-              </a:spcAft>
-              <a:buNone/>
-            </a:pPr>
-            <a:r>
-              <a:rPr sz="900" b="0">
-                <a:solidFill>
-                  <a:srgbClr val="B9D0FA"/>
-                </a:solidFill>
-                <a:latin typeface="Arial"/>
-              </a:rPr>
-              <a:t>M5 Session 1 - From Prompts to Harnesses</a:t>
-            </a:r>
-          </a:p>
-        </p:txBody>
-      </p:sp>
-      <p:sp>
-        <p:nvSpPr>
-          <p:cNvPr id="7" name="TextBox 6"/>
-          <p:cNvSpPr txBox="1"/>
-          <p:nvPr/>
-        </p:nvSpPr>
-        <p:spPr>
-          <a:xfrm>
-            <a:off x="11292840" y="6473952"/>
-            <a:ext cx="548640" cy="292608"/>
-          </a:xfrm>
-          <a:prstGeom prst="rect">
-            <a:avLst/>
-          </a:prstGeom>
-          <a:noFill/>
-        </p:spPr>
-        <p:txBody>
-          <a:bodyPr wrap="square">
-            <a:spAutoFit/>
-          </a:bodyPr>
-          <a:lstStyle/>
-          <a:p>
-            <a:pPr algn="r">
-              <a:spcAft>
-                <a:spcPts val="600"/>
-              </a:spcAft>
-              <a:buNone/>
-            </a:pPr>
-            <a:r>
-              <a:rPr sz="900" b="0">
-                <a:solidFill>
-                  <a:srgbClr val="B9D0FA"/>
-                </a:solidFill>
-                <a:latin typeface="Arial"/>
-              </a:rPr>
-              <a:t>2</a:t>
-            </a:r>
-          </a:p>
-        </p:txBody>
-      </p:sp>
-    </p:spTree>
-  </p:cSld>
-  <p:clrMapOvr>
-    <a:masterClrMapping/>
-  </p:clrMapOvr>
-</p:sld>
-</file>
-
-<file path=ppt/slides/slide20.xml><?xml version="1.0" encoding="utf-8"?>
-<p:sld xmlns:a="http://schemas.openxmlformats.org/drawingml/2006/main" xmlns:p="http://schemas.openxmlformats.org/presentationml/2006/main" xmlns:r="http://schemas.openxmlformats.org/officeDocument/2006/relationships">
-  <p:cSld>
-    <p:spTree>
-      <p:nvGrpSpPr>
-        <p:cNvPr id="1" name=""/>
-        <p:cNvGrpSpPr/>
-        <p:nvPr/>
-      </p:nvGrpSpPr>
-      <p:grpSpPr/>
-      <p:sp>
-        <p:nvSpPr>
-          <p:cNvPr id="2" name="Rectangle 1"/>
-          <p:cNvSpPr/>
-          <p:nvPr/>
-        </p:nvSpPr>
-        <p:spPr>
-          <a:xfrm>
-            <a:off x="0" y="0"/>
-            <a:ext cx="12191695" cy="6858000"/>
-          </a:xfrm>
-          <a:prstGeom prst="rect">
-            <a:avLst/>
-          </a:prstGeom>
-          <a:solidFill>
-            <a:srgbClr val="0A2540"/>
-          </a:solidFill>
-          <a:ln>
-            <a:noFill/>
-          </a:ln>
-          <a:effectLst/>
-        </p:spPr>
-        <p:style>
-          <a:lnRef idx="1">
-            <a:schemeClr val="accent1"/>
-          </a:lnRef>
-          <a:fillRef idx="3">
-            <a:schemeClr val="accent1"/>
-          </a:fillRef>
-          <a:effectRef idx="2">
-            <a:schemeClr val="accent1"/>
-          </a:effectRef>
-          <a:fontRef idx="minor">
-            <a:schemeClr val="lt1"/>
-          </a:fontRef>
-        </p:style>
-        <p:txBody>
-          <a:bodyPr rtlCol="0" anchor="ctr"/>
-          <a:lstStyle/>
-          <a:p>
-            <a:pPr algn="ctr"/>
-          </a:p>
-        </p:txBody>
-      </p:sp>
-      <p:sp>
-        <p:nvSpPr>
-          <p:cNvPr id="3" name="TextBox 2"/>
-          <p:cNvSpPr txBox="1"/>
-          <p:nvPr/>
-        </p:nvSpPr>
-        <p:spPr>
-          <a:xfrm>
             <a:off x="914400" y="1280160"/>
             <a:ext cx="10332720" cy="1097280"/>
           </a:xfrm>
@@ -12818,7 +15629,7 @@
                 </a:solidFill>
                 <a:latin typeface="Arial"/>
               </a:rPr>
-              <a:t>Notebook 01: the same question three ways; only the harness answers right, with a source, at ~76x the tokens</a:t>
+              <a:t>Notebook 01: one question three ways on the raw SDK; only the forty-line loop gives the fact and the file, at 4,113 input tokens against 39</a:t>
             </a:r>
           </a:p>
           <a:p>
@@ -12838,7 +15649,7 @@
                 </a:solidFill>
                 <a:latin typeface="Arial"/>
               </a:rPr>
-              <a:t>Two engines, one harness: model_for(role) returns Claude when a key is present, the stand-in otherwise - notebook 01 runs either way</a:t>
+              <a:t>The SDK ships the loop (tool_runner); the harness is everything around it, and Session 3 builds it as a package</a:t>
             </a:r>
           </a:p>
         </p:txBody>
@@ -12958,7 +15769,7 @@
                 </a:solidFill>
                 <a:latin typeface="Arial"/>
               </a:rPr>
-              <a:t>20</a:t>
+              <a:t>22</a:t>
             </a:r>
           </a:p>
         </p:txBody>
@@ -16120,7 +18931,7 @@
                 </a:solidFill>
                 <a:latin typeface="Arial"/>
               </a:rPr>
-              <a:t>Illustration. How to read it: the numbered order is the canon order used in every deck and in the harness library. Pieces 1-4 are Session 2; 5, 6, 8 are Session 3; 7 is Session 4.</a:t>
+              <a:t>Illustration. How to read it: the numbered order is the canon order of every deck and of the harness package. Pieces 1-4: Session 2; 5, 6, 8: Session 3; 7: Sessions 3-4.</a:t>
             </a:r>
           </a:p>
         </p:txBody>
